--- a/lectures/04_transformers/04_transformers.pptx
+++ b/lectures/04_transformers/04_transformers.pptx
@@ -145,7 +145,7 @@
 <file path=ppt/revisionInfo.xml><?xml version="1.0" encoding="utf-8"?>
 <p1510:revInfo xmlns:a="http://schemas.openxmlformats.org/drawingml/2006/main" xmlns:r="http://schemas.openxmlformats.org/officeDocument/2006/relationships" xmlns:p1510="http://schemas.microsoft.com/office/powerpoint/2015/10/main">
   <p1510:revLst>
-    <p1510:client id="{8425E796-ECDC-7832-F2C2-7D6A2DB0A0E4}" v="26" dt="2025-05-23T15:49:57.775"/>
+    <p1510:client id="{C2D22C5A-452D-C561-45E7-00A67D7BA382}" v="231" dt="2026-03-17T12:37:01.779"/>
   </p1510:revLst>
 </p1510:revInfo>
 </file>
@@ -184,7 +184,7 @@
           <a:p>
             <a:r>
               <a:rPr lang="en-US"/>
-              <a:t>Dr. Daniel Ruffinelli - FSS 2025</a:t>
+              <a:t>Dr. Daniel Ruffinelli - FSS 2026</a:t>
             </a:r>
             <a:endParaRPr/>
           </a:p>
@@ -388,7 +388,7 @@
           <a:p>
             <a:r>
               <a:rPr lang="en-US"/>
-              <a:t>Dr. Daniel Ruffinelli - FSS 2025</a:t>
+              <a:t>Dr. Daniel Ruffinelli - FSS 2026</a:t>
             </a:r>
             <a:endParaRPr/>
           </a:p>
@@ -668,7 +668,7 @@
           <a:p>
             <a:r>
               <a:rPr lang="en-US"/>
-              <a:t>Dr. Daniel Ruffinelli - FSS 2025</a:t>
+              <a:t>Dr. Daniel Ruffinelli - FSS 2026</a:t>
             </a:r>
             <a:endParaRPr/>
           </a:p>
@@ -1024,7 +1024,7 @@
           <a:p>
             <a:r>
               <a:rPr lang="en-US"/>
-              <a:t>Dr. Daniel Ruffinelli - FSS 2025</a:t>
+              <a:t>Dr. Daniel Ruffinelli - FSS 2026</a:t>
             </a:r>
             <a:endParaRPr/>
           </a:p>
@@ -1114,7 +1114,7 @@
           <a:p>
             <a:r>
               <a:rPr lang="en-US"/>
-              <a:t>Dr. Daniel Ruffinelli - FSS 2025</a:t>
+              <a:t>Dr. Daniel Ruffinelli - FSS 2026</a:t>
             </a:r>
             <a:endParaRPr/>
           </a:p>
@@ -1280,7 +1280,7 @@
           <a:p>
             <a:r>
               <a:rPr lang="en-US"/>
-              <a:t>Dr. Daniel Ruffinelli - FSS 2025</a:t>
+              <a:t>Dr. Daniel Ruffinelli - FSS 2026</a:t>
             </a:r>
             <a:endParaRPr/>
           </a:p>
@@ -1446,7 +1446,7 @@
           <a:p>
             <a:r>
               <a:rPr lang="en-US"/>
-              <a:t>Dr. Daniel Ruffinelli - FSS 2025</a:t>
+              <a:t>Dr. Daniel Ruffinelli - FSS 2026</a:t>
             </a:r>
             <a:endParaRPr/>
           </a:p>
@@ -1650,7 +1650,7 @@
           <a:p>
             <a:r>
               <a:rPr lang="en-US"/>
-              <a:t>Dr. Daniel Ruffinelli - FSS 2025</a:t>
+              <a:t>Dr. Daniel Ruffinelli - FSS 2026</a:t>
             </a:r>
             <a:endParaRPr/>
           </a:p>
@@ -1778,7 +1778,7 @@
           <a:p>
             <a:r>
               <a:rPr lang="en-US"/>
-              <a:t>Dr. Daniel Ruffinelli - FSS 2025</a:t>
+              <a:t>Dr. Daniel Ruffinelli - FSS 2026</a:t>
             </a:r>
             <a:endParaRPr/>
           </a:p>
@@ -1906,7 +1906,7 @@
           <a:p>
             <a:r>
               <a:rPr lang="en-US"/>
-              <a:t>Dr. Daniel Ruffinelli - FSS 2025</a:t>
+              <a:t>Dr. Daniel Ruffinelli - FSS 2026</a:t>
             </a:r>
             <a:endParaRPr/>
           </a:p>
@@ -2148,7 +2148,7 @@
           <a:p>
             <a:r>
               <a:rPr lang="en-US"/>
-              <a:t>Dr. Daniel Ruffinelli - FSS 2025</a:t>
+              <a:t>Dr. Daniel Ruffinelli - FSS 2026</a:t>
             </a:r>
             <a:endParaRPr/>
           </a:p>
@@ -2314,7 +2314,7 @@
           <a:p>
             <a:r>
               <a:rPr lang="en-US"/>
-              <a:t>Dr. Daniel Ruffinelli - FSS 2025</a:t>
+              <a:t>Dr. Daniel Ruffinelli - FSS 2026</a:t>
             </a:r>
             <a:endParaRPr/>
           </a:p>
@@ -2556,7 +2556,7 @@
           <a:p>
             <a:r>
               <a:rPr lang="en-US"/>
-              <a:t>Dr. Daniel Ruffinelli - FSS 2025</a:t>
+              <a:t>Dr. Daniel Ruffinelli - FSS 2026</a:t>
             </a:r>
             <a:endParaRPr/>
           </a:p>
@@ -2798,7 +2798,7 @@
           <a:p>
             <a:r>
               <a:rPr lang="en-US"/>
-              <a:t>Dr. Daniel Ruffinelli - FSS 2025</a:t>
+              <a:t>Dr. Daniel Ruffinelli - FSS 2026</a:t>
             </a:r>
             <a:endParaRPr/>
           </a:p>
@@ -3002,7 +3002,7 @@
           <a:p>
             <a:r>
               <a:rPr lang="en-US"/>
-              <a:t>Dr. Daniel Ruffinelli - FSS 2025</a:t>
+              <a:t>Dr. Daniel Ruffinelli - FSS 2026</a:t>
             </a:r>
             <a:endParaRPr/>
           </a:p>
@@ -3282,7 +3282,7 @@
           <a:p>
             <a:r>
               <a:rPr lang="en-US"/>
-              <a:t>Dr. Daniel Ruffinelli - FSS 2025</a:t>
+              <a:t>Dr. Daniel Ruffinelli - FSS 2026</a:t>
             </a:r>
             <a:endParaRPr/>
           </a:p>
@@ -3638,7 +3638,7 @@
           <a:p>
             <a:r>
               <a:rPr lang="en-US"/>
-              <a:t>Dr. Daniel Ruffinelli - FSS 2025</a:t>
+              <a:t>Dr. Daniel Ruffinelli - FSS 2026</a:t>
             </a:r>
             <a:endParaRPr/>
           </a:p>
@@ -3804,7 +3804,7 @@
           <a:p>
             <a:r>
               <a:rPr lang="en-US"/>
-              <a:t>Dr. Daniel Ruffinelli - FSS 2025</a:t>
+              <a:t>Dr. Daniel Ruffinelli - FSS 2026</a:t>
             </a:r>
             <a:endParaRPr/>
           </a:p>
@@ -4008,7 +4008,7 @@
           <a:p>
             <a:r>
               <a:rPr lang="en-US"/>
-              <a:t>Dr. Daniel Ruffinelli - FSS 2025</a:t>
+              <a:t>Dr. Daniel Ruffinelli - FSS 2026</a:t>
             </a:r>
             <a:endParaRPr/>
           </a:p>
@@ -4136,7 +4136,7 @@
           <a:p>
             <a:r>
               <a:rPr lang="en-US"/>
-              <a:t>Dr. Daniel Ruffinelli - FSS 2025</a:t>
+              <a:t>Dr. Daniel Ruffinelli - FSS 2026</a:t>
             </a:r>
             <a:endParaRPr/>
           </a:p>
@@ -4264,7 +4264,7 @@
           <a:p>
             <a:r>
               <a:rPr lang="en-US"/>
-              <a:t>Dr. Daniel Ruffinelli - FSS 2025</a:t>
+              <a:t>Dr. Daniel Ruffinelli - FSS 2026</a:t>
             </a:r>
             <a:endParaRPr/>
           </a:p>
@@ -4506,7 +4506,7 @@
           <a:p>
             <a:r>
               <a:rPr lang="en-US"/>
-              <a:t>Dr. Daniel Ruffinelli - FSS 2025</a:t>
+              <a:t>Dr. Daniel Ruffinelli - FSS 2026</a:t>
             </a:r>
             <a:endParaRPr/>
           </a:p>
@@ -4748,7 +4748,7 @@
           <a:p>
             <a:r>
               <a:rPr lang="en-US"/>
-              <a:t>Dr. Daniel Ruffinelli - FSS 2025</a:t>
+              <a:t>Dr. Daniel Ruffinelli - FSS 2026</a:t>
             </a:r>
             <a:endParaRPr/>
           </a:p>
@@ -4990,7 +4990,7 @@
           <a:p>
             <a:r>
               <a:rPr lang="en-US"/>
-              <a:t>Dr. Daniel Ruffinelli - FSS 2025</a:t>
+              <a:t>Dr. Daniel Ruffinelli - FSS 2026</a:t>
             </a:r>
             <a:endParaRPr/>
           </a:p>
@@ -5265,7 +5265,7 @@
                 </a:solidFill>
                 <a:latin typeface="Calibri"/>
               </a:rPr>
-              <a:t>Dr. Daniel Ruffinelli - FSS 2025</a:t>
+              <a:t>Dr. Daniel Ruffinelli - FSS 2026</a:t>
             </a:r>
             <a:endParaRPr lang="en-US" sz="1200" b="0" strike="noStrike" spc="-1">
               <a:latin typeface="Times New Roman"/>
@@ -6214,7 +6214,7 @@
                 </a:solidFill>
                 <a:latin typeface="Calibri"/>
               </a:rPr>
-              <a:t>Dr. Daniel Ruffinelli - FSS 2025</a:t>
+              <a:t>Dr. Daniel Ruffinelli - FSS 2026</a:t>
             </a:r>
             <a:endParaRPr lang="en-US" sz="1200" b="0" strike="noStrike" spc="-1">
               <a:latin typeface="Times New Roman"/>
@@ -6767,7 +6767,7 @@
                 </a:solidFill>
                 <a:latin typeface="Calibri"/>
               </a:rPr>
-              <a:t>Dr. Daniel Ruffinelli - FSS 2025</a:t>
+              <a:t>Dr. Daniel Ruffinelli - FSS 2026</a:t>
             </a:r>
             <a:endParaRPr lang="en-US" sz="1200" b="0" strike="noStrike" spc="-1">
               <a:latin typeface="Times New Roman"/>
@@ -7104,7 +7104,7 @@
                 </a:solidFill>
                 <a:latin typeface="Calibri"/>
               </a:rPr>
-              <a:t>Dr. Daniel Ruffinelli - FSS 2025</a:t>
+              <a:t>Dr. Daniel Ruffinelli - FSS 2026</a:t>
             </a:r>
             <a:endParaRPr lang="en-US" sz="1200" b="0" strike="noStrike" spc="-1">
               <a:latin typeface="Times New Roman"/>
@@ -8644,7 +8644,7 @@
                 </a:solidFill>
                 <a:latin typeface="Calibri"/>
               </a:rPr>
-              <a:t>Dr. Daniel Ruffinelli - FSS 2025</a:t>
+              <a:t>Dr. Daniel Ruffinelli - FSS 2026</a:t>
             </a:r>
             <a:endParaRPr lang="en-US" sz="1200" b="0" strike="noStrike" spc="-1">
               <a:latin typeface="Times New Roman"/>
@@ -8949,7 +8949,7 @@
                 </a:solidFill>
                 <a:latin typeface="Calibri"/>
               </a:rPr>
-              <a:t>Dr. Daniel Ruffinelli - FSS 2025</a:t>
+              <a:t>Dr. Daniel Ruffinelli - FSS 2026</a:t>
             </a:r>
             <a:endParaRPr lang="en-US" sz="1200" b="0" strike="noStrike" spc="-1">
               <a:latin typeface="Times New Roman"/>
@@ -9205,6 +9205,30 @@
               </a:solidFill>
               <a:latin typeface="Calibri"/>
             </a:endParaRPr>
+          </a:p>
+          <a:p>
+            <a:pPr marL="800100" lvl="1" indent="-285750">
+              <a:lnSpc>
+                <a:spcPct val="100000"/>
+              </a:lnSpc>
+              <a:spcBef>
+                <a:spcPts val="360"/>
+              </a:spcBef>
+              <a:buClr>
+                <a:srgbClr val="003056"/>
+              </a:buClr>
+              <a:buFont typeface="Arial"/>
+              <a:buChar char="•"/>
+            </a:pPr>
+            <a:r>
+              <a:rPr lang="en-US" sz="1800" spc="-1" dirty="0">
+                <a:solidFill>
+                  <a:srgbClr val="003056"/>
+                </a:solidFill>
+                <a:latin typeface="Calibri"/>
+              </a:rPr>
+              <a:t>State-of-the-art text encoders used for retrieval (see our IR course)</a:t>
+            </a:r>
           </a:p>
           <a:p>
             <a:pPr marL="399415" indent="-342900">
@@ -9733,33 +9757,15 @@
                                   </p:childTnLst>
                                 </p:cTn>
                               </p:par>
-                            </p:childTnLst>
-                          </p:cTn>
-                        </p:par>
-                      </p:childTnLst>
-                    </p:cTn>
-                  </p:par>
-                  <p:par>
-                    <p:cTn id="19" fill="hold">
-                      <p:stCondLst>
-                        <p:cond delay="indefinite"/>
-                      </p:stCondLst>
-                      <p:childTnLst>
-                        <p:par>
-                          <p:cTn id="20" fill="hold">
-                            <p:stCondLst>
-                              <p:cond delay="0"/>
-                            </p:stCondLst>
-                            <p:childTnLst>
                               <p:par>
-                                <p:cTn id="21" presetID="22" presetClass="entr" presetSubtype="4" fill="hold" nodeType="clickEffect">
+                                <p:cTn id="19" presetID="22" presetClass="entr" presetSubtype="4" fill="hold" nodeType="withEffect">
                                   <p:stCondLst>
                                     <p:cond delay="0"/>
                                   </p:stCondLst>
                                   <p:childTnLst>
                                     <p:set>
                                       <p:cBhvr>
-                                        <p:cTn id="22" dur="1" fill="hold">
+                                        <p:cTn id="20" dur="1" fill="hold">
                                           <p:stCondLst>
                                             <p:cond delay="0"/>
                                           </p:stCondLst>
@@ -9781,7 +9787,7 @@
                                     </p:set>
                                     <p:animEffect transition="in" filter="wipe(down)">
                                       <p:cBhvr additive="repl">
-                                        <p:cTn id="23" dur="500"/>
+                                        <p:cTn id="21" dur="500"/>
                                         <p:tgtEl>
                                           <p:spTgt spid="124">
                                             <p:txEl>
@@ -9801,26 +9807,26 @@
                     </p:cTn>
                   </p:par>
                   <p:par>
-                    <p:cTn id="24" fill="hold">
+                    <p:cTn id="22" fill="hold">
                       <p:stCondLst>
                         <p:cond delay="indefinite"/>
                       </p:stCondLst>
                       <p:childTnLst>
                         <p:par>
-                          <p:cTn id="25" fill="hold">
+                          <p:cTn id="23" fill="hold">
                             <p:stCondLst>
                               <p:cond delay="0"/>
                             </p:stCondLst>
                             <p:childTnLst>
                               <p:par>
-                                <p:cTn id="26" presetID="22" presetClass="entr" presetSubtype="4" fill="hold" nodeType="clickEffect">
+                                <p:cTn id="24" presetID="22" presetClass="entr" presetSubtype="4" fill="hold" nodeType="clickEffect">
                                   <p:stCondLst>
                                     <p:cond delay="0"/>
                                   </p:stCondLst>
                                   <p:childTnLst>
                                     <p:set>
                                       <p:cBhvr>
-                                        <p:cTn id="27" dur="1" fill="hold">
+                                        <p:cTn id="25" dur="1" fill="hold">
                                           <p:stCondLst>
                                             <p:cond delay="0"/>
                                           </p:stCondLst>
@@ -9842,7 +9848,7 @@
                                     </p:set>
                                     <p:animEffect transition="in" filter="wipe(down)">
                                       <p:cBhvr additive="repl">
-                                        <p:cTn id="28" dur="500"/>
+                                        <p:cTn id="26" dur="500"/>
                                         <p:tgtEl>
                                           <p:spTgt spid="124">
                                             <p:txEl>
@@ -9855,8 +9861,26 @@
                                   </p:childTnLst>
                                 </p:cTn>
                               </p:par>
+                            </p:childTnLst>
+                          </p:cTn>
+                        </p:par>
+                      </p:childTnLst>
+                    </p:cTn>
+                  </p:par>
+                  <p:par>
+                    <p:cTn id="27" fill="hold">
+                      <p:stCondLst>
+                        <p:cond delay="indefinite"/>
+                      </p:stCondLst>
+                      <p:childTnLst>
+                        <p:par>
+                          <p:cTn id="28" fill="hold">
+                            <p:stCondLst>
+                              <p:cond delay="0"/>
+                            </p:stCondLst>
+                            <p:childTnLst>
                               <p:par>
-                                <p:cTn id="29" presetID="22" presetClass="entr" presetSubtype="4" fill="hold" nodeType="withEffect">
+                                <p:cTn id="29" presetID="22" presetClass="entr" presetSubtype="4" fill="hold" nodeType="clickEffect">
                                   <p:stCondLst>
                                     <p:cond delay="0"/>
                                   </p:stCondLst>
@@ -10027,6 +10051,49 @@
                                   </p:childTnLst>
                                 </p:cTn>
                               </p:par>
+                              <p:par>
+                                <p:cTn id="41" presetID="22" presetClass="entr" presetSubtype="4" fill="hold" nodeType="withEffect">
+                                  <p:stCondLst>
+                                    <p:cond delay="0"/>
+                                  </p:stCondLst>
+                                  <p:childTnLst>
+                                    <p:set>
+                                      <p:cBhvr>
+                                        <p:cTn id="42" dur="1" fill="hold">
+                                          <p:stCondLst>
+                                            <p:cond delay="0"/>
+                                          </p:stCondLst>
+                                        </p:cTn>
+                                        <p:tgtEl>
+                                          <p:spTgt spid="124">
+                                            <p:txEl>
+                                              <p:pRg st="10" end="10"/>
+                                            </p:txEl>
+                                          </p:spTgt>
+                                        </p:tgtEl>
+                                        <p:attrNameLst>
+                                          <p:attrName>style.visibility</p:attrName>
+                                        </p:attrNameLst>
+                                      </p:cBhvr>
+                                      <p:to>
+                                        <p:strVal val="visible"/>
+                                      </p:to>
+                                    </p:set>
+                                    <p:animEffect transition="in" filter="wipe(down)">
+                                      <p:cBhvr additive="repl">
+                                        <p:cTn id="43" dur="500"/>
+                                        <p:tgtEl>
+                                          <p:spTgt spid="124">
+                                            <p:txEl>
+                                              <p:pRg st="10" end="10"/>
+                                            </p:txEl>
+                                          </p:spTgt>
+                                        </p:tgtEl>
+                                      </p:cBhvr>
+                                    </p:animEffect>
+                                  </p:childTnLst>
+                                </p:cTn>
+                              </p:par>
                             </p:childTnLst>
                           </p:cTn>
                         </p:par>
@@ -10034,62 +10101,19 @@
                     </p:cTn>
                   </p:par>
                   <p:par>
-                    <p:cTn id="41" fill="hold">
+                    <p:cTn id="44" fill="hold">
                       <p:stCondLst>
                         <p:cond delay="indefinite"/>
                       </p:stCondLst>
                       <p:childTnLst>
                         <p:par>
-                          <p:cTn id="42" fill="hold">
+                          <p:cTn id="45" fill="hold">
                             <p:stCondLst>
                               <p:cond delay="0"/>
                             </p:stCondLst>
                             <p:childTnLst>
                               <p:par>
-                                <p:cTn id="43" presetID="22" presetClass="entr" presetSubtype="4" fill="hold" nodeType="clickEffect">
-                                  <p:stCondLst>
-                                    <p:cond delay="0"/>
-                                  </p:stCondLst>
-                                  <p:childTnLst>
-                                    <p:set>
-                                      <p:cBhvr>
-                                        <p:cTn id="44" dur="1" fill="hold">
-                                          <p:stCondLst>
-                                            <p:cond delay="0"/>
-                                          </p:stCondLst>
-                                        </p:cTn>
-                                        <p:tgtEl>
-                                          <p:spTgt spid="124">
-                                            <p:txEl>
-                                              <p:pRg st="10" end="10"/>
-                                            </p:txEl>
-                                          </p:spTgt>
-                                        </p:tgtEl>
-                                        <p:attrNameLst>
-                                          <p:attrName>style.visibility</p:attrName>
-                                        </p:attrNameLst>
-                                      </p:cBhvr>
-                                      <p:to>
-                                        <p:strVal val="visible"/>
-                                      </p:to>
-                                    </p:set>
-                                    <p:animEffect transition="in" filter="wipe(down)">
-                                      <p:cBhvr additive="repl">
-                                        <p:cTn id="45" dur="500"/>
-                                        <p:tgtEl>
-                                          <p:spTgt spid="124">
-                                            <p:txEl>
-                                              <p:pRg st="10" end="10"/>
-                                            </p:txEl>
-                                          </p:spTgt>
-                                        </p:tgtEl>
-                                      </p:cBhvr>
-                                    </p:animEffect>
-                                  </p:childTnLst>
-                                </p:cTn>
-                              </p:par>
-                              <p:par>
-                                <p:cTn id="46" presetID="22" presetClass="entr" presetSubtype="4" fill="hold" nodeType="withEffect">
+                                <p:cTn id="46" presetID="22" presetClass="entr" presetSubtype="4" fill="hold" nodeType="clickEffect">
                                   <p:stCondLst>
                                     <p:cond delay="0"/>
                                   </p:stCondLst>
@@ -10123,6 +10147,49 @@
                                           <p:spTgt spid="124">
                                             <p:txEl>
                                               <p:pRg st="11" end="11"/>
+                                            </p:txEl>
+                                          </p:spTgt>
+                                        </p:tgtEl>
+                                      </p:cBhvr>
+                                    </p:animEffect>
+                                  </p:childTnLst>
+                                </p:cTn>
+                              </p:par>
+                              <p:par>
+                                <p:cTn id="49" presetID="22" presetClass="entr" presetSubtype="4" fill="hold" nodeType="withEffect">
+                                  <p:stCondLst>
+                                    <p:cond delay="0"/>
+                                  </p:stCondLst>
+                                  <p:childTnLst>
+                                    <p:set>
+                                      <p:cBhvr>
+                                        <p:cTn id="50" dur="1" fill="hold">
+                                          <p:stCondLst>
+                                            <p:cond delay="0"/>
+                                          </p:stCondLst>
+                                        </p:cTn>
+                                        <p:tgtEl>
+                                          <p:spTgt spid="124">
+                                            <p:txEl>
+                                              <p:pRg st="12" end="12"/>
+                                            </p:txEl>
+                                          </p:spTgt>
+                                        </p:tgtEl>
+                                        <p:attrNameLst>
+                                          <p:attrName>style.visibility</p:attrName>
+                                        </p:attrNameLst>
+                                      </p:cBhvr>
+                                      <p:to>
+                                        <p:strVal val="visible"/>
+                                      </p:to>
+                                    </p:set>
+                                    <p:animEffect transition="in" filter="wipe(down)">
+                                      <p:cBhvr additive="repl">
+                                        <p:cTn id="51" dur="500"/>
+                                        <p:tgtEl>
+                                          <p:spTgt spid="124">
+                                            <p:txEl>
+                                              <p:pRg st="12" end="12"/>
                                             </p:txEl>
                                           </p:spTgt>
                                         </p:tgtEl>
@@ -10287,7 +10354,7 @@
                 </a:solidFill>
                 <a:latin typeface="Calibri"/>
               </a:rPr>
-              <a:t>Dr. Daniel Ruffinelli - FSS 2025</a:t>
+              <a:t>Dr. Daniel Ruffinelli - FSS 2026</a:t>
             </a:r>
             <a:endParaRPr lang="en-US" sz="1200" b="0" strike="noStrike" spc="-1">
               <a:latin typeface="Times New Roman"/>
@@ -11681,15 +11748,33 @@
                                   </p:childTnLst>
                                 </p:cTn>
                               </p:par>
+                            </p:childTnLst>
+                          </p:cTn>
+                        </p:par>
+                      </p:childTnLst>
+                    </p:cTn>
+                  </p:par>
+                  <p:par>
+                    <p:cTn id="26" fill="hold">
+                      <p:stCondLst>
+                        <p:cond delay="indefinite"/>
+                      </p:stCondLst>
+                      <p:childTnLst>
+                        <p:par>
+                          <p:cTn id="27" fill="hold">
+                            <p:stCondLst>
+                              <p:cond delay="0"/>
+                            </p:stCondLst>
+                            <p:childTnLst>
                               <p:par>
-                                <p:cTn id="26" presetID="22" presetClass="entr" presetSubtype="4" fill="hold" nodeType="withEffect">
+                                <p:cTn id="28" presetID="22" presetClass="entr" presetSubtype="4" fill="hold" nodeType="clickEffect">
                                   <p:stCondLst>
                                     <p:cond delay="0"/>
                                   </p:stCondLst>
                                   <p:childTnLst>
                                     <p:set>
                                       <p:cBhvr>
-                                        <p:cTn id="27" dur="1" fill="hold">
+                                        <p:cTn id="29" dur="1" fill="hold">
                                           <p:stCondLst>
                                             <p:cond delay="0"/>
                                           </p:stCondLst>
@@ -11711,11 +11796,54 @@
                                     </p:set>
                                     <p:animEffect transition="in" filter="wipe(down)">
                                       <p:cBhvr additive="repl">
-                                        <p:cTn id="28" dur="500"/>
+                                        <p:cTn id="30" dur="500"/>
                                         <p:tgtEl>
                                           <p:spTgt spid="127">
                                             <p:txEl>
                                               <p:pRg st="5" end="5"/>
+                                            </p:txEl>
+                                          </p:spTgt>
+                                        </p:tgtEl>
+                                      </p:cBhvr>
+                                    </p:animEffect>
+                                  </p:childTnLst>
+                                </p:cTn>
+                              </p:par>
+                              <p:par>
+                                <p:cTn id="31" presetID="22" presetClass="entr" presetSubtype="4" fill="hold" nodeType="withEffect">
+                                  <p:stCondLst>
+                                    <p:cond delay="0"/>
+                                  </p:stCondLst>
+                                  <p:childTnLst>
+                                    <p:set>
+                                      <p:cBhvr>
+                                        <p:cTn id="32" dur="1" fill="hold">
+                                          <p:stCondLst>
+                                            <p:cond delay="0"/>
+                                          </p:stCondLst>
+                                        </p:cTn>
+                                        <p:tgtEl>
+                                          <p:spTgt spid="127">
+                                            <p:txEl>
+                                              <p:pRg st="6" end="6"/>
+                                            </p:txEl>
+                                          </p:spTgt>
+                                        </p:tgtEl>
+                                        <p:attrNameLst>
+                                          <p:attrName>style.visibility</p:attrName>
+                                        </p:attrNameLst>
+                                      </p:cBhvr>
+                                      <p:to>
+                                        <p:strVal val="visible"/>
+                                      </p:to>
+                                    </p:set>
+                                    <p:animEffect transition="in" filter="wipe(down)">
+                                      <p:cBhvr additive="repl">
+                                        <p:cTn id="33" dur="500"/>
+                                        <p:tgtEl>
+                                          <p:spTgt spid="127">
+                                            <p:txEl>
+                                              <p:pRg st="6" end="6"/>
                                             </p:txEl>
                                           </p:spTgt>
                                         </p:tgtEl>
@@ -11731,26 +11859,26 @@
                     </p:cTn>
                   </p:par>
                   <p:par>
-                    <p:cTn id="29" fill="hold">
+                    <p:cTn id="34" fill="hold">
                       <p:stCondLst>
                         <p:cond delay="indefinite"/>
                       </p:stCondLst>
                       <p:childTnLst>
                         <p:par>
-                          <p:cTn id="30" fill="hold">
+                          <p:cTn id="35" fill="hold">
                             <p:stCondLst>
                               <p:cond delay="0"/>
                             </p:stCondLst>
                             <p:childTnLst>
                               <p:par>
-                                <p:cTn id="31" presetID="22" presetClass="entr" presetSubtype="4" fill="hold" nodeType="clickEffect">
+                                <p:cTn id="36" presetID="22" presetClass="entr" presetSubtype="4" fill="hold" nodeType="clickEffect">
                                   <p:stCondLst>
                                     <p:cond delay="0"/>
                                   </p:stCondLst>
                                   <p:childTnLst>
                                     <p:set>
                                       <p:cBhvr>
-                                        <p:cTn id="32" dur="1" fill="hold">
+                                        <p:cTn id="37" dur="1" fill="hold">
                                           <p:stCondLst>
                                             <p:cond delay="0"/>
                                           </p:stCondLst>
@@ -11758,7 +11886,7 @@
                                         <p:tgtEl>
                                           <p:spTgt spid="127">
                                             <p:txEl>
-                                              <p:pRg st="6" end="6"/>
+                                              <p:pRg st="7" end="7"/>
                                             </p:txEl>
                                           </p:spTgt>
                                         </p:tgtEl>
@@ -11772,11 +11900,11 @@
                                     </p:set>
                                     <p:animEffect transition="in" filter="wipe(down)">
                                       <p:cBhvr additive="repl">
-                                        <p:cTn id="33" dur="500"/>
+                                        <p:cTn id="38" dur="500"/>
                                         <p:tgtEl>
                                           <p:spTgt spid="127">
                                             <p:txEl>
-                                              <p:pRg st="6" end="6"/>
+                                              <p:pRg st="7" end="7"/>
                                             </p:txEl>
                                           </p:spTgt>
                                         </p:tgtEl>
@@ -11786,68 +11914,7 @@
                                 </p:cTn>
                               </p:par>
                               <p:par>
-                                <p:cTn id="34" presetID="22" presetClass="entr" presetSubtype="4" fill="hold" nodeType="withEffect">
-                                  <p:stCondLst>
-                                    <p:cond delay="0"/>
-                                  </p:stCondLst>
-                                  <p:childTnLst>
-                                    <p:set>
-                                      <p:cBhvr>
-                                        <p:cTn id="35" dur="1" fill="hold">
-                                          <p:stCondLst>
-                                            <p:cond delay="0"/>
-                                          </p:stCondLst>
-                                        </p:cTn>
-                                        <p:tgtEl>
-                                          <p:spTgt spid="127">
-                                            <p:txEl>
-                                              <p:pRg st="7" end="7"/>
-                                            </p:txEl>
-                                          </p:spTgt>
-                                        </p:tgtEl>
-                                        <p:attrNameLst>
-                                          <p:attrName>style.visibility</p:attrName>
-                                        </p:attrNameLst>
-                                      </p:cBhvr>
-                                      <p:to>
-                                        <p:strVal val="visible"/>
-                                      </p:to>
-                                    </p:set>
-                                    <p:animEffect transition="in" filter="wipe(down)">
-                                      <p:cBhvr additive="repl">
-                                        <p:cTn id="36" dur="500"/>
-                                        <p:tgtEl>
-                                          <p:spTgt spid="127">
-                                            <p:txEl>
-                                              <p:pRg st="7" end="7"/>
-                                            </p:txEl>
-                                          </p:spTgt>
-                                        </p:tgtEl>
-                                      </p:cBhvr>
-                                    </p:animEffect>
-                                  </p:childTnLst>
-                                </p:cTn>
-                              </p:par>
-                            </p:childTnLst>
-                          </p:cTn>
-                        </p:par>
-                      </p:childTnLst>
-                    </p:cTn>
-                  </p:par>
-                  <p:par>
-                    <p:cTn id="37" fill="hold">
-                      <p:stCondLst>
-                        <p:cond delay="indefinite"/>
-                      </p:stCondLst>
-                      <p:childTnLst>
-                        <p:par>
-                          <p:cTn id="38" fill="hold">
-                            <p:stCondLst>
-                              <p:cond delay="0"/>
-                            </p:stCondLst>
-                            <p:childTnLst>
-                              <p:par>
-                                <p:cTn id="39" presetID="22" presetClass="entr" presetSubtype="4" fill="hold" nodeType="clickEffect">
+                                <p:cTn id="39" presetID="22" presetClass="entr" presetSubtype="4" fill="hold" nodeType="withEffect">
                                   <p:stCondLst>
                                     <p:cond delay="0"/>
                                   </p:stCondLst>
@@ -11975,49 +12042,6 @@
                                   </p:childTnLst>
                                 </p:cTn>
                               </p:par>
-                              <p:par>
-                                <p:cTn id="48" presetID="22" presetClass="entr" presetSubtype="4" fill="hold" nodeType="withEffect">
-                                  <p:stCondLst>
-                                    <p:cond delay="0"/>
-                                  </p:stCondLst>
-                                  <p:childTnLst>
-                                    <p:set>
-                                      <p:cBhvr>
-                                        <p:cTn id="49" dur="1" fill="hold">
-                                          <p:stCondLst>
-                                            <p:cond delay="0"/>
-                                          </p:stCondLst>
-                                        </p:cTn>
-                                        <p:tgtEl>
-                                          <p:spTgt spid="127">
-                                            <p:txEl>
-                                              <p:pRg st="11" end="11"/>
-                                            </p:txEl>
-                                          </p:spTgt>
-                                        </p:tgtEl>
-                                        <p:attrNameLst>
-                                          <p:attrName>style.visibility</p:attrName>
-                                        </p:attrNameLst>
-                                      </p:cBhvr>
-                                      <p:to>
-                                        <p:strVal val="visible"/>
-                                      </p:to>
-                                    </p:set>
-                                    <p:animEffect transition="in" filter="wipe(down)">
-                                      <p:cBhvr additive="repl">
-                                        <p:cTn id="50" dur="500"/>
-                                        <p:tgtEl>
-                                          <p:spTgt spid="127">
-                                            <p:txEl>
-                                              <p:pRg st="11" end="11"/>
-                                            </p:txEl>
-                                          </p:spTgt>
-                                        </p:tgtEl>
-                                      </p:cBhvr>
-                                    </p:animEffect>
-                                  </p:childTnLst>
-                                </p:cTn>
-                              </p:par>
                             </p:childTnLst>
                           </p:cTn>
                         </p:par>
@@ -12025,19 +12049,62 @@
                     </p:cTn>
                   </p:par>
                   <p:par>
-                    <p:cTn id="51" fill="hold">
+                    <p:cTn id="48" fill="hold">
                       <p:stCondLst>
                         <p:cond delay="indefinite"/>
                       </p:stCondLst>
                       <p:childTnLst>
                         <p:par>
-                          <p:cTn id="52" fill="hold">
+                          <p:cTn id="49" fill="hold">
                             <p:stCondLst>
                               <p:cond delay="0"/>
                             </p:stCondLst>
                             <p:childTnLst>
                               <p:par>
-                                <p:cTn id="53" presetID="22" presetClass="entr" presetSubtype="4" fill="hold" nodeType="clickEffect">
+                                <p:cTn id="50" presetID="22" presetClass="entr" presetSubtype="4" fill="hold" nodeType="clickEffect">
+                                  <p:stCondLst>
+                                    <p:cond delay="0"/>
+                                  </p:stCondLst>
+                                  <p:childTnLst>
+                                    <p:set>
+                                      <p:cBhvr>
+                                        <p:cTn id="51" dur="1" fill="hold">
+                                          <p:stCondLst>
+                                            <p:cond delay="0"/>
+                                          </p:stCondLst>
+                                        </p:cTn>
+                                        <p:tgtEl>
+                                          <p:spTgt spid="127">
+                                            <p:txEl>
+                                              <p:pRg st="11" end="11"/>
+                                            </p:txEl>
+                                          </p:spTgt>
+                                        </p:tgtEl>
+                                        <p:attrNameLst>
+                                          <p:attrName>style.visibility</p:attrName>
+                                        </p:attrNameLst>
+                                      </p:cBhvr>
+                                      <p:to>
+                                        <p:strVal val="visible"/>
+                                      </p:to>
+                                    </p:set>
+                                    <p:animEffect transition="in" filter="wipe(down)">
+                                      <p:cBhvr additive="repl">
+                                        <p:cTn id="52" dur="500"/>
+                                        <p:tgtEl>
+                                          <p:spTgt spid="127">
+                                            <p:txEl>
+                                              <p:pRg st="11" end="11"/>
+                                            </p:txEl>
+                                          </p:spTgt>
+                                        </p:tgtEl>
+                                      </p:cBhvr>
+                                    </p:animEffect>
+                                  </p:childTnLst>
+                                </p:cTn>
+                              </p:par>
+                              <p:par>
+                                <p:cTn id="53" presetID="22" presetClass="entr" presetSubtype="4" fill="hold" nodeType="withEffect">
                                   <p:stCondLst>
                                     <p:cond delay="0"/>
                                   </p:stCondLst>
@@ -12177,7 +12244,7 @@
                 </a:solidFill>
                 <a:latin typeface="Calibri"/>
               </a:rPr>
-              <a:t> (1)</a:t>
+              <a:t> </a:t>
             </a:r>
             <a:endParaRPr lang="de-DE" sz="3000" b="0" strike="noStrike" spc="-1">
               <a:solidFill>
@@ -12243,7 +12310,7 @@
                 </a:solidFill>
                 <a:latin typeface="Calibri"/>
               </a:rPr>
-              <a:t>Dr. Daniel Ruffinelli - FSS 2025</a:t>
+              <a:t>Dr. Daniel Ruffinelli - FSS 2026</a:t>
             </a:r>
             <a:endParaRPr lang="en-US" sz="1200" b="0" strike="noStrike" spc="-1">
               <a:latin typeface="Times New Roman"/>
@@ -13007,7 +13074,25 @@
                 </a:solidFill>
                 <a:latin typeface="Calibri"/>
               </a:rPr>
-              <a:t> are representations after attention, i.e. </a:t>
+              <a:t> are </a:t>
+            </a:r>
+            <a:r>
+              <a:rPr lang="en-US" sz="1800" spc="-1" dirty="0">
+                <a:solidFill>
+                  <a:srgbClr val="003056"/>
+                </a:solidFill>
+                <a:latin typeface="Calibri"/>
+              </a:rPr>
+              <a:t>representations after</a:t>
+            </a:r>
+            <a:r>
+              <a:rPr lang="en-US" sz="1800" b="0" strike="noStrike" spc="-1" dirty="0">
+                <a:solidFill>
+                  <a:srgbClr val="003056"/>
+                </a:solidFill>
+                <a:latin typeface="Calibri"/>
+              </a:rPr>
+              <a:t> attention, i.e. </a:t>
             </a:r>
             <a:r>
               <a:rPr lang="en-US" sz="1800" b="1" strike="noStrike" spc="-1" dirty="0">
@@ -13601,26 +13686,35 @@
               </a:lnSpc>
             </a:pPr>
             <a:r>
-              <a:rPr lang="de-DE" sz="3000" b="1" strike="noStrike" spc="-1">
-                <a:solidFill>
-                  <a:srgbClr val="003056"/>
-                </a:solidFill>
-                <a:latin typeface="Calibri"/>
-              </a:rPr>
-              <a:t>Self-Attention</a:t>
-            </a:r>
-            <a:r>
-              <a:rPr lang="de-DE" sz="3000" b="1" spc="-1">
-                <a:solidFill>
-                  <a:srgbClr val="003056"/>
-                </a:solidFill>
-                <a:latin typeface="Calibri"/>
-              </a:rPr>
-              <a:t> (2)</a:t>
-            </a:r>
-            <a:endParaRPr lang="de-DE" sz="3000" b="0" strike="noStrike" spc="-1">
+              <a:rPr lang="de-DE" sz="3000" b="1" spc="-1" dirty="0" err="1">
+                <a:solidFill>
+                  <a:srgbClr val="003056"/>
+                </a:solidFill>
+                <a:latin typeface="Calibri"/>
+              </a:rPr>
+              <a:t>Contextualized</a:t>
+            </a:r>
+            <a:r>
+              <a:rPr lang="de-DE" sz="3000" b="1" spc="-1" dirty="0">
+                <a:solidFill>
+                  <a:srgbClr val="003056"/>
+                </a:solidFill>
+                <a:latin typeface="Calibri"/>
+              </a:rPr>
+              <a:t> </a:t>
+            </a:r>
+            <a:r>
+              <a:rPr lang="de-DE" sz="3000" b="1" spc="-1" dirty="0" err="1">
+                <a:solidFill>
+                  <a:srgbClr val="003056"/>
+                </a:solidFill>
+                <a:latin typeface="Calibri"/>
+              </a:rPr>
+              <a:t>Representations</a:t>
+            </a:r>
+            <a:endParaRPr lang="de-DE" sz="3000" b="1" strike="noStrike" spc="-1" dirty="0" err="1">
               <a:solidFill>
-                <a:srgbClr val="000000"/>
+                <a:srgbClr val="003056"/>
               </a:solidFill>
               <a:latin typeface="Calibri"/>
             </a:endParaRPr>
@@ -13682,7 +13776,7 @@
                 </a:solidFill>
                 <a:latin typeface="Calibri"/>
               </a:rPr>
-              <a:t>Dr. Daniel Ruffinelli - FSS 2025</a:t>
+              <a:t>Dr. Daniel Ruffinelli - FSS 2026</a:t>
             </a:r>
             <a:endParaRPr lang="en-US" sz="1200" b="0" strike="noStrike" spc="-1">
               <a:latin typeface="Times New Roman"/>
@@ -13772,13 +13866,13 @@
               <a:buChar char="•"/>
             </a:pPr>
             <a:r>
-              <a:rPr lang="en-US" sz="1800" spc="-1" dirty="0">
-                <a:solidFill>
-                  <a:srgbClr val="003056"/>
-                </a:solidFill>
-                <a:latin typeface="Calibri"/>
-              </a:rPr>
-              <a:t>Thus, encoders produce different representations at each output step</a:t>
+              <a:rPr lang="en-US" sz="1800" spc="-1">
+                <a:solidFill>
+                  <a:srgbClr val="003056"/>
+                </a:solidFill>
+                <a:latin typeface="Calibri"/>
+              </a:rPr>
+              <a:t>We get different representations from encoders at each output step</a:t>
             </a:r>
           </a:p>
           <a:p>
@@ -13802,7 +13896,7 @@
                 </a:solidFill>
                 <a:latin typeface="Calibri"/>
               </a:rPr>
-              <a:t>These representations depend on context, i.e. output produced so far, other tokens in input sequence</a:t>
+              <a:t>These representations depend on context, i.e. output produced so far and other tokens in input sequence</a:t>
             </a:r>
           </a:p>
           <a:p>
@@ -14346,7 +14440,7 @@
                 </a:solidFill>
                 <a:latin typeface="Calibri"/>
               </a:rPr>
-              <a:t>Dr. Daniel Ruffinelli - FSS 2025</a:t>
+              <a:t>Dr. Daniel Ruffinelli - FSS 2026</a:t>
             </a:r>
             <a:endParaRPr lang="en-US" sz="1200" b="0" strike="noStrike" spc="-1">
               <a:latin typeface="Times New Roman"/>
@@ -15383,7 +15477,7 @@
                 </a:solidFill>
                 <a:latin typeface="Calibri"/>
               </a:rPr>
-              <a:t>Dr. Daniel Ruffinelli - FSS 2025</a:t>
+              <a:t>Dr. Daniel Ruffinelli - FSS 2026</a:t>
             </a:r>
             <a:endParaRPr lang="en-US" sz="1200" b="0" strike="noStrike" spc="-1">
               <a:latin typeface="Times New Roman"/>
@@ -17259,7 +17353,7 @@
                 </a:solidFill>
                 <a:latin typeface="Calibri"/>
               </a:rPr>
-              <a:t>Dr. Daniel Ruffinelli - FSS 2025</a:t>
+              <a:t>Dr. Daniel Ruffinelli - FSS 2026</a:t>
             </a:r>
             <a:endParaRPr lang="en-US" sz="1200" b="0" strike="noStrike" spc="-1">
               <a:latin typeface="Times New Roman"/>
@@ -18288,7 +18382,7 @@
                 </a:solidFill>
                 <a:latin typeface="Calibri"/>
               </a:rPr>
-              <a:t>Dr. Daniel Ruffinelli - FSS 2025</a:t>
+              <a:t>Dr. Daniel Ruffinelli - FSS 2026</a:t>
             </a:r>
             <a:endParaRPr lang="en-US" sz="1200" b="0" strike="noStrike" spc="-1">
               <a:latin typeface="Times New Roman"/>
@@ -18605,7 +18699,7 @@
               </a:rPr>
               <a:t>softmax</a:t>
             </a:r>
-            <a:endParaRPr lang="en-US" sz="1800" b="0" strike="noStrike" spc="-1" dirty="0" err="1">
+            <a:endParaRPr lang="en-US" sz="1800" b="0" strike="noStrike" spc="-1" dirty="0">
               <a:solidFill>
                 <a:srgbClr val="003056"/>
               </a:solidFill>
@@ -18720,7 +18814,7 @@
               <a:t> </a:t>
             </a:r>
             <a:r>
-              <a:rPr lang="az-Cyrl-AZ" sz="1800" b="0" i="1" strike="noStrike" spc="-1">
+              <a:rPr lang="az-Cyrl-AZ" sz="1800" b="0" i="1" strike="noStrike" spc="-1" dirty="0">
                 <a:solidFill>
                   <a:srgbClr val="003056"/>
                 </a:solidFill>
@@ -18858,7 +18952,7 @@
               <a:t>Q</a:t>
             </a:r>
             <a:r>
-              <a:rPr lang="az-Cyrl-AZ" sz="1800" b="0" i="1" strike="noStrike" spc="-1">
+              <a:rPr lang="az-Cyrl-AZ" sz="1800" b="0" i="1" strike="noStrike" spc="-1" dirty="0">
                 <a:solidFill>
                   <a:srgbClr val="003056"/>
                 </a:solidFill>
@@ -18957,7 +19051,7 @@
               <a:t>K</a:t>
             </a:r>
             <a:r>
-              <a:rPr lang="az-Cyrl-AZ" sz="1800" b="0" i="1" strike="noStrike" spc="-1">
+              <a:rPr lang="az-Cyrl-AZ" sz="1800" b="0" i="1" strike="noStrike" spc="-1" dirty="0">
                 <a:solidFill>
                   <a:srgbClr val="003056"/>
                 </a:solidFill>
@@ -19056,7 +19150,7 @@
               <a:t>V</a:t>
             </a:r>
             <a:r>
-              <a:rPr lang="az-Cyrl-AZ" sz="1800" b="0" i="1" strike="noStrike" spc="-1">
+              <a:rPr lang="az-Cyrl-AZ" sz="1800" b="0" i="1" strike="noStrike" spc="-1" dirty="0">
                 <a:solidFill>
                   <a:srgbClr val="003056"/>
                 </a:solidFill>
@@ -19158,7 +19252,7 @@
               <a:t>T </a:t>
             </a:r>
             <a:r>
-              <a:rPr lang="az-Cyrl-AZ" sz="1800" b="0" i="1" strike="noStrike" spc="-1">
+              <a:rPr lang="az-Cyrl-AZ" sz="1800" b="0" i="1" strike="noStrike" spc="-1" dirty="0">
                 <a:solidFill>
                   <a:srgbClr val="003056"/>
                 </a:solidFill>
@@ -19305,7 +19399,7 @@
               <a:t>) </a:t>
             </a:r>
             <a:r>
-              <a:rPr lang="az-Cyrl-AZ" sz="1800" b="0" i="1" strike="noStrike" spc="-1">
+              <a:rPr lang="az-Cyrl-AZ" sz="1800" b="0" i="1" strike="noStrike" spc="-1" dirty="0">
                 <a:solidFill>
                   <a:srgbClr val="003056"/>
                 </a:solidFill>
@@ -19743,31 +19837,22 @@
               <a:buChar char="•"/>
             </a:pPr>
             <a:r>
-              <a:rPr lang="en-US" sz="1800" spc="-1" dirty="0">
-                <a:solidFill>
-                  <a:srgbClr val="003056"/>
-                </a:solidFill>
-                <a:latin typeface="Calibri"/>
-              </a:rPr>
-              <a:t>Transformers as FNNs, not RNNs: </a:t>
-            </a:r>
-            <a:r>
               <a:rPr lang="en-US" sz="1800" b="1" spc="-1" dirty="0">
                 <a:solidFill>
                   <a:srgbClr val="003056"/>
                 </a:solidFill>
                 <a:latin typeface="Calibri"/>
               </a:rPr>
-              <a:t>max. input size fixed</a:t>
-            </a:r>
-            <a:r>
-              <a:rPr lang="en-US" sz="1800" spc="-1" dirty="0">
-                <a:solidFill>
-                  <a:srgbClr val="003056"/>
-                </a:solidFill>
-                <a:latin typeface="Calibri"/>
-              </a:rPr>
-              <a:t>, grows with model</a:t>
+              <a:t>Runtime increases </a:t>
+            </a:r>
+            <a:r>
+              <a:rPr lang="en-US" sz="1800" b="1" spc="-1">
+                <a:solidFill>
+                  <a:srgbClr val="003056"/>
+                </a:solidFill>
+                <a:latin typeface="Calibri"/>
+              </a:rPr>
+              <a:t>quadratically with size of input sequence</a:t>
             </a:r>
           </a:p>
         </p:txBody>
@@ -20651,7 +20736,7 @@
                 </a:solidFill>
                 <a:latin typeface="Calibri"/>
               </a:rPr>
-              <a:t>Dr. Daniel Ruffinelli - FSS 2025</a:t>
+              <a:t>Dr. Daniel Ruffinelli - FSS 2026</a:t>
             </a:r>
             <a:endParaRPr lang="en-US" sz="1200" b="0" strike="noStrike" spc="-1">
               <a:latin typeface="Times New Roman"/>
@@ -20985,6 +21070,75 @@
               </a:rPr>
               <a:t>LSTMs</a:t>
             </a:r>
+          </a:p>
+          <a:p>
+            <a:pPr marL="742950" lvl="1" indent="-285750">
+              <a:lnSpc>
+                <a:spcPct val="100000"/>
+              </a:lnSpc>
+              <a:spcBef>
+                <a:spcPts val="360"/>
+              </a:spcBef>
+              <a:buClr>
+                <a:srgbClr val="003056"/>
+              </a:buClr>
+              <a:buFont typeface="Arial"/>
+              <a:buChar char="•"/>
+            </a:pPr>
+            <a:r>
+              <a:rPr lang="en-US" sz="1800" spc="-1" dirty="0">
+                <a:solidFill>
+                  <a:srgbClr val="003056"/>
+                </a:solidFill>
+                <a:latin typeface="Calibri"/>
+              </a:rPr>
+              <a:t>But transformers difficult to replace, lots of </a:t>
+            </a:r>
+            <a:r>
+              <a:rPr lang="en-US" sz="1800" spc="-1">
+                <a:solidFill>
+                  <a:srgbClr val="003056"/>
+                </a:solidFill>
+                <a:latin typeface="Calibri"/>
+              </a:rPr>
+              <a:t>infrastructure in place</a:t>
+            </a:r>
+            <a:endParaRPr lang="en-US" sz="1800" spc="-1" dirty="0">
+              <a:solidFill>
+                <a:srgbClr val="003056"/>
+              </a:solidFill>
+              <a:latin typeface="Calibri"/>
+            </a:endParaRPr>
+          </a:p>
+          <a:p>
+            <a:pPr marL="742950" lvl="1" indent="-285750">
+              <a:lnSpc>
+                <a:spcPct val="100000"/>
+              </a:lnSpc>
+              <a:spcBef>
+                <a:spcPts val="360"/>
+              </a:spcBef>
+              <a:buClr>
+                <a:srgbClr val="003056"/>
+              </a:buClr>
+              <a:buFont typeface="Arial"/>
+              <a:buChar char="•"/>
+            </a:pPr>
+            <a:r>
+              <a:rPr lang="en-US" sz="1800" spc="-1">
+                <a:solidFill>
+                  <a:srgbClr val="003056"/>
+                </a:solidFill>
+                <a:latin typeface="Calibri"/>
+              </a:rPr>
+              <a:t>Improvements must be worth the effort</a:t>
+            </a:r>
+            <a:endParaRPr lang="en-US" sz="1800" spc="-1" dirty="0">
+              <a:solidFill>
+                <a:srgbClr val="003056"/>
+              </a:solidFill>
+              <a:latin typeface="Calibri"/>
+            </a:endParaRPr>
           </a:p>
           <a:p>
             <a:pPr marL="342900" indent="-342900">
@@ -21547,6 +21701,92 @@
                                   </p:childTnLst>
                                 </p:cTn>
                               </p:par>
+                              <p:par>
+                                <p:cTn id="31" presetID="22" presetClass="entr" presetSubtype="4" fill="hold" nodeType="withEffect">
+                                  <p:stCondLst>
+                                    <p:cond delay="0"/>
+                                  </p:stCondLst>
+                                  <p:childTnLst>
+                                    <p:set>
+                                      <p:cBhvr>
+                                        <p:cTn id="32" dur="1" fill="hold">
+                                          <p:stCondLst>
+                                            <p:cond delay="0"/>
+                                          </p:stCondLst>
+                                        </p:cTn>
+                                        <p:tgtEl>
+                                          <p:spTgt spid="90">
+                                            <p:txEl>
+                                              <p:pRg st="8" end="8"/>
+                                            </p:txEl>
+                                          </p:spTgt>
+                                        </p:tgtEl>
+                                        <p:attrNameLst>
+                                          <p:attrName>style.visibility</p:attrName>
+                                        </p:attrNameLst>
+                                      </p:cBhvr>
+                                      <p:to>
+                                        <p:strVal val="visible"/>
+                                      </p:to>
+                                    </p:set>
+                                    <p:animEffect transition="in" filter="wipe(down)">
+                                      <p:cBhvr additive="repl">
+                                        <p:cTn id="33" dur="500"/>
+                                        <p:tgtEl>
+                                          <p:spTgt spid="90">
+                                            <p:txEl>
+                                              <p:pRg st="8" end="8"/>
+                                            </p:txEl>
+                                          </p:spTgt>
+                                        </p:tgtEl>
+                                      </p:cBhvr>
+                                    </p:animEffect>
+                                  </p:childTnLst>
+                                </p:cTn>
+                              </p:par>
+                              <p:par>
+                                <p:cTn id="34" presetID="22" presetClass="entr" presetSubtype="4" fill="hold" nodeType="withEffect">
+                                  <p:stCondLst>
+                                    <p:cond delay="0"/>
+                                  </p:stCondLst>
+                                  <p:childTnLst>
+                                    <p:set>
+                                      <p:cBhvr>
+                                        <p:cTn id="35" dur="1" fill="hold">
+                                          <p:stCondLst>
+                                            <p:cond delay="0"/>
+                                          </p:stCondLst>
+                                        </p:cTn>
+                                        <p:tgtEl>
+                                          <p:spTgt spid="90">
+                                            <p:txEl>
+                                              <p:pRg st="9" end="9"/>
+                                            </p:txEl>
+                                          </p:spTgt>
+                                        </p:tgtEl>
+                                        <p:attrNameLst>
+                                          <p:attrName>style.visibility</p:attrName>
+                                        </p:attrNameLst>
+                                      </p:cBhvr>
+                                      <p:to>
+                                        <p:strVal val="visible"/>
+                                      </p:to>
+                                    </p:set>
+                                    <p:animEffect transition="in" filter="wipe(down)">
+                                      <p:cBhvr additive="repl">
+                                        <p:cTn id="36" dur="500"/>
+                                        <p:tgtEl>
+                                          <p:spTgt spid="90">
+                                            <p:txEl>
+                                              <p:pRg st="9" end="9"/>
+                                            </p:txEl>
+                                          </p:spTgt>
+                                        </p:tgtEl>
+                                      </p:cBhvr>
+                                    </p:animEffect>
+                                  </p:childTnLst>
+                                </p:cTn>
+                              </p:par>
                             </p:childTnLst>
                           </p:cTn>
                         </p:par>
@@ -21554,105 +21794,19 @@
                     </p:cTn>
                   </p:par>
                   <p:par>
-                    <p:cTn id="31" fill="hold">
+                    <p:cTn id="37" fill="hold">
                       <p:stCondLst>
                         <p:cond delay="indefinite"/>
                       </p:stCondLst>
                       <p:childTnLst>
                         <p:par>
-                          <p:cTn id="32" fill="hold">
+                          <p:cTn id="38" fill="hold">
                             <p:stCondLst>
                               <p:cond delay="0"/>
                             </p:stCondLst>
                             <p:childTnLst>
                               <p:par>
-                                <p:cTn id="33" presetID="22" presetClass="entr" presetSubtype="4" fill="hold" nodeType="clickEffect">
-                                  <p:stCondLst>
-                                    <p:cond delay="0"/>
-                                  </p:stCondLst>
-                                  <p:childTnLst>
-                                    <p:set>
-                                      <p:cBhvr>
-                                        <p:cTn id="34" dur="1" fill="hold">
-                                          <p:stCondLst>
-                                            <p:cond delay="0"/>
-                                          </p:stCondLst>
-                                        </p:cTn>
-                                        <p:tgtEl>
-                                          <p:spTgt spid="90">
-                                            <p:txEl>
-                                              <p:pRg st="8" end="8"/>
-                                            </p:txEl>
-                                          </p:spTgt>
-                                        </p:tgtEl>
-                                        <p:attrNameLst>
-                                          <p:attrName>style.visibility</p:attrName>
-                                        </p:attrNameLst>
-                                      </p:cBhvr>
-                                      <p:to>
-                                        <p:strVal val="visible"/>
-                                      </p:to>
-                                    </p:set>
-                                    <p:animEffect transition="in" filter="wipe(down)">
-                                      <p:cBhvr additive="repl">
-                                        <p:cTn id="35" dur="500"/>
-                                        <p:tgtEl>
-                                          <p:spTgt spid="90">
-                                            <p:txEl>
-                                              <p:pRg st="8" end="8"/>
-                                            </p:txEl>
-                                          </p:spTgt>
-                                        </p:tgtEl>
-                                      </p:cBhvr>
-                                    </p:animEffect>
-                                  </p:childTnLst>
-                                </p:cTn>
-                              </p:par>
-                              <p:par>
-                                <p:cTn id="36" presetID="22" presetClass="entr" presetSubtype="4" fill="hold" nodeType="withEffect">
-                                  <p:stCondLst>
-                                    <p:cond delay="0"/>
-                                  </p:stCondLst>
-                                  <p:childTnLst>
-                                    <p:set>
-                                      <p:cBhvr>
-                                        <p:cTn id="37" dur="1" fill="hold">
-                                          <p:stCondLst>
-                                            <p:cond delay="0"/>
-                                          </p:stCondLst>
-                                        </p:cTn>
-                                        <p:tgtEl>
-                                          <p:spTgt spid="90">
-                                            <p:txEl>
-                                              <p:pRg st="9" end="9"/>
-                                            </p:txEl>
-                                          </p:spTgt>
-                                        </p:tgtEl>
-                                        <p:attrNameLst>
-                                          <p:attrName>style.visibility</p:attrName>
-                                        </p:attrNameLst>
-                                      </p:cBhvr>
-                                      <p:to>
-                                        <p:strVal val="visible"/>
-                                      </p:to>
-                                    </p:set>
-                                    <p:animEffect transition="in" filter="wipe(down)">
-                                      <p:cBhvr additive="repl">
-                                        <p:cTn id="38" dur="500"/>
-                                        <p:tgtEl>
-                                          <p:spTgt spid="90">
-                                            <p:txEl>
-                                              <p:pRg st="9" end="9"/>
-                                            </p:txEl>
-                                          </p:spTgt>
-                                        </p:tgtEl>
-                                      </p:cBhvr>
-                                    </p:animEffect>
-                                  </p:childTnLst>
-                                </p:cTn>
-                              </p:par>
-                              <p:par>
-                                <p:cTn id="39" presetID="22" presetClass="entr" presetSubtype="4" fill="hold" nodeType="withEffect">
+                                <p:cTn id="39" presetID="22" presetClass="entr" presetSubtype="4" fill="hold" nodeType="clickEffect">
                                   <p:stCondLst>
                                     <p:cond delay="0"/>
                                   </p:stCondLst>
@@ -21729,6 +21883,92 @@
                                           <p:spTgt spid="90">
                                             <p:txEl>
                                               <p:pRg st="11" end="11"/>
+                                            </p:txEl>
+                                          </p:spTgt>
+                                        </p:tgtEl>
+                                      </p:cBhvr>
+                                    </p:animEffect>
+                                  </p:childTnLst>
+                                </p:cTn>
+                              </p:par>
+                              <p:par>
+                                <p:cTn id="45" presetID="22" presetClass="entr" presetSubtype="4" fill="hold" nodeType="withEffect">
+                                  <p:stCondLst>
+                                    <p:cond delay="0"/>
+                                  </p:stCondLst>
+                                  <p:childTnLst>
+                                    <p:set>
+                                      <p:cBhvr>
+                                        <p:cTn id="46" dur="1" fill="hold">
+                                          <p:stCondLst>
+                                            <p:cond delay="0"/>
+                                          </p:stCondLst>
+                                        </p:cTn>
+                                        <p:tgtEl>
+                                          <p:spTgt spid="90">
+                                            <p:txEl>
+                                              <p:pRg st="12" end="12"/>
+                                            </p:txEl>
+                                          </p:spTgt>
+                                        </p:tgtEl>
+                                        <p:attrNameLst>
+                                          <p:attrName>style.visibility</p:attrName>
+                                        </p:attrNameLst>
+                                      </p:cBhvr>
+                                      <p:to>
+                                        <p:strVal val="visible"/>
+                                      </p:to>
+                                    </p:set>
+                                    <p:animEffect transition="in" filter="wipe(down)">
+                                      <p:cBhvr additive="repl">
+                                        <p:cTn id="47" dur="500"/>
+                                        <p:tgtEl>
+                                          <p:spTgt spid="90">
+                                            <p:txEl>
+                                              <p:pRg st="12" end="12"/>
+                                            </p:txEl>
+                                          </p:spTgt>
+                                        </p:tgtEl>
+                                      </p:cBhvr>
+                                    </p:animEffect>
+                                  </p:childTnLst>
+                                </p:cTn>
+                              </p:par>
+                              <p:par>
+                                <p:cTn id="48" presetID="22" presetClass="entr" presetSubtype="4" fill="hold" nodeType="withEffect">
+                                  <p:stCondLst>
+                                    <p:cond delay="0"/>
+                                  </p:stCondLst>
+                                  <p:childTnLst>
+                                    <p:set>
+                                      <p:cBhvr>
+                                        <p:cTn id="49" dur="1" fill="hold">
+                                          <p:stCondLst>
+                                            <p:cond delay="0"/>
+                                          </p:stCondLst>
+                                        </p:cTn>
+                                        <p:tgtEl>
+                                          <p:spTgt spid="90">
+                                            <p:txEl>
+                                              <p:pRg st="13" end="13"/>
+                                            </p:txEl>
+                                          </p:spTgt>
+                                        </p:tgtEl>
+                                        <p:attrNameLst>
+                                          <p:attrName>style.visibility</p:attrName>
+                                        </p:attrNameLst>
+                                      </p:cBhvr>
+                                      <p:to>
+                                        <p:strVal val="visible"/>
+                                      </p:to>
+                                    </p:set>
+                                    <p:animEffect transition="in" filter="wipe(down)">
+                                      <p:cBhvr additive="repl">
+                                        <p:cTn id="50" dur="500"/>
+                                        <p:tgtEl>
+                                          <p:spTgt spid="90">
+                                            <p:txEl>
+                                              <p:pRg st="13" end="13"/>
                                             </p:txEl>
                                           </p:spTgt>
                                         </p:tgtEl>
@@ -21878,7 +22118,7 @@
                 </a:solidFill>
                 <a:latin typeface="Calibri"/>
               </a:rPr>
-              <a:t>Dr. Daniel Ruffinelli - FSS 2025</a:t>
+              <a:t>Dr. Daniel Ruffinelli - FSS 2026</a:t>
             </a:r>
             <a:endParaRPr lang="en-US" sz="1200" b="0" strike="noStrike" spc="-1">
               <a:latin typeface="Times New Roman"/>
@@ -22183,7 +22423,7 @@
                 </a:solidFill>
                 <a:latin typeface="Calibri"/>
               </a:rPr>
-              <a:t>Dr. Daniel Ruffinelli - FSS 2025</a:t>
+              <a:t>Dr. Daniel Ruffinelli - FSS 2026</a:t>
             </a:r>
             <a:endParaRPr lang="en-US" sz="1200" b="0" strike="noStrike" spc="-1">
               <a:latin typeface="Times New Roman"/>
@@ -23815,7 +24055,7 @@
                 </a:solidFill>
                 <a:latin typeface="Calibri"/>
               </a:rPr>
-              <a:t>Dr. Daniel Ruffinelli - FSS 2025</a:t>
+              <a:t>Dr. Daniel Ruffinelli - FSS 2026</a:t>
             </a:r>
             <a:endParaRPr lang="en-US" sz="1200" b="0" strike="noStrike" spc="-1">
               <a:latin typeface="Times New Roman"/>
@@ -24356,7 +24596,7 @@
                 </a:solidFill>
                 <a:latin typeface="Calibri"/>
               </a:rPr>
-              <a:t>Dr. Daniel Ruffinelli - FSS 2025</a:t>
+              <a:t>Dr. Daniel Ruffinelli - FSS 2026</a:t>
             </a:r>
             <a:endParaRPr lang="en-US" sz="1200" b="0" strike="noStrike" spc="-1">
               <a:latin typeface="Times New Roman"/>
@@ -24931,7 +25171,7 @@
                 </a:solidFill>
                 <a:latin typeface="Calibri"/>
               </a:rPr>
-              <a:t>Dr. Daniel Ruffinelli - FSS 2025</a:t>
+              <a:t>Dr. Daniel Ruffinelli - FSS 2026</a:t>
             </a:r>
             <a:endParaRPr lang="en-US" sz="1200" b="0" strike="noStrike" spc="-1">
               <a:latin typeface="Times New Roman"/>
@@ -24968,7 +25208,7 @@
           </a:bodyPr>
           <a:lstStyle/>
           <a:p>
-            <a:pPr marL="399960" indent="-343080">
+            <a:pPr marL="399415" indent="-342900">
               <a:lnSpc>
                 <a:spcPct val="100000"/>
               </a:lnSpc>
@@ -24982,7 +25222,7 @@
               <a:buChar char="•"/>
             </a:pPr>
             <a:r>
-              <a:rPr lang="en-US" sz="2000" b="0" strike="noStrike" spc="-1">
+              <a:rPr lang="en-US" sz="2000" b="0" strike="noStrike" spc="-1" dirty="0">
                 <a:solidFill>
                   <a:srgbClr val="003056"/>
                 </a:solidFill>
@@ -24991,7 +25231,7 @@
               <a:t>Specifically, each attention</a:t>
             </a:r>
             <a:r>
-              <a:rPr lang="en-US" sz="2000" b="0" i="1" strike="noStrike" spc="-1">
+              <a:rPr lang="en-US" sz="2000" b="0" i="1" strike="noStrike" spc="-1" dirty="0">
                 <a:solidFill>
                   <a:srgbClr val="003056"/>
                 </a:solidFill>
@@ -25000,7 +25240,7 @@
               <a:t> </a:t>
             </a:r>
             <a:r>
-              <a:rPr lang="en-US" sz="2000" b="0" strike="noStrike" spc="-1">
+              <a:rPr lang="en-US" sz="2000" b="0" strike="noStrike" spc="-1" dirty="0">
                 <a:solidFill>
                   <a:srgbClr val="003056"/>
                 </a:solidFill>
@@ -25009,7 +25249,7 @@
               <a:t>head </a:t>
             </a:r>
             <a:r>
-              <a:rPr lang="en-US" sz="2000" b="0" i="1" strike="noStrike" spc="-1">
+              <a:rPr lang="en-US" sz="2000" b="0" i="1" strike="noStrike" spc="-1" dirty="0" err="1">
                 <a:solidFill>
                   <a:srgbClr val="003056"/>
                 </a:solidFill>
@@ -25018,7 +25258,7 @@
               <a:t>i</a:t>
             </a:r>
             <a:r>
-              <a:rPr lang="en-US" sz="2000" b="0" strike="noStrike" spc="-1">
+              <a:rPr lang="en-US" sz="2000" b="0" strike="noStrike" spc="-1" dirty="0">
                 <a:solidFill>
                   <a:srgbClr val="003056"/>
                 </a:solidFill>
@@ -25027,7 +25267,7 @@
               <a:t> has parameters </a:t>
             </a:r>
             <a:r>
-              <a:rPr lang="en-US" sz="2000" b="1" i="1" strike="noStrike" spc="-1">
+              <a:rPr lang="en-US" sz="2000" b="1" i="1" strike="noStrike" spc="-1" dirty="0" err="1">
                 <a:solidFill>
                   <a:srgbClr val="003056"/>
                 </a:solidFill>
@@ -25036,7 +25276,7 @@
               <a:t>W</a:t>
             </a:r>
             <a:r>
-              <a:rPr lang="en-US" sz="2000" b="0" i="1" strike="noStrike" spc="-1" baseline="-25000">
+              <a:rPr lang="en-US" sz="2000" b="0" i="1" strike="noStrike" spc="-1" baseline="-25000" dirty="0" err="1">
                 <a:solidFill>
                   <a:srgbClr val="003056"/>
                 </a:solidFill>
@@ -25045,7 +25285,7 @@
               <a:t>i</a:t>
             </a:r>
             <a:r>
-              <a:rPr lang="en-US" sz="2000" b="0" i="1" strike="noStrike" spc="-1" baseline="30000">
+              <a:rPr lang="en-US" sz="2000" b="0" i="1" strike="noStrike" spc="-1" baseline="30000" dirty="0" err="1">
                 <a:solidFill>
                   <a:srgbClr val="003056"/>
                 </a:solidFill>
@@ -25054,7 +25294,7 @@
               <a:t>Q</a:t>
             </a:r>
             <a:r>
-              <a:rPr lang="en-US" sz="2000" b="0" strike="noStrike" spc="-1">
+              <a:rPr lang="en-US" sz="2000" b="0" strike="noStrike" spc="-1" dirty="0">
                 <a:solidFill>
                   <a:srgbClr val="003056"/>
                 </a:solidFill>
@@ -25063,7 +25303,7 @@
               <a:t>, </a:t>
             </a:r>
             <a:r>
-              <a:rPr lang="en-US" sz="2000" b="1" i="1" strike="noStrike" spc="-1">
+              <a:rPr lang="en-US" sz="2000" b="1" i="1" strike="noStrike" spc="-1" dirty="0" err="1">
                 <a:solidFill>
                   <a:srgbClr val="003056"/>
                 </a:solidFill>
@@ -25072,7 +25312,7 @@
               <a:t>W</a:t>
             </a:r>
             <a:r>
-              <a:rPr lang="en-US" sz="2000" b="0" i="1" strike="noStrike" spc="-1" baseline="-25000">
+              <a:rPr lang="en-US" sz="2000" b="0" i="1" strike="noStrike" spc="-1" baseline="-25000" dirty="0" err="1">
                 <a:solidFill>
                   <a:srgbClr val="003056"/>
                 </a:solidFill>
@@ -25081,7 +25321,7 @@
               <a:t>i</a:t>
             </a:r>
             <a:r>
-              <a:rPr lang="en-US" sz="2000" b="0" i="1" strike="noStrike" spc="-1" baseline="30000">
+              <a:rPr lang="en-US" sz="2000" b="0" i="1" strike="noStrike" spc="-1" baseline="30000" dirty="0" err="1">
                 <a:solidFill>
                   <a:srgbClr val="003056"/>
                 </a:solidFill>
@@ -25090,7 +25330,7 @@
               <a:t>K</a:t>
             </a:r>
             <a:r>
-              <a:rPr lang="en-US" sz="2000" b="0" strike="noStrike" spc="-1">
+              <a:rPr lang="en-US" sz="2000" b="0" strike="noStrike" spc="-1" dirty="0">
                 <a:solidFill>
                   <a:srgbClr val="003056"/>
                 </a:solidFill>
@@ -25099,7 +25339,7 @@
               <a:t> and </a:t>
             </a:r>
             <a:r>
-              <a:rPr lang="en-US" sz="2000" b="1" i="1" strike="noStrike" spc="-1">
+              <a:rPr lang="en-US" sz="2000" b="1" i="1" strike="noStrike" spc="-1" dirty="0" err="1">
                 <a:solidFill>
                   <a:srgbClr val="003056"/>
                 </a:solidFill>
@@ -25108,7 +25348,7 @@
               <a:t>W</a:t>
             </a:r>
             <a:r>
-              <a:rPr lang="en-US" sz="2000" b="0" i="1" strike="noStrike" spc="-1" baseline="-25000">
+              <a:rPr lang="en-US" sz="2000" b="0" i="1" strike="noStrike" spc="-1" baseline="-25000" dirty="0" err="1">
                 <a:solidFill>
                   <a:srgbClr val="003056"/>
                 </a:solidFill>
@@ -25117,7 +25357,7 @@
               <a:t>i</a:t>
             </a:r>
             <a:r>
-              <a:rPr lang="en-US" sz="2000" b="0" i="1" strike="noStrike" spc="-1" baseline="30000">
+              <a:rPr lang="en-US" sz="2000" b="0" i="1" strike="noStrike" spc="-1" baseline="30000" dirty="0" err="1">
                 <a:solidFill>
                   <a:srgbClr val="003056"/>
                 </a:solidFill>
@@ -25126,7 +25366,7 @@
               <a:t>V</a:t>
             </a:r>
             <a:r>
-              <a:rPr lang="en-US" sz="2000" b="0" strike="noStrike" spc="-1">
+              <a:rPr lang="en-US" sz="2000" b="0" strike="noStrike" spc="-1" dirty="0">
                 <a:solidFill>
                   <a:srgbClr val="003056"/>
                 </a:solidFill>
@@ -25134,7 +25374,7 @@
               </a:rPr>
               <a:t> </a:t>
             </a:r>
-            <a:endParaRPr lang="de-DE" sz="2000" b="0" strike="noStrike" spc="-1">
+            <a:endParaRPr lang="de-DE" sz="2000" b="0" strike="noStrike" spc="-1" dirty="0">
               <a:solidFill>
                 <a:srgbClr val="003056"/>
               </a:solidFill>
@@ -25142,7 +25382,7 @@
             </a:endParaRPr>
           </a:p>
           <a:p>
-            <a:pPr marL="800280" lvl="1" indent="-285840">
+            <a:pPr marL="800100" lvl="1" indent="-285750">
               <a:lnSpc>
                 <a:spcPct val="100000"/>
               </a:lnSpc>
@@ -25172,7 +25412,7 @@
             </a:endParaRPr>
           </a:p>
           <a:p>
-            <a:pPr marL="800280" lvl="1" indent="-285840">
+            <a:pPr marL="800100" lvl="1" indent="-285750">
               <a:lnSpc>
                 <a:spcPct val="100000"/>
               </a:lnSpc>
@@ -25229,7 +25469,7 @@
             </a:endParaRPr>
           </a:p>
           <a:p>
-            <a:pPr marL="800280" lvl="1" indent="-285840">
+            <a:pPr marL="800100" lvl="1" indent="-285750">
               <a:lnSpc>
                 <a:spcPct val="100000"/>
               </a:lnSpc>
@@ -25243,7 +25483,7 @@
               <a:buChar char="•"/>
             </a:pPr>
             <a:r>
-              <a:rPr lang="en-US" sz="1800" b="0" strike="noStrike" spc="-1">
+              <a:rPr lang="en-US" sz="1800" b="0" strike="noStrike" spc="-1" dirty="0">
                 <a:solidFill>
                   <a:srgbClr val="003056"/>
                 </a:solidFill>
@@ -25252,7 +25492,7 @@
               <a:t>We denote size of values by </a:t>
             </a:r>
             <a:r>
-              <a:rPr lang="en-US" sz="1800" b="1" i="1" strike="noStrike" spc="-1">
+              <a:rPr lang="en-US" sz="1800" b="1" i="1" strike="noStrike" spc="-1" dirty="0" err="1">
                 <a:solidFill>
                   <a:srgbClr val="003056"/>
                 </a:solidFill>
@@ -25261,7 +25501,7 @@
               <a:t>D</a:t>
             </a:r>
             <a:r>
-              <a:rPr lang="en-US" sz="1800" b="0" i="1" strike="noStrike" spc="-1" baseline="-25000">
+              <a:rPr lang="en-US" sz="1800" b="0" i="1" strike="noStrike" spc="-1" baseline="-25000" dirty="0" err="1">
                 <a:solidFill>
                   <a:srgbClr val="003056"/>
                 </a:solidFill>
@@ -25269,7 +25509,7 @@
               </a:rPr>
               <a:t>v</a:t>
             </a:r>
-            <a:endParaRPr lang="de-DE" sz="1800" b="0" strike="noStrike" spc="-1">
+            <a:endParaRPr lang="de-DE" sz="1800" b="0" strike="noStrike" spc="-1" dirty="0" err="1">
               <a:solidFill>
                 <a:srgbClr val="003056"/>
               </a:solidFill>
@@ -25277,7 +25517,7 @@
             </a:endParaRPr>
           </a:p>
           <a:p>
-            <a:pPr marL="800280" lvl="1" indent="-285840">
+            <a:pPr marL="800100" lvl="1" indent="-285750">
               <a:lnSpc>
                 <a:spcPct val="100000"/>
               </a:lnSpc>
@@ -25291,7 +25531,7 @@
               <a:buChar char="•"/>
             </a:pPr>
             <a:r>
-              <a:rPr lang="en-US" sz="1800" b="0" strike="noStrike" spc="-1">
+              <a:rPr lang="en-US" sz="1800" b="0" strike="noStrike" spc="-1" dirty="0">
                 <a:solidFill>
                   <a:srgbClr val="003056"/>
                 </a:solidFill>
@@ -25300,7 +25540,7 @@
               <a:t>Then </a:t>
             </a:r>
             <a:r>
-              <a:rPr lang="en-US" sz="1800" b="1" i="1" strike="noStrike" spc="-1">
+              <a:rPr lang="en-US" sz="1800" b="1" i="1" strike="noStrike" spc="-1" dirty="0" err="1">
                 <a:solidFill>
                   <a:srgbClr val="003056"/>
                 </a:solidFill>
@@ -25309,7 +25549,7 @@
               <a:t>W</a:t>
             </a:r>
             <a:r>
-              <a:rPr lang="en-US" sz="1800" b="0" i="1" strike="noStrike" spc="-1" baseline="-25000">
+              <a:rPr lang="en-US" sz="1800" b="0" i="1" strike="noStrike" spc="-1" baseline="-25000" dirty="0" err="1">
                 <a:solidFill>
                   <a:srgbClr val="003056"/>
                 </a:solidFill>
@@ -25318,7 +25558,7 @@
               <a:t>i</a:t>
             </a:r>
             <a:r>
-              <a:rPr lang="en-US" sz="1800" b="0" i="1" strike="noStrike" spc="-1" baseline="30000">
+              <a:rPr lang="en-US" sz="1800" b="0" i="1" strike="noStrike" spc="-1" baseline="30000" dirty="0" err="1">
                 <a:solidFill>
                   <a:srgbClr val="003056"/>
                 </a:solidFill>
@@ -25327,7 +25567,7 @@
               <a:t>Q</a:t>
             </a:r>
             <a:r>
-              <a:rPr lang="az-Cyrl-AZ" sz="1800" b="0" i="1" strike="noStrike" spc="-1">
+              <a:rPr lang="az-Cyrl-AZ" sz="1800" b="0" i="1" strike="noStrike" spc="-1" dirty="0">
                 <a:solidFill>
                   <a:srgbClr val="003056"/>
                 </a:solidFill>
@@ -25336,16 +25576,25 @@
               <a:t> Є</a:t>
             </a:r>
             <a:r>
-              <a:rPr lang="en-US" sz="1800" b="0" i="1" strike="noStrike" spc="-1">
-                <a:solidFill>
-                  <a:srgbClr val="003056"/>
-                </a:solidFill>
-                <a:latin typeface="Calibri"/>
-              </a:rPr>
-              <a:t> R</a:t>
-            </a:r>
-            <a:r>
-              <a:rPr lang="en-US" sz="1800" b="0" i="1" strike="noStrike" spc="-1" baseline="30000">
+              <a:rPr lang="en-US" sz="1800" b="0" i="1" strike="noStrike" spc="-1" dirty="0">
+                <a:solidFill>
+                  <a:srgbClr val="003056"/>
+                </a:solidFill>
+                <a:latin typeface="Calibri"/>
+              </a:rPr>
+              <a:t> </a:t>
+            </a:r>
+            <a:r>
+              <a:rPr lang="en-US" sz="1800" b="0" i="1" strike="noStrike" spc="-1" dirty="0" err="1">
+                <a:solidFill>
+                  <a:srgbClr val="003056"/>
+                </a:solidFill>
+                <a:latin typeface="Calibri"/>
+              </a:rPr>
+              <a:t>R</a:t>
+            </a:r>
+            <a:r>
+              <a:rPr lang="en-US" sz="1800" b="0" i="1" strike="noStrike" spc="-1" baseline="30000" dirty="0" err="1">
                 <a:solidFill>
                   <a:srgbClr val="003056"/>
                 </a:solidFill>
@@ -25354,7 +25603,7 @@
               <a:t>DxDk</a:t>
             </a:r>
             <a:r>
-              <a:rPr lang="en-US" sz="1800" b="0" strike="noStrike" spc="-1">
+              <a:rPr lang="en-US" sz="1800" b="0" strike="noStrike" spc="-1" dirty="0">
                 <a:solidFill>
                   <a:srgbClr val="003056"/>
                 </a:solidFill>
@@ -25363,7 +25612,7 @@
               <a:t>, </a:t>
             </a:r>
             <a:r>
-              <a:rPr lang="en-US" sz="1800" b="1" i="1" strike="noStrike" spc="-1">
+              <a:rPr lang="en-US" sz="1800" b="1" i="1" strike="noStrike" spc="-1" dirty="0" err="1">
                 <a:solidFill>
                   <a:srgbClr val="003056"/>
                 </a:solidFill>
@@ -25372,7 +25621,7 @@
               <a:t>W</a:t>
             </a:r>
             <a:r>
-              <a:rPr lang="en-US" sz="1800" b="0" i="1" strike="noStrike" spc="-1" baseline="-25000">
+              <a:rPr lang="en-US" sz="1800" b="0" i="1" strike="noStrike" spc="-1" baseline="-25000" dirty="0" err="1">
                 <a:solidFill>
                   <a:srgbClr val="003056"/>
                 </a:solidFill>
@@ -25381,7 +25630,7 @@
               <a:t>i</a:t>
             </a:r>
             <a:r>
-              <a:rPr lang="en-US" sz="1800" b="0" i="1" strike="noStrike" spc="-1" baseline="30000">
+              <a:rPr lang="en-US" sz="1800" b="0" i="1" strike="noStrike" spc="-1" baseline="30000" dirty="0" err="1">
                 <a:solidFill>
                   <a:srgbClr val="003056"/>
                 </a:solidFill>
@@ -25390,7 +25639,7 @@
               <a:t>K</a:t>
             </a:r>
             <a:r>
-              <a:rPr lang="az-Cyrl-AZ" sz="1800" b="0" i="1" strike="noStrike" spc="-1">
+              <a:rPr lang="az-Cyrl-AZ" sz="1800" b="0" i="1" strike="noStrike" spc="-1" dirty="0">
                 <a:solidFill>
                   <a:srgbClr val="003056"/>
                 </a:solidFill>
@@ -25399,16 +25648,25 @@
               <a:t> Є</a:t>
             </a:r>
             <a:r>
-              <a:rPr lang="en-US" sz="1800" b="0" i="1" strike="noStrike" spc="-1">
-                <a:solidFill>
-                  <a:srgbClr val="003056"/>
-                </a:solidFill>
-                <a:latin typeface="Calibri"/>
-              </a:rPr>
-              <a:t> R</a:t>
-            </a:r>
-            <a:r>
-              <a:rPr lang="en-US" sz="1800" b="0" i="1" strike="noStrike" spc="-1" baseline="30000">
+              <a:rPr lang="en-US" sz="1800" b="0" i="1" strike="noStrike" spc="-1" dirty="0">
+                <a:solidFill>
+                  <a:srgbClr val="003056"/>
+                </a:solidFill>
+                <a:latin typeface="Calibri"/>
+              </a:rPr>
+              <a:t> </a:t>
+            </a:r>
+            <a:r>
+              <a:rPr lang="en-US" sz="1800" b="0" i="1" strike="noStrike" spc="-1" dirty="0" err="1">
+                <a:solidFill>
+                  <a:srgbClr val="003056"/>
+                </a:solidFill>
+                <a:latin typeface="Calibri"/>
+              </a:rPr>
+              <a:t>R</a:t>
+            </a:r>
+            <a:r>
+              <a:rPr lang="en-US" sz="1800" b="0" i="1" strike="noStrike" spc="-1" baseline="30000" dirty="0" err="1">
                 <a:solidFill>
                   <a:srgbClr val="003056"/>
                 </a:solidFill>
@@ -25417,7 +25675,7 @@
               <a:t>DxDk</a:t>
             </a:r>
             <a:r>
-              <a:rPr lang="en-US" sz="1800" b="0" strike="noStrike" spc="-1">
+              <a:rPr lang="en-US" sz="1800" b="0" strike="noStrike" spc="-1" dirty="0">
                 <a:solidFill>
                   <a:srgbClr val="003056"/>
                 </a:solidFill>
@@ -25426,7 +25684,7 @@
               <a:t> and </a:t>
             </a:r>
             <a:r>
-              <a:rPr lang="en-US" sz="1800" b="1" i="1" strike="noStrike" spc="-1">
+              <a:rPr lang="en-US" sz="1800" b="1" i="1" strike="noStrike" spc="-1" dirty="0" err="1">
                 <a:solidFill>
                   <a:srgbClr val="003056"/>
                 </a:solidFill>
@@ -25435,7 +25693,7 @@
               <a:t>W</a:t>
             </a:r>
             <a:r>
-              <a:rPr lang="en-US" sz="1800" b="0" i="1" strike="noStrike" spc="-1" baseline="-25000">
+              <a:rPr lang="en-US" sz="1800" b="0" i="1" strike="noStrike" spc="-1" baseline="-25000" dirty="0" err="1">
                 <a:solidFill>
                   <a:srgbClr val="003056"/>
                 </a:solidFill>
@@ -25444,7 +25702,7 @@
               <a:t>i</a:t>
             </a:r>
             <a:r>
-              <a:rPr lang="en-US" sz="1800" b="0" i="1" strike="noStrike" spc="-1" baseline="30000">
+              <a:rPr lang="en-US" sz="1800" b="0" i="1" strike="noStrike" spc="-1" baseline="30000" dirty="0" err="1">
                 <a:solidFill>
                   <a:srgbClr val="003056"/>
                 </a:solidFill>
@@ -25453,7 +25711,7 @@
               <a:t>V</a:t>
             </a:r>
             <a:r>
-              <a:rPr lang="az-Cyrl-AZ" sz="1800" b="0" i="1" strike="noStrike" spc="-1">
+              <a:rPr lang="az-Cyrl-AZ" sz="1800" b="0" i="1" strike="noStrike" spc="-1" dirty="0">
                 <a:solidFill>
                   <a:srgbClr val="003056"/>
                 </a:solidFill>
@@ -25462,16 +25720,25 @@
               <a:t> Є</a:t>
             </a:r>
             <a:r>
-              <a:rPr lang="en-US" sz="1800" b="0" i="1" strike="noStrike" spc="-1">
-                <a:solidFill>
-                  <a:srgbClr val="003056"/>
-                </a:solidFill>
-                <a:latin typeface="Calibri"/>
-              </a:rPr>
-              <a:t> R</a:t>
-            </a:r>
-            <a:r>
-              <a:rPr lang="en-US" sz="1800" b="0" i="1" strike="noStrike" spc="-1" baseline="30000">
+              <a:rPr lang="en-US" sz="1800" b="0" i="1" strike="noStrike" spc="-1" dirty="0">
+                <a:solidFill>
+                  <a:srgbClr val="003056"/>
+                </a:solidFill>
+                <a:latin typeface="Calibri"/>
+              </a:rPr>
+              <a:t> </a:t>
+            </a:r>
+            <a:r>
+              <a:rPr lang="en-US" sz="1800" b="0" i="1" strike="noStrike" spc="-1" dirty="0" err="1">
+                <a:solidFill>
+                  <a:srgbClr val="003056"/>
+                </a:solidFill>
+                <a:latin typeface="Calibri"/>
+              </a:rPr>
+              <a:t>R</a:t>
+            </a:r>
+            <a:r>
+              <a:rPr lang="en-US" sz="1800" b="0" i="1" strike="noStrike" spc="-1" baseline="30000" dirty="0" err="1">
                 <a:solidFill>
                   <a:srgbClr val="003056"/>
                 </a:solidFill>
@@ -25480,7 +25747,7 @@
               <a:t>DxDv</a:t>
             </a:r>
             <a:r>
-              <a:rPr lang="en-US" sz="1800" b="0" strike="noStrike" spc="-1">
+              <a:rPr lang="en-US" sz="1800" b="0" strike="noStrike" spc="-1" dirty="0">
                 <a:solidFill>
                   <a:srgbClr val="003056"/>
                 </a:solidFill>
@@ -25489,7 +25756,7 @@
               <a:t> where </a:t>
             </a:r>
             <a:r>
-              <a:rPr lang="en-US" sz="1800" b="0" i="1" strike="noStrike" spc="-1">
+              <a:rPr lang="en-US" sz="1800" b="0" i="1" strike="noStrike" spc="-1" dirty="0">
                 <a:solidFill>
                   <a:srgbClr val="003056"/>
                 </a:solidFill>
@@ -25498,7 +25765,7 @@
               <a:t>D</a:t>
             </a:r>
             <a:r>
-              <a:rPr lang="en-US" sz="1800" b="0" strike="noStrike" spc="-1">
+              <a:rPr lang="en-US" sz="1800" b="0" strike="noStrike" spc="-1" dirty="0">
                 <a:solidFill>
                   <a:srgbClr val="003056"/>
                 </a:solidFill>
@@ -25506,7 +25773,7 @@
               </a:rPr>
               <a:t> is size of input tokens</a:t>
             </a:r>
-            <a:endParaRPr lang="de-DE" sz="1800" b="0" strike="noStrike" spc="-1">
+            <a:endParaRPr lang="de-DE" sz="1800" b="0" strike="noStrike" spc="-1" dirty="0">
               <a:solidFill>
                 <a:srgbClr val="003056"/>
               </a:solidFill>
@@ -25514,7 +25781,7 @@
             </a:endParaRPr>
           </a:p>
           <a:p>
-            <a:pPr marL="399960" indent="-343080">
+            <a:pPr marL="399415" indent="-342900">
               <a:lnSpc>
                 <a:spcPct val="100000"/>
               </a:lnSpc>
@@ -25571,7 +25838,7 @@
             </a:endParaRPr>
           </a:p>
           <a:p>
-            <a:pPr marL="800280" lvl="1" indent="-285840">
+            <a:pPr marL="800100" lvl="1" indent="-285750">
               <a:lnSpc>
                 <a:spcPct val="100000"/>
               </a:lnSpc>
@@ -25585,7 +25852,7 @@
               <a:buChar char="•"/>
             </a:pPr>
             <a:r>
-              <a:rPr lang="en-US" sz="1800" b="0" strike="noStrike" spc="-1">
+              <a:rPr lang="en-US" sz="1800" b="0" strike="noStrike" spc="-1" dirty="0">
                 <a:solidFill>
                   <a:srgbClr val="003056"/>
                 </a:solidFill>
@@ -25594,7 +25861,7 @@
               <a:t>Then, </a:t>
             </a:r>
             <a:r>
-              <a:rPr lang="en-US" sz="1800" b="1" i="1" strike="noStrike" spc="-1">
+              <a:rPr lang="en-US" sz="1800" b="1" i="1" strike="noStrike" spc="-1" dirty="0">
                 <a:solidFill>
                   <a:srgbClr val="003056"/>
                 </a:solidFill>
@@ -25603,7 +25870,7 @@
               <a:t>Q</a:t>
             </a:r>
             <a:r>
-              <a:rPr lang="en-US" sz="1800" b="0" i="1" strike="noStrike" spc="-1" baseline="-25000">
+              <a:rPr lang="en-US" sz="1800" b="0" i="1" strike="noStrike" spc="-1" baseline="-25000" dirty="0">
                 <a:solidFill>
                   <a:srgbClr val="003056"/>
                 </a:solidFill>
@@ -25612,7 +25879,7 @@
               <a:t>i</a:t>
             </a:r>
             <a:r>
-              <a:rPr lang="en-US" sz="1800" b="0" i="1" strike="noStrike" spc="-1">
+              <a:rPr lang="en-US" sz="1800" b="0" i="1" strike="noStrike" spc="-1" dirty="0">
                 <a:solidFill>
                   <a:srgbClr val="003056"/>
                 </a:solidFill>
@@ -25621,7 +25888,7 @@
               <a:t> = </a:t>
             </a:r>
             <a:r>
-              <a:rPr lang="en-US" sz="1800" b="1" i="1" strike="noStrike" spc="-1">
+              <a:rPr lang="en-US" sz="1800" b="1" i="1" strike="noStrike" spc="-1" dirty="0" err="1">
                 <a:solidFill>
                   <a:srgbClr val="003056"/>
                 </a:solidFill>
@@ -25630,7 +25897,7 @@
               <a:t>XW</a:t>
             </a:r>
             <a:r>
-              <a:rPr lang="en-US" sz="1800" b="0" i="1" strike="noStrike" spc="-1" baseline="-25000">
+              <a:rPr lang="en-US" sz="1800" b="0" i="1" strike="noStrike" spc="-1" baseline="-25000" dirty="0" err="1">
                 <a:solidFill>
                   <a:srgbClr val="003056"/>
                 </a:solidFill>
@@ -25639,7 +25906,7 @@
               <a:t>i</a:t>
             </a:r>
             <a:r>
-              <a:rPr lang="en-US" sz="1800" b="0" i="1" strike="noStrike" spc="-1" baseline="30000">
+              <a:rPr lang="en-US" sz="1800" b="0" i="1" strike="noStrike" spc="-1" baseline="30000" dirty="0" err="1">
                 <a:solidFill>
                   <a:srgbClr val="003056"/>
                 </a:solidFill>
@@ -25648,7 +25915,7 @@
               <a:t>Q</a:t>
             </a:r>
             <a:r>
-              <a:rPr lang="az-Cyrl-AZ" sz="1800" b="0" i="1" strike="noStrike" spc="-1">
+              <a:rPr lang="az-Cyrl-AZ" sz="1800" b="0" i="1" strike="noStrike" spc="-1" dirty="0">
                 <a:solidFill>
                   <a:srgbClr val="003056"/>
                 </a:solidFill>
@@ -25657,7 +25924,7 @@
               <a:t> </a:t>
             </a:r>
             <a:r>
-              <a:rPr lang="en-US" sz="1800" b="0" i="1" strike="noStrike" spc="-1">
+              <a:rPr lang="en-US" sz="1800" b="0" i="1" strike="noStrike" spc="-1" dirty="0">
                 <a:solidFill>
                   <a:srgbClr val="003056"/>
                 </a:solidFill>
@@ -25666,7 +25933,7 @@
               <a:t>, </a:t>
             </a:r>
             <a:r>
-              <a:rPr lang="en-US" sz="1800" b="1" i="1" strike="noStrike" spc="-1">
+              <a:rPr lang="en-US" sz="1800" b="1" i="1" strike="noStrike" spc="-1" dirty="0">
                 <a:solidFill>
                   <a:srgbClr val="003056"/>
                 </a:solidFill>
@@ -25675,7 +25942,7 @@
               <a:t>K</a:t>
             </a:r>
             <a:r>
-              <a:rPr lang="en-US" sz="1800" b="0" i="1" strike="noStrike" spc="-1" baseline="-25000">
+              <a:rPr lang="en-US" sz="1800" b="0" i="1" strike="noStrike" spc="-1" baseline="-25000" dirty="0">
                 <a:solidFill>
                   <a:srgbClr val="003056"/>
                 </a:solidFill>
@@ -25684,7 +25951,7 @@
               <a:t>i</a:t>
             </a:r>
             <a:r>
-              <a:rPr lang="en-US" sz="1800" b="0" i="1" strike="noStrike" spc="-1">
+              <a:rPr lang="en-US" sz="1800" b="0" i="1" strike="noStrike" spc="-1" dirty="0">
                 <a:solidFill>
                   <a:srgbClr val="003056"/>
                 </a:solidFill>
@@ -25693,7 +25960,7 @@
               <a:t> = </a:t>
             </a:r>
             <a:r>
-              <a:rPr lang="en-US" sz="1800" b="1" i="1" strike="noStrike" spc="-1">
+              <a:rPr lang="en-US" sz="1800" b="1" i="1" strike="noStrike" spc="-1" dirty="0" err="1">
                 <a:solidFill>
                   <a:srgbClr val="003056"/>
                 </a:solidFill>
@@ -25702,7 +25969,7 @@
               <a:t>XW</a:t>
             </a:r>
             <a:r>
-              <a:rPr lang="en-US" sz="1800" b="0" i="1" strike="noStrike" spc="-1" baseline="-25000">
+              <a:rPr lang="en-US" sz="1800" b="0" i="1" strike="noStrike" spc="-1" baseline="-25000" dirty="0" err="1">
                 <a:solidFill>
                   <a:srgbClr val="003056"/>
                 </a:solidFill>
@@ -25711,16 +25978,25 @@
               <a:t>i</a:t>
             </a:r>
             <a:r>
-              <a:rPr lang="en-US" sz="1800" b="0" i="1" strike="noStrike" spc="-1" baseline="30000">
-                <a:solidFill>
-                  <a:srgbClr val="003056"/>
-                </a:solidFill>
-                <a:latin typeface="Calibri"/>
-              </a:rPr>
-              <a:t>K, </a:t>
-            </a:r>
-            <a:r>
-              <a:rPr lang="en-US" sz="1800" b="1" i="1" strike="noStrike" spc="-1">
+              <a:rPr lang="en-US" sz="1800" b="0" i="1" strike="noStrike" spc="-1" baseline="30000" dirty="0" err="1">
+                <a:solidFill>
+                  <a:srgbClr val="003056"/>
+                </a:solidFill>
+                <a:latin typeface="Calibri"/>
+              </a:rPr>
+              <a:t>K</a:t>
+            </a:r>
+            <a:r>
+              <a:rPr lang="en-US" sz="1800" b="0" i="1" strike="noStrike" spc="-1" baseline="30000" dirty="0">
+                <a:solidFill>
+                  <a:srgbClr val="003056"/>
+                </a:solidFill>
+                <a:latin typeface="Calibri"/>
+              </a:rPr>
+              <a:t>, </a:t>
+            </a:r>
+            <a:r>
+              <a:rPr lang="en-US" sz="1800" b="1" i="1" strike="noStrike" spc="-1" dirty="0">
                 <a:solidFill>
                   <a:srgbClr val="003056"/>
                 </a:solidFill>
@@ -25729,7 +26005,7 @@
               <a:t>V</a:t>
             </a:r>
             <a:r>
-              <a:rPr lang="en-US" sz="1800" b="0" i="1" strike="noStrike" spc="-1" baseline="-25000">
+              <a:rPr lang="en-US" sz="1800" b="0" i="1" strike="noStrike" spc="-1" baseline="-25000" dirty="0">
                 <a:solidFill>
                   <a:srgbClr val="003056"/>
                 </a:solidFill>
@@ -25738,7 +26014,7 @@
               <a:t>i</a:t>
             </a:r>
             <a:r>
-              <a:rPr lang="en-US" sz="1800" b="0" i="1" strike="noStrike" spc="-1">
+              <a:rPr lang="en-US" sz="1800" b="0" i="1" strike="noStrike" spc="-1" dirty="0">
                 <a:solidFill>
                   <a:srgbClr val="003056"/>
                 </a:solidFill>
@@ -25747,7 +26023,7 @@
               <a:t> = </a:t>
             </a:r>
             <a:r>
-              <a:rPr lang="en-US" sz="1800" b="1" i="1" strike="noStrike" spc="-1">
+              <a:rPr lang="en-US" sz="1800" b="1" i="1" strike="noStrike" spc="-1" dirty="0" err="1">
                 <a:solidFill>
                   <a:srgbClr val="003056"/>
                 </a:solidFill>
@@ -25756,7 +26032,7 @@
               <a:t>XW</a:t>
             </a:r>
             <a:r>
-              <a:rPr lang="en-US" sz="1800" b="0" i="1" strike="noStrike" spc="-1" baseline="-25000">
+              <a:rPr lang="en-US" sz="1800" b="0" i="1" strike="noStrike" spc="-1" baseline="-25000" dirty="0" err="1">
                 <a:solidFill>
                   <a:srgbClr val="003056"/>
                 </a:solidFill>
@@ -25765,7 +26041,7 @@
               <a:t>i</a:t>
             </a:r>
             <a:r>
-              <a:rPr lang="en-US" sz="1800" b="0" i="1" strike="noStrike" spc="-1" baseline="30000">
+              <a:rPr lang="en-US" sz="1800" b="0" i="1" strike="noStrike" spc="-1" baseline="30000" dirty="0" err="1">
                 <a:solidFill>
                   <a:srgbClr val="003056"/>
                 </a:solidFill>
@@ -25773,7 +26049,7 @@
               </a:rPr>
               <a:t>V</a:t>
             </a:r>
-            <a:endParaRPr lang="de-DE" sz="1800" b="0" strike="noStrike" spc="-1">
+            <a:endParaRPr lang="de-DE" sz="1800" b="0" strike="noStrike" spc="-1" dirty="0" err="1">
               <a:solidFill>
                 <a:srgbClr val="003056"/>
               </a:solidFill>
@@ -25781,7 +26057,7 @@
             </a:endParaRPr>
           </a:p>
           <a:p>
-            <a:pPr marL="399960" indent="-343080">
+            <a:pPr marL="399415" indent="-342900">
               <a:lnSpc>
                 <a:spcPct val="100000"/>
               </a:lnSpc>
@@ -25795,7 +26071,7 @@
               <a:buChar char="•"/>
             </a:pPr>
             <a:r>
-              <a:rPr lang="en-US" sz="2000" b="0" strike="noStrike" spc="-1">
+              <a:rPr lang="en-US" sz="2000" b="0" strike="noStrike" spc="-1" dirty="0">
                 <a:solidFill>
                   <a:srgbClr val="003056"/>
                 </a:solidFill>
@@ -25804,7 +26080,7 @@
               <a:t>We thus have </a:t>
             </a:r>
             <a:r>
-              <a:rPr lang="en-US" sz="2000" b="1" i="1" strike="noStrike" spc="-1">
+              <a:rPr lang="en-US" sz="2000" b="1" i="1" strike="noStrike" spc="-1" dirty="0" err="1">
                 <a:solidFill>
                   <a:srgbClr val="003056"/>
                 </a:solidFill>
@@ -25813,7 +26089,7 @@
               <a:t>head</a:t>
             </a:r>
             <a:r>
-              <a:rPr lang="en-US" sz="2000" b="0" i="1" strike="noStrike" spc="-1" baseline="-25000">
+              <a:rPr lang="en-US" sz="2000" b="0" i="1" strike="noStrike" spc="-1" baseline="-25000" dirty="0" err="1">
                 <a:solidFill>
                   <a:srgbClr val="003056"/>
                 </a:solidFill>
@@ -25822,7 +26098,7 @@
               <a:t>i</a:t>
             </a:r>
             <a:r>
-              <a:rPr lang="en-US" sz="2000" b="0" i="1" strike="noStrike" spc="-1">
+              <a:rPr lang="en-US" sz="2000" b="0" i="1" strike="noStrike" spc="-1" dirty="0">
                 <a:solidFill>
                   <a:srgbClr val="003056"/>
                 </a:solidFill>
@@ -25831,7 +26107,7 @@
               <a:t> = Self-Attention(</a:t>
             </a:r>
             <a:r>
-              <a:rPr lang="en-US" sz="2000" b="1" i="1" strike="noStrike" spc="-1">
+              <a:rPr lang="en-US" sz="2000" b="1" i="1" strike="noStrike" spc="-1" dirty="0" err="1">
                 <a:solidFill>
                   <a:srgbClr val="003056"/>
                 </a:solidFill>
@@ -25840,7 +26116,7 @@
               <a:t>Q</a:t>
             </a:r>
             <a:r>
-              <a:rPr lang="en-US" sz="2000" b="0" i="1" strike="noStrike" spc="-1" baseline="-25000">
+              <a:rPr lang="en-US" sz="2000" b="0" i="1" strike="noStrike" spc="-1" baseline="-25000" dirty="0" err="1">
                 <a:solidFill>
                   <a:srgbClr val="003056"/>
                 </a:solidFill>
@@ -25849,7 +26125,7 @@
               <a:t>i</a:t>
             </a:r>
             <a:r>
-              <a:rPr lang="en-US" sz="2000" b="0" i="1" strike="noStrike" spc="-1">
+              <a:rPr lang="en-US" sz="2000" b="0" i="1" strike="noStrike" spc="-1" dirty="0" err="1">
                 <a:solidFill>
                   <a:srgbClr val="003056"/>
                 </a:solidFill>
@@ -25858,7 +26134,7 @@
               <a:t>,</a:t>
             </a:r>
             <a:r>
-              <a:rPr lang="en-US" sz="2000" b="1" i="1" strike="noStrike" spc="-1">
+              <a:rPr lang="en-US" sz="2000" b="1" i="1" strike="noStrike" spc="-1" dirty="0" err="1">
                 <a:solidFill>
                   <a:srgbClr val="003056"/>
                 </a:solidFill>
@@ -25867,7 +26143,7 @@
               <a:t>K</a:t>
             </a:r>
             <a:r>
-              <a:rPr lang="en-US" sz="2000" b="0" i="1" strike="noStrike" spc="-1" baseline="-25000">
+              <a:rPr lang="en-US" sz="2000" b="0" i="1" strike="noStrike" spc="-1" baseline="-25000" dirty="0" err="1">
                 <a:solidFill>
                   <a:srgbClr val="003056"/>
                 </a:solidFill>
@@ -25876,7 +26152,7 @@
               <a:t>i</a:t>
             </a:r>
             <a:r>
-              <a:rPr lang="en-US" sz="2000" b="0" i="1" strike="noStrike" spc="-1">
+              <a:rPr lang="en-US" sz="2000" b="0" i="1" strike="noStrike" spc="-1" dirty="0" err="1">
                 <a:solidFill>
                   <a:srgbClr val="003056"/>
                 </a:solidFill>
@@ -25885,7 +26161,7 @@
               <a:t>,</a:t>
             </a:r>
             <a:r>
-              <a:rPr lang="en-US" sz="2000" b="1" i="1" strike="noStrike" spc="-1">
+              <a:rPr lang="en-US" sz="2000" b="1" i="1" strike="noStrike" spc="-1" dirty="0" err="1">
                 <a:solidFill>
                   <a:srgbClr val="003056"/>
                 </a:solidFill>
@@ -25894,7 +26170,7 @@
               <a:t>V</a:t>
             </a:r>
             <a:r>
-              <a:rPr lang="en-US" sz="2000" b="0" i="1" strike="noStrike" spc="-1" baseline="-25000">
+              <a:rPr lang="en-US" sz="2000" b="0" i="1" strike="noStrike" spc="-1" baseline="-25000" dirty="0" err="1">
                 <a:solidFill>
                   <a:srgbClr val="003056"/>
                 </a:solidFill>
@@ -25903,7 +26179,7 @@
               <a:t>i</a:t>
             </a:r>
             <a:r>
-              <a:rPr lang="en-US" sz="2000" b="0" i="1" strike="noStrike" spc="-1">
+              <a:rPr lang="en-US" sz="2000" b="0" i="1" strike="noStrike" spc="-1" dirty="0">
                 <a:solidFill>
                   <a:srgbClr val="003056"/>
                 </a:solidFill>
@@ -25911,7 +26187,7 @@
               </a:rPr>
               <a:t>)</a:t>
             </a:r>
-            <a:endParaRPr lang="de-DE" sz="2000" b="0" strike="noStrike" spc="-1">
+            <a:endParaRPr lang="de-DE" sz="2000" b="0" strike="noStrike" spc="-1" dirty="0">
               <a:solidFill>
                 <a:srgbClr val="003056"/>
               </a:solidFill>
@@ -25919,7 +26195,7 @@
             </a:endParaRPr>
           </a:p>
           <a:p>
-            <a:pPr marL="399960" indent="-343080">
+            <a:pPr marL="399415" indent="-342900">
               <a:lnSpc>
                 <a:spcPct val="100000"/>
               </a:lnSpc>
@@ -25985,7 +26261,7 @@
             </a:endParaRPr>
           </a:p>
           <a:p>
-            <a:pPr marL="800280" lvl="1" indent="-285840">
+            <a:pPr marL="800100" lvl="1" indent="-285750">
               <a:lnSpc>
                 <a:spcPct val="100000"/>
               </a:lnSpc>
@@ -25999,25 +26275,34 @@
               <a:buChar char="•"/>
             </a:pPr>
             <a:r>
-              <a:rPr lang="en-US" sz="1800" b="0" i="1" strike="noStrike" spc="-1">
-                <a:solidFill>
-                  <a:srgbClr val="003056"/>
-                </a:solidFill>
-                <a:latin typeface="Calibri"/>
-              </a:rPr>
-              <a:t>MultiHeadAttention(</a:t>
-            </a:r>
-            <a:r>
-              <a:rPr lang="en-US" sz="1800" b="1" i="1" strike="noStrike" spc="-1">
-                <a:solidFill>
-                  <a:srgbClr val="003056"/>
-                </a:solidFill>
-                <a:latin typeface="Calibri"/>
-              </a:rPr>
-              <a:t>X </a:t>
-            </a:r>
-            <a:r>
-              <a:rPr lang="en-US" sz="1800" b="0" i="1" strike="noStrike" spc="-1">
+              <a:rPr lang="en-US" sz="1800" b="0" i="1" strike="noStrike" spc="-1" dirty="0" err="1">
+                <a:solidFill>
+                  <a:srgbClr val="003056"/>
+                </a:solidFill>
+                <a:latin typeface="Calibri"/>
+              </a:rPr>
+              <a:t>MultiHeadAttention</a:t>
+            </a:r>
+            <a:r>
+              <a:rPr lang="en-US" sz="1800" b="0" i="1" strike="noStrike" spc="-1" dirty="0">
+                <a:solidFill>
+                  <a:srgbClr val="003056"/>
+                </a:solidFill>
+                <a:latin typeface="Calibri"/>
+              </a:rPr>
+              <a:t>(</a:t>
+            </a:r>
+            <a:r>
+              <a:rPr lang="en-US" sz="1800" b="1" i="1" strike="noStrike" spc="-1" dirty="0">
+                <a:solidFill>
+                  <a:srgbClr val="003056"/>
+                </a:solidFill>
+                <a:latin typeface="Calibri"/>
+              </a:rPr>
+              <a:t>X</a:t>
+            </a:r>
+            <a:r>
+              <a:rPr lang="en-US" sz="1800" b="0" i="1" strike="noStrike" spc="-1" dirty="0">
                 <a:solidFill>
                   <a:srgbClr val="003056"/>
                 </a:solidFill>
@@ -26026,7 +26311,7 @@
               <a:t>) = (</a:t>
             </a:r>
             <a:r>
-              <a:rPr lang="en-US" sz="1800" b="1" i="1" strike="noStrike" spc="-1">
+              <a:rPr lang="en-US" sz="1800" b="1" i="1" strike="noStrike" spc="-1" dirty="0">
                 <a:solidFill>
                   <a:srgbClr val="003056"/>
                 </a:solidFill>
@@ -26035,7 +26320,7 @@
               <a:t>head</a:t>
             </a:r>
             <a:r>
-              <a:rPr lang="en-US" sz="1800" b="0" i="1" strike="noStrike" spc="-1" baseline="-25000">
+              <a:rPr lang="en-US" sz="1800" b="0" i="1" strike="noStrike" spc="-1" baseline="-25000" dirty="0">
                 <a:solidFill>
                   <a:srgbClr val="003056"/>
                 </a:solidFill>
@@ -26044,7 +26329,7 @@
               <a:t>1</a:t>
             </a:r>
             <a:r>
-              <a:rPr lang="en-US" sz="1800" b="1" i="1" strike="noStrike" spc="-1">
+              <a:rPr lang="en-US" sz="1800" b="1" i="1" strike="noStrike" spc="-1" dirty="0">
                 <a:solidFill>
                   <a:srgbClr val="003056"/>
                 </a:solidFill>
@@ -26053,7 +26338,7 @@
               <a:t> </a:t>
             </a:r>
             <a:r>
-              <a:rPr lang="en-US" sz="1800" b="0" i="1" strike="noStrike" spc="-1">
+              <a:rPr lang="en-US" sz="1800" b="0" i="1" strike="noStrike" spc="-1" dirty="0">
                 <a:solidFill>
                   <a:srgbClr val="003056"/>
                 </a:solidFill>
@@ -26062,7 +26347,7 @@
               <a:t>(+)</a:t>
             </a:r>
             <a:r>
-              <a:rPr lang="en-US" sz="1800" b="1" i="1" strike="noStrike" spc="-1">
+              <a:rPr lang="en-US" sz="1800" b="1" i="1" strike="noStrike" spc="-1" dirty="0">
                 <a:solidFill>
                   <a:srgbClr val="003056"/>
                 </a:solidFill>
@@ -26071,7 +26356,7 @@
               <a:t> head</a:t>
             </a:r>
             <a:r>
-              <a:rPr lang="en-US" sz="1800" b="0" i="1" strike="noStrike" spc="-1" baseline="-25000">
+              <a:rPr lang="en-US" sz="1800" b="0" i="1" strike="noStrike" spc="-1" baseline="-25000" dirty="0">
                 <a:solidFill>
                   <a:srgbClr val="003056"/>
                 </a:solidFill>
@@ -26080,7 +26365,7 @@
               <a:t>2</a:t>
             </a:r>
             <a:r>
-              <a:rPr lang="en-US" sz="1800" b="0" i="1" strike="noStrike" spc="-1">
+              <a:rPr lang="en-US" sz="1800" b="0" i="1" strike="noStrike" spc="-1" dirty="0">
                 <a:solidFill>
                   <a:srgbClr val="003056"/>
                 </a:solidFill>
@@ -26089,7 +26374,7 @@
               <a:t> (+)</a:t>
             </a:r>
             <a:r>
-              <a:rPr lang="en-US" sz="1800" b="1" i="1" strike="noStrike" spc="-1">
+              <a:rPr lang="en-US" sz="1800" b="1" i="1" strike="noStrike" spc="-1" dirty="0">
                 <a:solidFill>
                   <a:srgbClr val="003056"/>
                 </a:solidFill>
@@ -26098,7 +26383,7 @@
               <a:t> … </a:t>
             </a:r>
             <a:r>
-              <a:rPr lang="en-US" sz="1800" b="0" i="1" strike="noStrike" spc="-1">
+              <a:rPr lang="en-US" sz="1800" b="0" i="1" strike="noStrike" spc="-1" dirty="0">
                 <a:solidFill>
                   <a:srgbClr val="003056"/>
                 </a:solidFill>
@@ -26107,7 +26392,7 @@
               <a:t>(+)  </a:t>
             </a:r>
             <a:r>
-              <a:rPr lang="en-US" sz="1800" b="1" i="1" strike="noStrike" spc="-1">
+              <a:rPr lang="en-US" sz="1800" b="1" i="1" strike="noStrike" spc="-1" dirty="0" err="1">
                 <a:solidFill>
                   <a:srgbClr val="003056"/>
                 </a:solidFill>
@@ -26116,7 +26401,7 @@
               <a:t>head</a:t>
             </a:r>
             <a:r>
-              <a:rPr lang="en-US" sz="1800" b="0" i="1" strike="noStrike" spc="-1" baseline="-25000">
+              <a:rPr lang="en-US" sz="1800" b="0" i="1" strike="noStrike" spc="-1" baseline="-25000" dirty="0" err="1">
                 <a:solidFill>
                   <a:srgbClr val="003056"/>
                 </a:solidFill>
@@ -26125,7 +26410,7 @@
               <a:t>H</a:t>
             </a:r>
             <a:r>
-              <a:rPr lang="en-US" sz="1800" b="0" i="1" strike="noStrike" spc="-1">
+              <a:rPr lang="en-US" sz="1800" b="0" i="1" strike="noStrike" spc="-1" dirty="0">
                 <a:solidFill>
                   <a:srgbClr val="003056"/>
                 </a:solidFill>
@@ -26134,7 +26419,7 @@
               <a:t>) </a:t>
             </a:r>
             <a:r>
-              <a:rPr lang="en-US" sz="1800" b="1" i="1" strike="noStrike" spc="-1">
+              <a:rPr lang="en-US" sz="1800" b="1" i="1" strike="noStrike" spc="-1" dirty="0">
                 <a:solidFill>
                   <a:srgbClr val="003056"/>
                 </a:solidFill>
@@ -26143,7 +26428,7 @@
               <a:t>W</a:t>
             </a:r>
             <a:r>
-              <a:rPr lang="en-US" sz="1800" b="0" i="1" strike="noStrike" spc="-1" baseline="30000">
+              <a:rPr lang="en-US" sz="1800" b="0" i="1" strike="noStrike" spc="-1" baseline="30000" dirty="0">
                 <a:solidFill>
                   <a:srgbClr val="003056"/>
                 </a:solidFill>
@@ -26152,7 +26437,7 @@
               <a:t>O</a:t>
             </a:r>
             <a:r>
-              <a:rPr lang="en-US" sz="1800" b="0" i="1" strike="noStrike" spc="-1">
+              <a:rPr lang="en-US" sz="1800" b="0" i="1" strike="noStrike" spc="-1" dirty="0">
                 <a:solidFill>
                   <a:srgbClr val="003056"/>
                 </a:solidFill>
@@ -26161,7 +26446,7 @@
               <a:t>, where (+) </a:t>
             </a:r>
             <a:r>
-              <a:rPr lang="en-US" sz="1800" b="0" strike="noStrike" spc="-1">
+              <a:rPr lang="en-US" sz="1800" b="0" strike="noStrike" spc="-1" dirty="0">
                 <a:solidFill>
                   <a:srgbClr val="003056"/>
                 </a:solidFill>
@@ -26169,7 +26454,7 @@
               </a:rPr>
               <a:t>denotes concatenation</a:t>
             </a:r>
-            <a:endParaRPr lang="de-DE" sz="1800" b="0" strike="noStrike" spc="-1">
+            <a:endParaRPr lang="de-DE" sz="1800" b="0" strike="noStrike" spc="-1" dirty="0">
               <a:solidFill>
                 <a:srgbClr val="003056"/>
               </a:solidFill>
@@ -26868,7 +27153,7 @@
                 </a:solidFill>
                 <a:latin typeface="Calibri"/>
               </a:rPr>
-              <a:t>Dr. Daniel Ruffinelli - FSS 2025</a:t>
+              <a:t>Dr. Daniel Ruffinelli - FSS 2026</a:t>
             </a:r>
             <a:endParaRPr lang="en-US" sz="1200" b="0" strike="noStrike" spc="-1">
               <a:latin typeface="Times New Roman"/>
@@ -28350,7 +28635,7 @@
                 </a:solidFill>
                 <a:latin typeface="Calibri"/>
               </a:rPr>
-              <a:t>Dr. Daniel Ruffinelli - FSS 2025</a:t>
+              <a:t>Dr. Daniel Ruffinelli - FSS 2026</a:t>
             </a:r>
             <a:endParaRPr lang="en-US" sz="1200" b="0" strike="noStrike" spc="-1">
               <a:latin typeface="Times New Roman"/>
@@ -29568,7 +29853,7 @@
                 </a:solidFill>
                 <a:latin typeface="Calibri"/>
               </a:rPr>
-              <a:t>Dr. Daniel Ruffinelli - FSS 2025</a:t>
+              <a:t>Dr. Daniel Ruffinelli - FSS 2026</a:t>
             </a:r>
             <a:endParaRPr lang="en-US" sz="1200" b="0" strike="noStrike" spc="-1">
               <a:latin typeface="Times New Roman"/>
@@ -30220,7 +30505,7 @@
                 </a:solidFill>
                 <a:latin typeface="Calibri"/>
               </a:rPr>
-              <a:t>Dr. Daniel Ruffinelli - FSS 2025</a:t>
+              <a:t>Dr. Daniel Ruffinelli - FSS 2026</a:t>
             </a:r>
             <a:endParaRPr lang="en-US" sz="1200" b="0" strike="noStrike" spc="-1">
               <a:latin typeface="Times New Roman"/>
@@ -31353,15 +31638,33 @@
                                   </p:childTnLst>
                                 </p:cTn>
                               </p:par>
+                            </p:childTnLst>
+                          </p:cTn>
+                        </p:par>
+                      </p:childTnLst>
+                    </p:cTn>
+                  </p:par>
+                  <p:par>
+                    <p:cTn id="33" fill="hold">
+                      <p:stCondLst>
+                        <p:cond delay="indefinite"/>
+                      </p:stCondLst>
+                      <p:childTnLst>
+                        <p:par>
+                          <p:cTn id="34" fill="hold">
+                            <p:stCondLst>
+                              <p:cond delay="0"/>
+                            </p:stCondLst>
+                            <p:childTnLst>
                               <p:par>
-                                <p:cTn id="33" presetID="22" presetClass="entr" presetSubtype="4" fill="hold" nodeType="withEffect">
+                                <p:cTn id="35" presetID="22" presetClass="entr" presetSubtype="4" fill="hold" nodeType="clickEffect">
                                   <p:stCondLst>
                                     <p:cond delay="0"/>
                                   </p:stCondLst>
                                   <p:childTnLst>
                                     <p:set>
                                       <p:cBhvr>
-                                        <p:cTn id="34" dur="1" fill="hold">
+                                        <p:cTn id="36" dur="1" fill="hold">
                                           <p:stCondLst>
                                             <p:cond delay="0"/>
                                           </p:stCondLst>
@@ -31383,7 +31686,7 @@
                                     </p:set>
                                     <p:animEffect transition="in" filter="wipe(down)">
                                       <p:cBhvr additive="repl">
-                                        <p:cTn id="35" dur="500"/>
+                                        <p:cTn id="37" dur="500"/>
                                         <p:tgtEl>
                                           <p:spTgt spid="175">
                                             <p:txEl>
@@ -31397,14 +31700,14 @@
                                 </p:cTn>
                               </p:par>
                               <p:par>
-                                <p:cTn id="36" presetID="22" presetClass="entr" presetSubtype="4" fill="hold" nodeType="withEffect">
+                                <p:cTn id="38" presetID="22" presetClass="entr" presetSubtype="4" fill="hold" nodeType="withEffect">
                                   <p:stCondLst>
                                     <p:cond delay="0"/>
                                   </p:stCondLst>
                                   <p:childTnLst>
                                     <p:set>
                                       <p:cBhvr>
-                                        <p:cTn id="37" dur="1" fill="hold">
+                                        <p:cTn id="39" dur="1" fill="hold">
                                           <p:stCondLst>
                                             <p:cond delay="0"/>
                                           </p:stCondLst>
@@ -31426,7 +31729,7 @@
                                     </p:set>
                                     <p:animEffect transition="in" filter="wipe(down)">
                                       <p:cBhvr additive="repl">
-                                        <p:cTn id="38" dur="500"/>
+                                        <p:cTn id="40" dur="500"/>
                                         <p:tgtEl>
                                           <p:spTgt spid="175">
                                             <p:txEl>
@@ -31440,14 +31743,14 @@
                                 </p:cTn>
                               </p:par>
                               <p:par>
-                                <p:cTn id="39" presetID="22" presetClass="entr" presetSubtype="4" fill="hold" nodeType="withEffect">
+                                <p:cTn id="41" presetID="22" presetClass="entr" presetSubtype="4" fill="hold" nodeType="withEffect">
                                   <p:stCondLst>
                                     <p:cond delay="0"/>
                                   </p:stCondLst>
                                   <p:childTnLst>
                                     <p:set>
                                       <p:cBhvr>
-                                        <p:cTn id="40" dur="1" fill="hold">
+                                        <p:cTn id="42" dur="1" fill="hold">
                                           <p:stCondLst>
                                             <p:cond delay="0"/>
                                           </p:stCondLst>
@@ -31469,7 +31772,7 @@
                                     </p:set>
                                     <p:animEffect transition="in" filter="wipe(down)">
                                       <p:cBhvr additive="repl">
-                                        <p:cTn id="41" dur="500"/>
+                                        <p:cTn id="43" dur="500"/>
                                         <p:tgtEl>
                                           <p:spTgt spid="175">
                                             <p:txEl>
@@ -31483,14 +31786,14 @@
                                 </p:cTn>
                               </p:par>
                               <p:par>
-                                <p:cTn id="42" presetID="22" presetClass="entr" presetSubtype="4" fill="hold" nodeType="withEffect">
+                                <p:cTn id="44" presetID="22" presetClass="entr" presetSubtype="4" fill="hold" nodeType="withEffect">
                                   <p:stCondLst>
                                     <p:cond delay="0"/>
                                   </p:stCondLst>
                                   <p:childTnLst>
                                     <p:set>
                                       <p:cBhvr>
-                                        <p:cTn id="43" dur="1" fill="hold">
+                                        <p:cTn id="45" dur="1" fill="hold">
                                           <p:stCondLst>
                                             <p:cond delay="0"/>
                                           </p:stCondLst>
@@ -31512,7 +31815,7 @@
                                     </p:set>
                                     <p:animEffect transition="in" filter="wipe(down)">
                                       <p:cBhvr additive="repl">
-                                        <p:cTn id="44" dur="500"/>
+                                        <p:cTn id="46" dur="500"/>
                                         <p:tgtEl>
                                           <p:spTgt spid="175">
                                             <p:txEl>
@@ -31526,14 +31829,14 @@
                                 </p:cTn>
                               </p:par>
                               <p:par>
-                                <p:cTn id="45" presetID="22" presetClass="entr" presetSubtype="4" fill="hold" nodeType="withEffect">
+                                <p:cTn id="47" presetID="22" presetClass="entr" presetSubtype="4" fill="hold" nodeType="withEffect">
                                   <p:stCondLst>
                                     <p:cond delay="0"/>
                                   </p:stCondLst>
                                   <p:childTnLst>
                                     <p:set>
                                       <p:cBhvr>
-                                        <p:cTn id="46" dur="1" fill="hold">
+                                        <p:cTn id="48" dur="1" fill="hold">
                                           <p:stCondLst>
                                             <p:cond delay="0"/>
                                           </p:stCondLst>
@@ -31555,7 +31858,7 @@
                                     </p:set>
                                     <p:animEffect transition="in" filter="wipe(down)">
                                       <p:cBhvr additive="repl">
-                                        <p:cTn id="47" dur="500"/>
+                                        <p:cTn id="49" dur="500"/>
                                         <p:tgtEl>
                                           <p:spTgt spid="175">
                                             <p:txEl>
@@ -31569,14 +31872,14 @@
                                 </p:cTn>
                               </p:par>
                               <p:par>
-                                <p:cTn id="48" presetID="22" presetClass="entr" presetSubtype="4" fill="hold" nodeType="withEffect">
+                                <p:cTn id="50" presetID="22" presetClass="entr" presetSubtype="4" fill="hold" nodeType="withEffect">
                                   <p:stCondLst>
                                     <p:cond delay="0"/>
                                   </p:stCondLst>
                                   <p:childTnLst>
                                     <p:set>
                                       <p:cBhvr>
-                                        <p:cTn id="49" dur="1" fill="hold">
+                                        <p:cTn id="51" dur="1" fill="hold">
                                           <p:stCondLst>
                                             <p:cond delay="0"/>
                                           </p:stCondLst>
@@ -31598,7 +31901,7 @@
                                     </p:set>
                                     <p:animEffect transition="in" filter="wipe(down)">
                                       <p:cBhvr additive="repl">
-                                        <p:cTn id="50" dur="500"/>
+                                        <p:cTn id="52" dur="500"/>
                                         <p:tgtEl>
                                           <p:spTgt spid="175">
                                             <p:txEl>
@@ -31767,7 +32070,7 @@
                 </a:solidFill>
                 <a:latin typeface="Calibri"/>
               </a:rPr>
-              <a:t>Dr. Daniel Ruffinelli - FSS 2025</a:t>
+              <a:t>Dr. Daniel Ruffinelli - FSS 2026</a:t>
             </a:r>
             <a:endParaRPr lang="en-US" sz="1200" b="0" strike="noStrike" spc="-1">
               <a:latin typeface="Times New Roman"/>
@@ -32179,9 +32482,27 @@
                 </a:solidFill>
                 <a:latin typeface="Calibri"/>
               </a:rPr>
-              <a:t>Addition operator has no impact on gradient, passes it backward unchanged!</a:t>
-            </a:r>
-            <a:endParaRPr lang="de-DE" sz="1800" b="0" strike="noStrike" spc="-1" dirty="0">
+              <a:t>Addition operator has no impact on gradient, passes it backward </a:t>
+            </a:r>
+            <a:r>
+              <a:rPr lang="en-US" sz="1800" b="0" strike="noStrike" spc="-1">
+                <a:solidFill>
+                  <a:srgbClr val="003056"/>
+                </a:solidFill>
+                <a:latin typeface="Calibri"/>
+              </a:rPr>
+              <a:t>unchanged!</a:t>
+            </a:r>
+            <a:r>
+              <a:rPr lang="en-US" sz="1800" spc="-1">
+                <a:solidFill>
+                  <a:srgbClr val="003056"/>
+                </a:solidFill>
+                <a:latin typeface="Calibri"/>
+              </a:rPr>
+              <a:t> (Details in a future tutorial.)</a:t>
+            </a:r>
+            <a:endParaRPr lang="de-DE" sz="1800" b="0" strike="noStrike" spc="-1">
               <a:solidFill>
                 <a:srgbClr val="003056"/>
               </a:solidFill>
@@ -33182,7 +33503,7 @@
                 </a:solidFill>
                 <a:latin typeface="Calibri"/>
               </a:rPr>
-              <a:t>Dr. Daniel Ruffinelli - FSS 2025</a:t>
+              <a:t>Dr. Daniel Ruffinelli - FSS 2026</a:t>
             </a:r>
             <a:endParaRPr lang="en-US" sz="1200" b="0" strike="noStrike" spc="-1">
               <a:latin typeface="Times New Roman"/>
@@ -33615,7 +33936,7 @@
                 </a:solidFill>
                 <a:latin typeface="Calibri"/>
               </a:rPr>
-              <a:t>Dr. Daniel Ruffinelli - FSS 2025</a:t>
+              <a:t>Dr. Daniel Ruffinelli - FSS 2026</a:t>
             </a:r>
             <a:endParaRPr lang="en-US" sz="1200" b="0" strike="noStrike" spc="-1">
               <a:latin typeface="Times New Roman"/>
@@ -34868,7 +35189,7 @@
                 </a:solidFill>
                 <a:latin typeface="Calibri"/>
               </a:rPr>
-              <a:t>Dr. Daniel Ruffinelli - FSS 2025</a:t>
+              <a:t>Dr. Daniel Ruffinelli - FSS 2026</a:t>
             </a:r>
             <a:endParaRPr lang="en-US" sz="1200" b="0" strike="noStrike" spc="-1">
               <a:latin typeface="Times New Roman"/>
@@ -35509,7 +35830,7 @@
       <p:par>
         <p:cTn id="1" dur="indefinite" restart="never" nodeType="tmRoot">
           <p:childTnLst>
-            <p:seq>
+            <p:seq concurrent="1" nextAc="seek">
               <p:cTn id="2" dur="indefinite" nodeType="mainSeq">
                 <p:childTnLst>
                   <p:par>
@@ -35525,7 +35846,7 @@
                             </p:stCondLst>
                             <p:childTnLst>
                               <p:par>
-                                <p:cTn id="5" presetID="22" presetClass="entr" presetSubtype="4" fill="hold" nodeType="clickEffect">
+                                <p:cTn id="5" presetID="1" presetClass="entr" presetSubtype="0" fill="hold" grpId="0" nodeType="clickEffect">
                                   <p:stCondLst>
                                     <p:cond delay="0"/>
                                   </p:stCondLst>
@@ -35552,18 +35873,6 @@
                                         <p:strVal val="visible"/>
                                       </p:to>
                                     </p:set>
-                                    <p:animEffect transition="in" filter="wipe(down)">
-                                      <p:cBhvr additive="repl">
-                                        <p:cTn id="7" dur="500"/>
-                                        <p:tgtEl>
-                                          <p:spTgt spid="178">
-                                            <p:txEl>
-                                              <p:pRg st="0" end="0"/>
-                                            </p:txEl>
-                                          </p:spTgt>
-                                        </p:tgtEl>
-                                      </p:cBhvr>
-                                    </p:animEffect>
                                   </p:childTnLst>
                                 </p:cTn>
                               </p:par>
@@ -35574,26 +35883,26 @@
                     </p:cTn>
                   </p:par>
                   <p:par>
-                    <p:cTn id="8" fill="hold">
+                    <p:cTn id="7" fill="hold">
                       <p:stCondLst>
                         <p:cond delay="indefinite"/>
                       </p:stCondLst>
                       <p:childTnLst>
                         <p:par>
-                          <p:cTn id="9" fill="hold">
+                          <p:cTn id="8" fill="hold">
                             <p:stCondLst>
                               <p:cond delay="0"/>
                             </p:stCondLst>
                             <p:childTnLst>
                               <p:par>
-                                <p:cTn id="10" presetID="22" presetClass="entr" presetSubtype="4" fill="hold" nodeType="clickEffect">
+                                <p:cTn id="9" presetID="1" presetClass="entr" presetSubtype="0" fill="hold" grpId="0" nodeType="clickEffect">
                                   <p:stCondLst>
                                     <p:cond delay="0"/>
                                   </p:stCondLst>
                                   <p:childTnLst>
                                     <p:set>
                                       <p:cBhvr>
-                                        <p:cTn id="11" dur="1" fill="hold">
+                                        <p:cTn id="10" dur="1" fill="hold">
                                           <p:stCondLst>
                                             <p:cond delay="0"/>
                                           </p:stCondLst>
@@ -35613,41 +35922,73 @@
                                         <p:strVal val="visible"/>
                                       </p:to>
                                     </p:set>
-                                    <p:animEffect transition="in" filter="wipe(down)">
-                                      <p:cBhvr additive="repl">
-                                        <p:cTn id="12" dur="500"/>
-                                        <p:tgtEl>
-                                          <p:spTgt spid="178">
-                                            <p:txEl>
-                                              <p:pRg st="1" end="1"/>
-                                            </p:txEl>
-                                          </p:spTgt>
-                                        </p:tgtEl>
-                                      </p:cBhvr>
-                                    </p:animEffect>
                                   </p:childTnLst>
                                 </p:cTn>
                               </p:par>
-                            </p:childTnLst>
-                          </p:cTn>
-                        </p:par>
-                      </p:childTnLst>
-                    </p:cTn>
-                  </p:par>
-                  <p:par>
-                    <p:cTn id="13" fill="hold">
-                      <p:stCondLst>
-                        <p:cond delay="indefinite"/>
-                      </p:stCondLst>
-                      <p:childTnLst>
-                        <p:par>
-                          <p:cTn id="14" fill="hold">
-                            <p:stCondLst>
-                              <p:cond delay="0"/>
-                            </p:stCondLst>
-                            <p:childTnLst>
                               <p:par>
-                                <p:cTn id="15" presetID="22" presetClass="entr" presetSubtype="4" fill="hold" nodeType="clickEffect">
+                                <p:cTn id="11" presetID="1" presetClass="entr" presetSubtype="0" fill="hold" grpId="0" nodeType="withEffect">
+                                  <p:stCondLst>
+                                    <p:cond delay="0"/>
+                                  </p:stCondLst>
+                                  <p:childTnLst>
+                                    <p:set>
+                                      <p:cBhvr>
+                                        <p:cTn id="12" dur="1" fill="hold">
+                                          <p:stCondLst>
+                                            <p:cond delay="0"/>
+                                          </p:stCondLst>
+                                        </p:cTn>
+                                        <p:tgtEl>
+                                          <p:spTgt spid="178">
+                                            <p:txEl>
+                                              <p:pRg st="2" end="2"/>
+                                            </p:txEl>
+                                          </p:spTgt>
+                                        </p:tgtEl>
+                                        <p:attrNameLst>
+                                          <p:attrName>style.visibility</p:attrName>
+                                        </p:attrNameLst>
+                                      </p:cBhvr>
+                                      <p:to>
+                                        <p:strVal val="visible"/>
+                                      </p:to>
+                                    </p:set>
+                                  </p:childTnLst>
+                                </p:cTn>
+                              </p:par>
+                              <p:par>
+                                <p:cTn id="13" presetID="1" presetClass="entr" presetSubtype="0" fill="hold" grpId="0" nodeType="withEffect">
+                                  <p:stCondLst>
+                                    <p:cond delay="0"/>
+                                  </p:stCondLst>
+                                  <p:childTnLst>
+                                    <p:set>
+                                      <p:cBhvr>
+                                        <p:cTn id="14" dur="1" fill="hold">
+                                          <p:stCondLst>
+                                            <p:cond delay="0"/>
+                                          </p:stCondLst>
+                                        </p:cTn>
+                                        <p:tgtEl>
+                                          <p:spTgt spid="178">
+                                            <p:txEl>
+                                              <p:pRg st="3" end="3"/>
+                                            </p:txEl>
+                                          </p:spTgt>
+                                        </p:tgtEl>
+                                        <p:attrNameLst>
+                                          <p:attrName>style.visibility</p:attrName>
+                                        </p:attrNameLst>
+                                      </p:cBhvr>
+                                      <p:to>
+                                        <p:strVal val="visible"/>
+                                      </p:to>
+                                    </p:set>
+                                  </p:childTnLst>
+                                </p:cTn>
+                              </p:par>
+                              <p:par>
+                                <p:cTn id="15" presetID="1" presetClass="entr" presetSubtype="0" fill="hold" grpId="0" nodeType="withEffect">
                                   <p:stCondLst>
                                     <p:cond delay="0"/>
                                   </p:stCondLst>
@@ -35662,7 +36003,7 @@
                                         <p:tgtEl>
                                           <p:spTgt spid="178">
                                             <p:txEl>
-                                              <p:pRg st="2" end="2"/>
+                                              <p:pRg st="4" end="4"/>
                                             </p:txEl>
                                           </p:spTgt>
                                         </p:tgtEl>
@@ -35674,18 +36015,6 @@
                                         <p:strVal val="visible"/>
                                       </p:to>
                                     </p:set>
-                                    <p:animEffect transition="in" filter="wipe(down)">
-                                      <p:cBhvr additive="repl">
-                                        <p:cTn id="17" dur="500"/>
-                                        <p:tgtEl>
-                                          <p:spTgt spid="178">
-                                            <p:txEl>
-                                              <p:pRg st="2" end="2"/>
-                                            </p:txEl>
-                                          </p:spTgt>
-                                        </p:tgtEl>
-                                      </p:cBhvr>
-                                    </p:animEffect>
                                   </p:childTnLst>
                                 </p:cTn>
                               </p:par>
@@ -35696,26 +36025,26 @@
                     </p:cTn>
                   </p:par>
                   <p:par>
-                    <p:cTn id="18" fill="hold">
+                    <p:cTn id="17" fill="hold">
                       <p:stCondLst>
                         <p:cond delay="indefinite"/>
                       </p:stCondLst>
                       <p:childTnLst>
                         <p:par>
-                          <p:cTn id="19" fill="hold">
+                          <p:cTn id="18" fill="hold">
                             <p:stCondLst>
                               <p:cond delay="0"/>
                             </p:stCondLst>
                             <p:childTnLst>
                               <p:par>
-                                <p:cTn id="20" presetID="22" presetClass="entr" presetSubtype="4" fill="hold" nodeType="clickEffect">
+                                <p:cTn id="19" presetID="1" presetClass="entr" presetSubtype="0" fill="hold" grpId="0" nodeType="clickEffect">
                                   <p:stCondLst>
                                     <p:cond delay="0"/>
                                   </p:stCondLst>
                                   <p:childTnLst>
                                     <p:set>
                                       <p:cBhvr>
-                                        <p:cTn id="21" dur="1" fill="hold">
+                                        <p:cTn id="20" dur="1" fill="hold">
                                           <p:stCondLst>
                                             <p:cond delay="0"/>
                                           </p:stCondLst>
@@ -35723,7 +36052,7 @@
                                         <p:tgtEl>
                                           <p:spTgt spid="178">
                                             <p:txEl>
-                                              <p:pRg st="3" end="3"/>
+                                              <p:pRg st="5" end="5"/>
                                             </p:txEl>
                                           </p:spTgt>
                                         </p:tgtEl>
@@ -35735,18 +36064,37 @@
                                         <p:strVal val="visible"/>
                                       </p:to>
                                     </p:set>
-                                    <p:animEffect transition="in" filter="wipe(down)">
-                                      <p:cBhvr additive="repl">
-                                        <p:cTn id="22" dur="500"/>
+                                  </p:childTnLst>
+                                </p:cTn>
+                              </p:par>
+                              <p:par>
+                                <p:cTn id="21" presetID="1" presetClass="entr" presetSubtype="0" fill="hold" grpId="0" nodeType="withEffect">
+                                  <p:stCondLst>
+                                    <p:cond delay="0"/>
+                                  </p:stCondLst>
+                                  <p:childTnLst>
+                                    <p:set>
+                                      <p:cBhvr>
+                                        <p:cTn id="22" dur="1" fill="hold">
+                                          <p:stCondLst>
+                                            <p:cond delay="0"/>
+                                          </p:stCondLst>
+                                        </p:cTn>
                                         <p:tgtEl>
                                           <p:spTgt spid="178">
                                             <p:txEl>
-                                              <p:pRg st="3" end="3"/>
-                                            </p:txEl>
-                                          </p:spTgt>
-                                        </p:tgtEl>
-                                      </p:cBhvr>
-                                    </p:animEffect>
+                                              <p:pRg st="6" end="6"/>
+                                            </p:txEl>
+                                          </p:spTgt>
+                                        </p:tgtEl>
+                                        <p:attrNameLst>
+                                          <p:attrName>style.visibility</p:attrName>
+                                        </p:attrNameLst>
+                                      </p:cBhvr>
+                                      <p:to>
+                                        <p:strVal val="visible"/>
+                                      </p:to>
+                                    </p:set>
                                   </p:childTnLst>
                                 </p:cTn>
                               </p:par>
@@ -35769,7 +36117,7 @@
                             </p:stCondLst>
                             <p:childTnLst>
                               <p:par>
-                                <p:cTn id="25" presetID="22" presetClass="entr" presetSubtype="4" fill="hold" nodeType="clickEffect">
+                                <p:cTn id="25" presetID="1" presetClass="entr" presetSubtype="0" fill="hold" grpId="0" nodeType="clickEffect">
                                   <p:stCondLst>
                                     <p:cond delay="0"/>
                                   </p:stCondLst>
@@ -35784,7 +36132,7 @@
                                         <p:tgtEl>
                                           <p:spTgt spid="178">
                                             <p:txEl>
-                                              <p:pRg st="4" end="4"/>
+                                              <p:pRg st="7" end="7"/>
                                             </p:txEl>
                                           </p:spTgt>
                                         </p:tgtEl>
@@ -35796,48 +36144,18 @@
                                         <p:strVal val="visible"/>
                                       </p:to>
                                     </p:set>
-                                    <p:animEffect transition="in" filter="wipe(down)">
-                                      <p:cBhvr additive="repl">
-                                        <p:cTn id="27" dur="500"/>
-                                        <p:tgtEl>
-                                          <p:spTgt spid="178">
-                                            <p:txEl>
-                                              <p:pRg st="4" end="4"/>
-                                            </p:txEl>
-                                          </p:spTgt>
-                                        </p:tgtEl>
-                                      </p:cBhvr>
-                                    </p:animEffect>
                                   </p:childTnLst>
                                 </p:cTn>
                               </p:par>
-                            </p:childTnLst>
-                          </p:cTn>
-                        </p:par>
-                      </p:childTnLst>
-                    </p:cTn>
-                  </p:par>
-                  <p:par>
-                    <p:cTn id="28" fill="hold">
-                      <p:stCondLst>
-                        <p:cond delay="indefinite"/>
-                      </p:stCondLst>
-                      <p:childTnLst>
-                        <p:par>
-                          <p:cTn id="29" fill="hold">
-                            <p:stCondLst>
-                              <p:cond delay="0"/>
-                            </p:stCondLst>
-                            <p:childTnLst>
                               <p:par>
-                                <p:cTn id="30" presetID="22" presetClass="entr" presetSubtype="4" fill="hold" nodeType="clickEffect">
+                                <p:cTn id="27" presetID="1" presetClass="entr" presetSubtype="0" fill="hold" grpId="0" nodeType="withEffect">
                                   <p:stCondLst>
                                     <p:cond delay="0"/>
                                   </p:stCondLst>
                                   <p:childTnLst>
                                     <p:set>
                                       <p:cBhvr>
-                                        <p:cTn id="31" dur="1" fill="hold">
+                                        <p:cTn id="28" dur="1" fill="hold">
                                           <p:stCondLst>
                                             <p:cond delay="0"/>
                                           </p:stCondLst>
@@ -35845,7 +36163,7 @@
                                         <p:tgtEl>
                                           <p:spTgt spid="178">
                                             <p:txEl>
-                                              <p:pRg st="5" end="5"/>
+                                              <p:pRg st="8" end="8"/>
                                             </p:txEl>
                                           </p:spTgt>
                                         </p:tgtEl>
@@ -35857,18 +36175,68 @@
                                         <p:strVal val="visible"/>
                                       </p:to>
                                     </p:set>
-                                    <p:animEffect transition="in" filter="wipe(down)">
-                                      <p:cBhvr additive="repl">
-                                        <p:cTn id="32" dur="500"/>
+                                  </p:childTnLst>
+                                </p:cTn>
+                              </p:par>
+                              <p:par>
+                                <p:cTn id="29" presetID="1" presetClass="entr" presetSubtype="0" fill="hold" grpId="0" nodeType="withEffect">
+                                  <p:stCondLst>
+                                    <p:cond delay="0"/>
+                                  </p:stCondLst>
+                                  <p:childTnLst>
+                                    <p:set>
+                                      <p:cBhvr>
+                                        <p:cTn id="30" dur="1" fill="hold">
+                                          <p:stCondLst>
+                                            <p:cond delay="0"/>
+                                          </p:stCondLst>
+                                        </p:cTn>
                                         <p:tgtEl>
                                           <p:spTgt spid="178">
                                             <p:txEl>
-                                              <p:pRg st="5" end="5"/>
-                                            </p:txEl>
-                                          </p:spTgt>
-                                        </p:tgtEl>
-                                      </p:cBhvr>
-                                    </p:animEffect>
+                                              <p:pRg st="9" end="9"/>
+                                            </p:txEl>
+                                          </p:spTgt>
+                                        </p:tgtEl>
+                                        <p:attrNameLst>
+                                          <p:attrName>style.visibility</p:attrName>
+                                        </p:attrNameLst>
+                                      </p:cBhvr>
+                                      <p:to>
+                                        <p:strVal val="visible"/>
+                                      </p:to>
+                                    </p:set>
+                                  </p:childTnLst>
+                                </p:cTn>
+                              </p:par>
+                              <p:par>
+                                <p:cTn id="31" presetID="1" presetClass="entr" presetSubtype="0" fill="hold" grpId="0" nodeType="withEffect">
+                                  <p:stCondLst>
+                                    <p:cond delay="0"/>
+                                  </p:stCondLst>
+                                  <p:childTnLst>
+                                    <p:set>
+                                      <p:cBhvr>
+                                        <p:cTn id="32" dur="1" fill="hold">
+                                          <p:stCondLst>
+                                            <p:cond delay="0"/>
+                                          </p:stCondLst>
+                                        </p:cTn>
+                                        <p:tgtEl>
+                                          <p:spTgt spid="178">
+                                            <p:txEl>
+                                              <p:pRg st="10" end="10"/>
+                                            </p:txEl>
+                                          </p:spTgt>
+                                        </p:tgtEl>
+                                        <p:attrNameLst>
+                                          <p:attrName>style.visibility</p:attrName>
+                                        </p:attrNameLst>
+                                      </p:cBhvr>
+                                      <p:to>
+                                        <p:strVal val="visible"/>
+                                      </p:to>
+                                    </p:set>
                                   </p:childTnLst>
                                 </p:cTn>
                               </p:par>
@@ -35891,7 +36259,7 @@
                             </p:stCondLst>
                             <p:childTnLst>
                               <p:par>
-                                <p:cTn id="35" presetID="22" presetClass="entr" presetSubtype="4" fill="hold" nodeType="clickEffect">
+                                <p:cTn id="35" presetID="1" presetClass="entr" presetSubtype="0" fill="hold" grpId="0" nodeType="clickEffect">
                                   <p:stCondLst>
                                     <p:cond delay="0"/>
                                   </p:stCondLst>
@@ -35906,7 +36274,7 @@
                                         <p:tgtEl>
                                           <p:spTgt spid="178">
                                             <p:txEl>
-                                              <p:pRg st="6" end="6"/>
+                                              <p:pRg st="11" end="11"/>
                                             </p:txEl>
                                           </p:spTgt>
                                         </p:tgtEl>
@@ -35918,323 +36286,6 @@
                                         <p:strVal val="visible"/>
                                       </p:to>
                                     </p:set>
-                                    <p:animEffect transition="in" filter="wipe(down)">
-                                      <p:cBhvr additive="repl">
-                                        <p:cTn id="37" dur="500"/>
-                                        <p:tgtEl>
-                                          <p:spTgt spid="178">
-                                            <p:txEl>
-                                              <p:pRg st="6" end="6"/>
-                                            </p:txEl>
-                                          </p:spTgt>
-                                        </p:tgtEl>
-                                      </p:cBhvr>
-                                    </p:animEffect>
-                                  </p:childTnLst>
-                                </p:cTn>
-                              </p:par>
-                            </p:childTnLst>
-                          </p:cTn>
-                        </p:par>
-                      </p:childTnLst>
-                    </p:cTn>
-                  </p:par>
-                  <p:par>
-                    <p:cTn id="38" fill="hold">
-                      <p:stCondLst>
-                        <p:cond delay="indefinite"/>
-                      </p:stCondLst>
-                      <p:childTnLst>
-                        <p:par>
-                          <p:cTn id="39" fill="hold">
-                            <p:stCondLst>
-                              <p:cond delay="0"/>
-                            </p:stCondLst>
-                            <p:childTnLst>
-                              <p:par>
-                                <p:cTn id="40" presetID="22" presetClass="entr" presetSubtype="4" fill="hold" nodeType="clickEffect">
-                                  <p:stCondLst>
-                                    <p:cond delay="0"/>
-                                  </p:stCondLst>
-                                  <p:childTnLst>
-                                    <p:set>
-                                      <p:cBhvr>
-                                        <p:cTn id="41" dur="1" fill="hold">
-                                          <p:stCondLst>
-                                            <p:cond delay="0"/>
-                                          </p:stCondLst>
-                                        </p:cTn>
-                                        <p:tgtEl>
-                                          <p:spTgt spid="178">
-                                            <p:txEl>
-                                              <p:pRg st="7" end="7"/>
-                                            </p:txEl>
-                                          </p:spTgt>
-                                        </p:tgtEl>
-                                        <p:attrNameLst>
-                                          <p:attrName>style.visibility</p:attrName>
-                                        </p:attrNameLst>
-                                      </p:cBhvr>
-                                      <p:to>
-                                        <p:strVal val="visible"/>
-                                      </p:to>
-                                    </p:set>
-                                    <p:animEffect transition="in" filter="wipe(down)">
-                                      <p:cBhvr additive="repl">
-                                        <p:cTn id="42" dur="500"/>
-                                        <p:tgtEl>
-                                          <p:spTgt spid="178">
-                                            <p:txEl>
-                                              <p:pRg st="7" end="7"/>
-                                            </p:txEl>
-                                          </p:spTgt>
-                                        </p:tgtEl>
-                                      </p:cBhvr>
-                                    </p:animEffect>
-                                  </p:childTnLst>
-                                </p:cTn>
-                              </p:par>
-                            </p:childTnLst>
-                          </p:cTn>
-                        </p:par>
-                      </p:childTnLst>
-                    </p:cTn>
-                  </p:par>
-                  <p:par>
-                    <p:cTn id="43" fill="hold">
-                      <p:stCondLst>
-                        <p:cond delay="indefinite"/>
-                      </p:stCondLst>
-                      <p:childTnLst>
-                        <p:par>
-                          <p:cTn id="44" fill="hold">
-                            <p:stCondLst>
-                              <p:cond delay="0"/>
-                            </p:stCondLst>
-                            <p:childTnLst>
-                              <p:par>
-                                <p:cTn id="45" presetID="22" presetClass="entr" presetSubtype="4" fill="hold" nodeType="clickEffect">
-                                  <p:stCondLst>
-                                    <p:cond delay="0"/>
-                                  </p:stCondLst>
-                                  <p:childTnLst>
-                                    <p:set>
-                                      <p:cBhvr>
-                                        <p:cTn id="46" dur="1" fill="hold">
-                                          <p:stCondLst>
-                                            <p:cond delay="0"/>
-                                          </p:stCondLst>
-                                        </p:cTn>
-                                        <p:tgtEl>
-                                          <p:spTgt spid="178">
-                                            <p:txEl>
-                                              <p:pRg st="8" end="8"/>
-                                            </p:txEl>
-                                          </p:spTgt>
-                                        </p:tgtEl>
-                                        <p:attrNameLst>
-                                          <p:attrName>style.visibility</p:attrName>
-                                        </p:attrNameLst>
-                                      </p:cBhvr>
-                                      <p:to>
-                                        <p:strVal val="visible"/>
-                                      </p:to>
-                                    </p:set>
-                                    <p:animEffect transition="in" filter="wipe(down)">
-                                      <p:cBhvr additive="repl">
-                                        <p:cTn id="47" dur="500"/>
-                                        <p:tgtEl>
-                                          <p:spTgt spid="178">
-                                            <p:txEl>
-                                              <p:pRg st="8" end="8"/>
-                                            </p:txEl>
-                                          </p:spTgt>
-                                        </p:tgtEl>
-                                      </p:cBhvr>
-                                    </p:animEffect>
-                                  </p:childTnLst>
-                                </p:cTn>
-                              </p:par>
-                            </p:childTnLst>
-                          </p:cTn>
-                        </p:par>
-                      </p:childTnLst>
-                    </p:cTn>
-                  </p:par>
-                  <p:par>
-                    <p:cTn id="48" fill="hold">
-                      <p:stCondLst>
-                        <p:cond delay="indefinite"/>
-                      </p:stCondLst>
-                      <p:childTnLst>
-                        <p:par>
-                          <p:cTn id="49" fill="hold">
-                            <p:stCondLst>
-                              <p:cond delay="0"/>
-                            </p:stCondLst>
-                            <p:childTnLst>
-                              <p:par>
-                                <p:cTn id="50" presetID="22" presetClass="entr" presetSubtype="4" fill="hold" nodeType="clickEffect">
-                                  <p:stCondLst>
-                                    <p:cond delay="0"/>
-                                  </p:stCondLst>
-                                  <p:childTnLst>
-                                    <p:set>
-                                      <p:cBhvr>
-                                        <p:cTn id="51" dur="1" fill="hold">
-                                          <p:stCondLst>
-                                            <p:cond delay="0"/>
-                                          </p:stCondLst>
-                                        </p:cTn>
-                                        <p:tgtEl>
-                                          <p:spTgt spid="178">
-                                            <p:txEl>
-                                              <p:pRg st="9" end="9"/>
-                                            </p:txEl>
-                                          </p:spTgt>
-                                        </p:tgtEl>
-                                        <p:attrNameLst>
-                                          <p:attrName>style.visibility</p:attrName>
-                                        </p:attrNameLst>
-                                      </p:cBhvr>
-                                      <p:to>
-                                        <p:strVal val="visible"/>
-                                      </p:to>
-                                    </p:set>
-                                    <p:animEffect transition="in" filter="wipe(down)">
-                                      <p:cBhvr additive="repl">
-                                        <p:cTn id="52" dur="500"/>
-                                        <p:tgtEl>
-                                          <p:spTgt spid="178">
-                                            <p:txEl>
-                                              <p:pRg st="9" end="9"/>
-                                            </p:txEl>
-                                          </p:spTgt>
-                                        </p:tgtEl>
-                                      </p:cBhvr>
-                                    </p:animEffect>
-                                  </p:childTnLst>
-                                </p:cTn>
-                              </p:par>
-                            </p:childTnLst>
-                          </p:cTn>
-                        </p:par>
-                      </p:childTnLst>
-                    </p:cTn>
-                  </p:par>
-                  <p:par>
-                    <p:cTn id="53" fill="hold">
-                      <p:stCondLst>
-                        <p:cond delay="indefinite"/>
-                      </p:stCondLst>
-                      <p:childTnLst>
-                        <p:par>
-                          <p:cTn id="54" fill="hold">
-                            <p:stCondLst>
-                              <p:cond delay="0"/>
-                            </p:stCondLst>
-                            <p:childTnLst>
-                              <p:par>
-                                <p:cTn id="55" presetID="22" presetClass="entr" presetSubtype="4" fill="hold" nodeType="clickEffect">
-                                  <p:stCondLst>
-                                    <p:cond delay="0"/>
-                                  </p:stCondLst>
-                                  <p:childTnLst>
-                                    <p:set>
-                                      <p:cBhvr>
-                                        <p:cTn id="56" dur="1" fill="hold">
-                                          <p:stCondLst>
-                                            <p:cond delay="0"/>
-                                          </p:stCondLst>
-                                        </p:cTn>
-                                        <p:tgtEl>
-                                          <p:spTgt spid="178">
-                                            <p:txEl>
-                                              <p:pRg st="10" end="10"/>
-                                            </p:txEl>
-                                          </p:spTgt>
-                                        </p:tgtEl>
-                                        <p:attrNameLst>
-                                          <p:attrName>style.visibility</p:attrName>
-                                        </p:attrNameLst>
-                                      </p:cBhvr>
-                                      <p:to>
-                                        <p:strVal val="visible"/>
-                                      </p:to>
-                                    </p:set>
-                                    <p:animEffect transition="in" filter="wipe(down)">
-                                      <p:cBhvr additive="repl">
-                                        <p:cTn id="57" dur="500"/>
-                                        <p:tgtEl>
-                                          <p:spTgt spid="178">
-                                            <p:txEl>
-                                              <p:pRg st="10" end="10"/>
-                                            </p:txEl>
-                                          </p:spTgt>
-                                        </p:tgtEl>
-                                      </p:cBhvr>
-                                    </p:animEffect>
-                                  </p:childTnLst>
-                                </p:cTn>
-                              </p:par>
-                            </p:childTnLst>
-                          </p:cTn>
-                        </p:par>
-                      </p:childTnLst>
-                    </p:cTn>
-                  </p:par>
-                  <p:par>
-                    <p:cTn id="58" fill="hold">
-                      <p:stCondLst>
-                        <p:cond delay="indefinite"/>
-                      </p:stCondLst>
-                      <p:childTnLst>
-                        <p:par>
-                          <p:cTn id="59" fill="hold">
-                            <p:stCondLst>
-                              <p:cond delay="0"/>
-                            </p:stCondLst>
-                            <p:childTnLst>
-                              <p:par>
-                                <p:cTn id="60" presetID="22" presetClass="entr" presetSubtype="4" fill="hold" nodeType="clickEffect">
-                                  <p:stCondLst>
-                                    <p:cond delay="0"/>
-                                  </p:stCondLst>
-                                  <p:childTnLst>
-                                    <p:set>
-                                      <p:cBhvr>
-                                        <p:cTn id="61" dur="1" fill="hold">
-                                          <p:stCondLst>
-                                            <p:cond delay="0"/>
-                                          </p:stCondLst>
-                                        </p:cTn>
-                                        <p:tgtEl>
-                                          <p:spTgt spid="178">
-                                            <p:txEl>
-                                              <p:pRg st="11" end="11"/>
-                                            </p:txEl>
-                                          </p:spTgt>
-                                        </p:tgtEl>
-                                        <p:attrNameLst>
-                                          <p:attrName>style.visibility</p:attrName>
-                                        </p:attrNameLst>
-                                      </p:cBhvr>
-                                      <p:to>
-                                        <p:strVal val="visible"/>
-                                      </p:to>
-                                    </p:set>
-                                    <p:animEffect transition="in" filter="wipe(down)">
-                                      <p:cBhvr additive="repl">
-                                        <p:cTn id="62" dur="500"/>
-                                        <p:tgtEl>
-                                          <p:spTgt spid="178">
-                                            <p:txEl>
-                                              <p:pRg st="11" end="11"/>
-                                            </p:txEl>
-                                          </p:spTgt>
-                                        </p:tgtEl>
-                                      </p:cBhvr>
-                                    </p:animEffect>
                                   </p:childTnLst>
                                 </p:cTn>
                               </p:par>
@@ -36265,6 +36316,9 @@
         </p:cTn>
       </p:par>
     </p:tnLst>
+    <p:bldLst>
+      <p:bldP spid="178" grpId="0" build="p"/>
+    </p:bldLst>
   </p:timing>
 </p:sld>
 </file>
@@ -36411,7 +36465,7 @@
                 </a:solidFill>
                 <a:latin typeface="Calibri"/>
               </a:rPr>
-              <a:t>Dr. Daniel Ruffinelli - FSS 2025</a:t>
+              <a:t>Dr. Daniel Ruffinelli - FSS 2026</a:t>
             </a:r>
             <a:endParaRPr lang="en-US" sz="1200" b="0" strike="noStrike" spc="-1">
               <a:latin typeface="Times New Roman"/>
@@ -36983,7 +37037,7 @@
       <p:par>
         <p:cTn id="1" dur="indefinite" restart="never" nodeType="tmRoot">
           <p:childTnLst>
-            <p:seq>
+            <p:seq concurrent="1" nextAc="seek">
               <p:cTn id="2" dur="indefinite" nodeType="mainSeq">
                 <p:childTnLst>
                   <p:par>
@@ -36999,7 +37053,7 @@
                             </p:stCondLst>
                             <p:childTnLst>
                               <p:par>
-                                <p:cTn id="5" presetID="22" presetClass="entr" presetSubtype="4" fill="hold" nodeType="clickEffect">
+                                <p:cTn id="5" presetID="1" presetClass="entr" presetSubtype="0" fill="hold" grpId="0" nodeType="clickEffect">
                                   <p:stCondLst>
                                     <p:cond delay="0"/>
                                   </p:stCondLst>
@@ -37014,7 +37068,7 @@
                                         <p:tgtEl>
                                           <p:spTgt spid="178">
                                             <p:txEl>
-                                              <p:pRg st="1" end="1"/>
+                                              <p:pRg st="0" end="0"/>
                                             </p:txEl>
                                           </p:spTgt>
                                         </p:tgtEl>
@@ -37026,18 +37080,6 @@
                                         <p:strVal val="visible"/>
                                       </p:to>
                                     </p:set>
-                                    <p:animEffect transition="in" filter="wipe(down)">
-                                      <p:cBhvr additive="repl">
-                                        <p:cTn id="7" dur="500"/>
-                                        <p:tgtEl>
-                                          <p:spTgt spid="178">
-                                            <p:txEl>
-                                              <p:pRg st="1" end="1"/>
-                                            </p:txEl>
-                                          </p:spTgt>
-                                        </p:tgtEl>
-                                      </p:cBhvr>
-                                    </p:animEffect>
                                   </p:childTnLst>
                                 </p:cTn>
                               </p:par>
@@ -37048,26 +37090,26 @@
                     </p:cTn>
                   </p:par>
                   <p:par>
-                    <p:cTn id="8" fill="hold">
+                    <p:cTn id="7" fill="hold">
                       <p:stCondLst>
                         <p:cond delay="indefinite"/>
                       </p:stCondLst>
                       <p:childTnLst>
                         <p:par>
-                          <p:cTn id="9" fill="hold">
+                          <p:cTn id="8" fill="hold">
                             <p:stCondLst>
                               <p:cond delay="0"/>
                             </p:stCondLst>
                             <p:childTnLst>
                               <p:par>
-                                <p:cTn id="10" presetID="22" presetClass="entr" presetSubtype="4" fill="hold" nodeType="clickEffect">
+                                <p:cTn id="9" presetID="1" presetClass="entr" presetSubtype="0" fill="hold" grpId="0" nodeType="clickEffect">
                                   <p:stCondLst>
                                     <p:cond delay="0"/>
                                   </p:stCondLst>
                                   <p:childTnLst>
                                     <p:set>
                                       <p:cBhvr>
-                                        <p:cTn id="11" dur="1" fill="hold">
+                                        <p:cTn id="10" dur="1" fill="hold">
                                           <p:stCondLst>
                                             <p:cond delay="0"/>
                                           </p:stCondLst>
@@ -37075,7 +37117,7 @@
                                         <p:tgtEl>
                                           <p:spTgt spid="178">
                                             <p:txEl>
-                                              <p:pRg st="0" end="0"/>
+                                              <p:pRg st="1" end="1"/>
                                             </p:txEl>
                                           </p:spTgt>
                                         </p:tgtEl>
@@ -37087,18 +37129,37 @@
                                         <p:strVal val="visible"/>
                                       </p:to>
                                     </p:set>
-                                    <p:animEffect transition="in" filter="wipe(down)">
-                                      <p:cBhvr additive="repl">
-                                        <p:cTn id="12" dur="500"/>
+                                  </p:childTnLst>
+                                </p:cTn>
+                              </p:par>
+                              <p:par>
+                                <p:cTn id="11" presetID="1" presetClass="entr" presetSubtype="0" fill="hold" grpId="0" nodeType="withEffect">
+                                  <p:stCondLst>
+                                    <p:cond delay="0"/>
+                                  </p:stCondLst>
+                                  <p:childTnLst>
+                                    <p:set>
+                                      <p:cBhvr>
+                                        <p:cTn id="12" dur="1" fill="hold">
+                                          <p:stCondLst>
+                                            <p:cond delay="0"/>
+                                          </p:stCondLst>
+                                        </p:cTn>
                                         <p:tgtEl>
                                           <p:spTgt spid="178">
                                             <p:txEl>
-                                              <p:pRg st="0" end="0"/>
-                                            </p:txEl>
-                                          </p:spTgt>
-                                        </p:tgtEl>
-                                      </p:cBhvr>
-                                    </p:animEffect>
+                                              <p:pRg st="2" end="2"/>
+                                            </p:txEl>
+                                          </p:spTgt>
+                                        </p:tgtEl>
+                                        <p:attrNameLst>
+                                          <p:attrName>style.visibility</p:attrName>
+                                        </p:attrNameLst>
+                                      </p:cBhvr>
+                                      <p:to>
+                                        <p:strVal val="visible"/>
+                                      </p:to>
+                                    </p:set>
                                   </p:childTnLst>
                                 </p:cTn>
                               </p:par>
@@ -37121,7 +37182,7 @@
                             </p:stCondLst>
                             <p:childTnLst>
                               <p:par>
-                                <p:cTn id="15" presetID="22" presetClass="entr" presetSubtype="4" fill="hold" nodeType="clickEffect">
+                                <p:cTn id="15" presetID="1" presetClass="entr" presetSubtype="0" fill="hold" grpId="0" nodeType="clickEffect">
                                   <p:stCondLst>
                                     <p:cond delay="0"/>
                                   </p:stCondLst>
@@ -37136,7 +37197,7 @@
                                         <p:tgtEl>
                                           <p:spTgt spid="178">
                                             <p:txEl>
-                                              <p:pRg st="2" end="2"/>
+                                              <p:pRg st="3" end="3"/>
                                             </p:txEl>
                                           </p:spTgt>
                                         </p:tgtEl>
@@ -37148,48 +37209,18 @@
                                         <p:strVal val="visible"/>
                                       </p:to>
                                     </p:set>
-                                    <p:animEffect transition="in" filter="wipe(down)">
-                                      <p:cBhvr additive="repl">
-                                        <p:cTn id="17" dur="500"/>
-                                        <p:tgtEl>
-                                          <p:spTgt spid="178">
-                                            <p:txEl>
-                                              <p:pRg st="2" end="2"/>
-                                            </p:txEl>
-                                          </p:spTgt>
-                                        </p:tgtEl>
-                                      </p:cBhvr>
-                                    </p:animEffect>
                                   </p:childTnLst>
                                 </p:cTn>
                               </p:par>
-                            </p:childTnLst>
-                          </p:cTn>
-                        </p:par>
-                      </p:childTnLst>
-                    </p:cTn>
-                  </p:par>
-                  <p:par>
-                    <p:cTn id="18" fill="hold">
-                      <p:stCondLst>
-                        <p:cond delay="indefinite"/>
-                      </p:stCondLst>
-                      <p:childTnLst>
-                        <p:par>
-                          <p:cTn id="19" fill="hold">
-                            <p:stCondLst>
-                              <p:cond delay="0"/>
-                            </p:stCondLst>
-                            <p:childTnLst>
                               <p:par>
-                                <p:cTn id="20" presetID="22" presetClass="entr" presetSubtype="4" fill="hold" nodeType="clickEffect">
+                                <p:cTn id="17" presetID="1" presetClass="entr" presetSubtype="0" fill="hold" grpId="0" nodeType="withEffect">
                                   <p:stCondLst>
                                     <p:cond delay="0"/>
                                   </p:stCondLst>
                                   <p:childTnLst>
                                     <p:set>
                                       <p:cBhvr>
-                                        <p:cTn id="21" dur="1" fill="hold">
+                                        <p:cTn id="18" dur="1" fill="hold">
                                           <p:stCondLst>
                                             <p:cond delay="0"/>
                                           </p:stCondLst>
@@ -37197,7 +37228,7 @@
                                         <p:tgtEl>
                                           <p:spTgt spid="178">
                                             <p:txEl>
-                                              <p:pRg st="3" end="3"/>
+                                              <p:pRg st="4" end="4"/>
                                             </p:txEl>
                                           </p:spTgt>
                                         </p:tgtEl>
@@ -37209,18 +37240,68 @@
                                         <p:strVal val="visible"/>
                                       </p:to>
                                     </p:set>
-                                    <p:animEffect transition="in" filter="wipe(down)">
-                                      <p:cBhvr additive="repl">
-                                        <p:cTn id="22" dur="500"/>
+                                  </p:childTnLst>
+                                </p:cTn>
+                              </p:par>
+                              <p:par>
+                                <p:cTn id="19" presetID="1" presetClass="entr" presetSubtype="0" fill="hold" grpId="0" nodeType="withEffect">
+                                  <p:stCondLst>
+                                    <p:cond delay="0"/>
+                                  </p:stCondLst>
+                                  <p:childTnLst>
+                                    <p:set>
+                                      <p:cBhvr>
+                                        <p:cTn id="20" dur="1" fill="hold">
+                                          <p:stCondLst>
+                                            <p:cond delay="0"/>
+                                          </p:stCondLst>
+                                        </p:cTn>
                                         <p:tgtEl>
                                           <p:spTgt spid="178">
                                             <p:txEl>
-                                              <p:pRg st="3" end="3"/>
-                                            </p:txEl>
-                                          </p:spTgt>
-                                        </p:tgtEl>
-                                      </p:cBhvr>
-                                    </p:animEffect>
+                                              <p:pRg st="5" end="5"/>
+                                            </p:txEl>
+                                          </p:spTgt>
+                                        </p:tgtEl>
+                                        <p:attrNameLst>
+                                          <p:attrName>style.visibility</p:attrName>
+                                        </p:attrNameLst>
+                                      </p:cBhvr>
+                                      <p:to>
+                                        <p:strVal val="visible"/>
+                                      </p:to>
+                                    </p:set>
+                                  </p:childTnLst>
+                                </p:cTn>
+                              </p:par>
+                              <p:par>
+                                <p:cTn id="21" presetID="1" presetClass="entr" presetSubtype="0" fill="hold" grpId="0" nodeType="withEffect">
+                                  <p:stCondLst>
+                                    <p:cond delay="0"/>
+                                  </p:stCondLst>
+                                  <p:childTnLst>
+                                    <p:set>
+                                      <p:cBhvr>
+                                        <p:cTn id="22" dur="1" fill="hold">
+                                          <p:stCondLst>
+                                            <p:cond delay="0"/>
+                                          </p:stCondLst>
+                                        </p:cTn>
+                                        <p:tgtEl>
+                                          <p:spTgt spid="178">
+                                            <p:txEl>
+                                              <p:pRg st="6" end="6"/>
+                                            </p:txEl>
+                                          </p:spTgt>
+                                        </p:tgtEl>
+                                        <p:attrNameLst>
+                                          <p:attrName>style.visibility</p:attrName>
+                                        </p:attrNameLst>
+                                      </p:cBhvr>
+                                      <p:to>
+                                        <p:strVal val="visible"/>
+                                      </p:to>
+                                    </p:set>
                                   </p:childTnLst>
                                 </p:cTn>
                               </p:par>
@@ -37243,7 +37324,7 @@
                             </p:stCondLst>
                             <p:childTnLst>
                               <p:par>
-                                <p:cTn id="25" presetID="22" presetClass="entr" presetSubtype="4" fill="hold" nodeType="clickEffect">
+                                <p:cTn id="25" presetID="1" presetClass="entr" presetSubtype="0" fill="hold" grpId="0" nodeType="clickEffect">
                                   <p:stCondLst>
                                     <p:cond delay="0"/>
                                   </p:stCondLst>
@@ -37258,7 +37339,7 @@
                                         <p:tgtEl>
                                           <p:spTgt spid="178">
                                             <p:txEl>
-                                              <p:pRg st="4" end="4"/>
+                                              <p:pRg st="7" end="7"/>
                                             </p:txEl>
                                           </p:spTgt>
                                         </p:tgtEl>
@@ -37270,48 +37351,18 @@
                                         <p:strVal val="visible"/>
                                       </p:to>
                                     </p:set>
-                                    <p:animEffect transition="in" filter="wipe(down)">
-                                      <p:cBhvr additive="repl">
-                                        <p:cTn id="27" dur="500"/>
-                                        <p:tgtEl>
-                                          <p:spTgt spid="178">
-                                            <p:txEl>
-                                              <p:pRg st="4" end="4"/>
-                                            </p:txEl>
-                                          </p:spTgt>
-                                        </p:tgtEl>
-                                      </p:cBhvr>
-                                    </p:animEffect>
                                   </p:childTnLst>
                                 </p:cTn>
                               </p:par>
-                            </p:childTnLst>
-                          </p:cTn>
-                        </p:par>
-                      </p:childTnLst>
-                    </p:cTn>
-                  </p:par>
-                  <p:par>
-                    <p:cTn id="28" fill="hold">
-                      <p:stCondLst>
-                        <p:cond delay="indefinite"/>
-                      </p:stCondLst>
-                      <p:childTnLst>
-                        <p:par>
-                          <p:cTn id="29" fill="hold">
-                            <p:stCondLst>
-                              <p:cond delay="0"/>
-                            </p:stCondLst>
-                            <p:childTnLst>
                               <p:par>
-                                <p:cTn id="30" presetID="22" presetClass="entr" presetSubtype="4" fill="hold" nodeType="clickEffect">
+                                <p:cTn id="27" presetID="1" presetClass="entr" presetSubtype="0" fill="hold" grpId="0" nodeType="withEffect">
                                   <p:stCondLst>
                                     <p:cond delay="0"/>
                                   </p:stCondLst>
                                   <p:childTnLst>
                                     <p:set>
                                       <p:cBhvr>
-                                        <p:cTn id="31" dur="1" fill="hold">
+                                        <p:cTn id="28" dur="1" fill="hold">
                                           <p:stCondLst>
                                             <p:cond delay="0"/>
                                           </p:stCondLst>
@@ -37319,7 +37370,7 @@
                                         <p:tgtEl>
                                           <p:spTgt spid="178">
                                             <p:txEl>
-                                              <p:pRg st="5" end="5"/>
+                                              <p:pRg st="8" end="8"/>
                                             </p:txEl>
                                           </p:spTgt>
                                         </p:tgtEl>
@@ -37331,18 +37382,68 @@
                                         <p:strVal val="visible"/>
                                       </p:to>
                                     </p:set>
-                                    <p:animEffect transition="in" filter="wipe(down)">
-                                      <p:cBhvr additive="repl">
-                                        <p:cTn id="32" dur="500"/>
+                                  </p:childTnLst>
+                                </p:cTn>
+                              </p:par>
+                              <p:par>
+                                <p:cTn id="29" presetID="1" presetClass="entr" presetSubtype="0" fill="hold" grpId="0" nodeType="withEffect">
+                                  <p:stCondLst>
+                                    <p:cond delay="0"/>
+                                  </p:stCondLst>
+                                  <p:childTnLst>
+                                    <p:set>
+                                      <p:cBhvr>
+                                        <p:cTn id="30" dur="1" fill="hold">
+                                          <p:stCondLst>
+                                            <p:cond delay="0"/>
+                                          </p:stCondLst>
+                                        </p:cTn>
                                         <p:tgtEl>
                                           <p:spTgt spid="178">
                                             <p:txEl>
-                                              <p:pRg st="5" end="5"/>
-                                            </p:txEl>
-                                          </p:spTgt>
-                                        </p:tgtEl>
-                                      </p:cBhvr>
-                                    </p:animEffect>
+                                              <p:pRg st="9" end="9"/>
+                                            </p:txEl>
+                                          </p:spTgt>
+                                        </p:tgtEl>
+                                        <p:attrNameLst>
+                                          <p:attrName>style.visibility</p:attrName>
+                                        </p:attrNameLst>
+                                      </p:cBhvr>
+                                      <p:to>
+                                        <p:strVal val="visible"/>
+                                      </p:to>
+                                    </p:set>
+                                  </p:childTnLst>
+                                </p:cTn>
+                              </p:par>
+                              <p:par>
+                                <p:cTn id="31" presetID="1" presetClass="entr" presetSubtype="0" fill="hold" grpId="0" nodeType="withEffect">
+                                  <p:stCondLst>
+                                    <p:cond delay="0"/>
+                                  </p:stCondLst>
+                                  <p:childTnLst>
+                                    <p:set>
+                                      <p:cBhvr>
+                                        <p:cTn id="32" dur="1" fill="hold">
+                                          <p:stCondLst>
+                                            <p:cond delay="0"/>
+                                          </p:stCondLst>
+                                        </p:cTn>
+                                        <p:tgtEl>
+                                          <p:spTgt spid="178">
+                                            <p:txEl>
+                                              <p:pRg st="10" end="10"/>
+                                            </p:txEl>
+                                          </p:spTgt>
+                                        </p:tgtEl>
+                                        <p:attrNameLst>
+                                          <p:attrName>style.visibility</p:attrName>
+                                        </p:attrNameLst>
+                                      </p:cBhvr>
+                                      <p:to>
+                                        <p:strVal val="visible"/>
+                                      </p:to>
+                                    </p:set>
                                   </p:childTnLst>
                                 </p:cTn>
                               </p:par>
@@ -37365,7 +37466,7 @@
                             </p:stCondLst>
                             <p:childTnLst>
                               <p:par>
-                                <p:cTn id="35" presetID="22" presetClass="entr" presetSubtype="4" fill="hold" nodeType="clickEffect">
+                                <p:cTn id="35" presetID="1" presetClass="entr" presetSubtype="0" fill="hold" grpId="0" nodeType="clickEffect">
                                   <p:stCondLst>
                                     <p:cond delay="0"/>
                                   </p:stCondLst>
@@ -37380,7 +37481,7 @@
                                         <p:tgtEl>
                                           <p:spTgt spid="178">
                                             <p:txEl>
-                                              <p:pRg st="6" end="6"/>
+                                              <p:pRg st="11" end="11"/>
                                             </p:txEl>
                                           </p:spTgt>
                                         </p:tgtEl>
@@ -37392,48 +37493,18 @@
                                         <p:strVal val="visible"/>
                                       </p:to>
                                     </p:set>
-                                    <p:animEffect transition="in" filter="wipe(down)">
-                                      <p:cBhvr additive="repl">
-                                        <p:cTn id="37" dur="500"/>
-                                        <p:tgtEl>
-                                          <p:spTgt spid="178">
-                                            <p:txEl>
-                                              <p:pRg st="6" end="6"/>
-                                            </p:txEl>
-                                          </p:spTgt>
-                                        </p:tgtEl>
-                                      </p:cBhvr>
-                                    </p:animEffect>
                                   </p:childTnLst>
                                 </p:cTn>
                               </p:par>
-                            </p:childTnLst>
-                          </p:cTn>
-                        </p:par>
-                      </p:childTnLst>
-                    </p:cTn>
-                  </p:par>
-                  <p:par>
-                    <p:cTn id="38" fill="hold">
-                      <p:stCondLst>
-                        <p:cond delay="indefinite"/>
-                      </p:stCondLst>
-                      <p:childTnLst>
-                        <p:par>
-                          <p:cTn id="39" fill="hold">
-                            <p:stCondLst>
-                              <p:cond delay="0"/>
-                            </p:stCondLst>
-                            <p:childTnLst>
                               <p:par>
-                                <p:cTn id="40" presetID="22" presetClass="entr" presetSubtype="4" fill="hold" nodeType="clickEffect">
+                                <p:cTn id="37" presetID="1" presetClass="entr" presetSubtype="0" fill="hold" grpId="0" nodeType="withEffect">
                                   <p:stCondLst>
                                     <p:cond delay="0"/>
                                   </p:stCondLst>
                                   <p:childTnLst>
                                     <p:set>
                                       <p:cBhvr>
-                                        <p:cTn id="41" dur="1" fill="hold">
+                                        <p:cTn id="38" dur="1" fill="hold">
                                           <p:stCondLst>
                                             <p:cond delay="0"/>
                                           </p:stCondLst>
@@ -37441,7 +37512,7 @@
                                         <p:tgtEl>
                                           <p:spTgt spid="178">
                                             <p:txEl>
-                                              <p:pRg st="7" end="7"/>
+                                              <p:pRg st="12" end="12"/>
                                             </p:txEl>
                                           </p:spTgt>
                                         </p:tgtEl>
@@ -37453,48 +37524,18 @@
                                         <p:strVal val="visible"/>
                                       </p:to>
                                     </p:set>
-                                    <p:animEffect transition="in" filter="wipe(down)">
-                                      <p:cBhvr additive="repl">
-                                        <p:cTn id="42" dur="500"/>
-                                        <p:tgtEl>
-                                          <p:spTgt spid="178">
-                                            <p:txEl>
-                                              <p:pRg st="7" end="7"/>
-                                            </p:txEl>
-                                          </p:spTgt>
-                                        </p:tgtEl>
-                                      </p:cBhvr>
-                                    </p:animEffect>
                                   </p:childTnLst>
                                 </p:cTn>
                               </p:par>
-                            </p:childTnLst>
-                          </p:cTn>
-                        </p:par>
-                      </p:childTnLst>
-                    </p:cTn>
-                  </p:par>
-                  <p:par>
-                    <p:cTn id="43" fill="hold">
-                      <p:stCondLst>
-                        <p:cond delay="indefinite"/>
-                      </p:stCondLst>
-                      <p:childTnLst>
-                        <p:par>
-                          <p:cTn id="44" fill="hold">
-                            <p:stCondLst>
-                              <p:cond delay="0"/>
-                            </p:stCondLst>
-                            <p:childTnLst>
                               <p:par>
-                                <p:cTn id="45" presetID="22" presetClass="entr" presetSubtype="4" fill="hold" nodeType="clickEffect">
+                                <p:cTn id="39" presetID="1" presetClass="entr" presetSubtype="0" fill="hold" grpId="0" nodeType="withEffect">
                                   <p:stCondLst>
                                     <p:cond delay="0"/>
                                   </p:stCondLst>
                                   <p:childTnLst>
                                     <p:set>
                                       <p:cBhvr>
-                                        <p:cTn id="46" dur="1" fill="hold">
+                                        <p:cTn id="40" dur="1" fill="hold">
                                           <p:stCondLst>
                                             <p:cond delay="0"/>
                                           </p:stCondLst>
@@ -37502,7 +37543,7 @@
                                         <p:tgtEl>
                                           <p:spTgt spid="178">
                                             <p:txEl>
-                                              <p:pRg st="8" end="8"/>
+                                              <p:pRg st="13" end="13"/>
                                             </p:txEl>
                                           </p:spTgt>
                                         </p:tgtEl>
@@ -37514,48 +37555,18 @@
                                         <p:strVal val="visible"/>
                                       </p:to>
                                     </p:set>
-                                    <p:animEffect transition="in" filter="wipe(down)">
-                                      <p:cBhvr additive="repl">
-                                        <p:cTn id="47" dur="500"/>
-                                        <p:tgtEl>
-                                          <p:spTgt spid="178">
-                                            <p:txEl>
-                                              <p:pRg st="8" end="8"/>
-                                            </p:txEl>
-                                          </p:spTgt>
-                                        </p:tgtEl>
-                                      </p:cBhvr>
-                                    </p:animEffect>
                                   </p:childTnLst>
                                 </p:cTn>
                               </p:par>
-                            </p:childTnLst>
-                          </p:cTn>
-                        </p:par>
-                      </p:childTnLst>
-                    </p:cTn>
-                  </p:par>
-                  <p:par>
-                    <p:cTn id="48" fill="hold">
-                      <p:stCondLst>
-                        <p:cond delay="indefinite"/>
-                      </p:stCondLst>
-                      <p:childTnLst>
-                        <p:par>
-                          <p:cTn id="49" fill="hold">
-                            <p:stCondLst>
-                              <p:cond delay="0"/>
-                            </p:stCondLst>
-                            <p:childTnLst>
                               <p:par>
-                                <p:cTn id="50" presetID="22" presetClass="entr" presetSubtype="4" fill="hold" nodeType="clickEffect">
+                                <p:cTn id="41" presetID="1" presetClass="entr" presetSubtype="0" fill="hold" grpId="0" nodeType="withEffect">
                                   <p:stCondLst>
                                     <p:cond delay="0"/>
                                   </p:stCondLst>
                                   <p:childTnLst>
                                     <p:set>
                                       <p:cBhvr>
-                                        <p:cTn id="51" dur="1" fill="hold">
+                                        <p:cTn id="42" dur="1" fill="hold">
                                           <p:stCondLst>
                                             <p:cond delay="0"/>
                                           </p:stCondLst>
@@ -37563,7 +37574,7 @@
                                         <p:tgtEl>
                                           <p:spTgt spid="178">
                                             <p:txEl>
-                                              <p:pRg st="9" end="9"/>
+                                              <p:pRg st="14" end="14"/>
                                             </p:txEl>
                                           </p:spTgt>
                                         </p:tgtEl>
@@ -37575,323 +37586,6 @@
                                         <p:strVal val="visible"/>
                                       </p:to>
                                     </p:set>
-                                    <p:animEffect transition="in" filter="wipe(down)">
-                                      <p:cBhvr additive="repl">
-                                        <p:cTn id="52" dur="500"/>
-                                        <p:tgtEl>
-                                          <p:spTgt spid="178">
-                                            <p:txEl>
-                                              <p:pRg st="9" end="9"/>
-                                            </p:txEl>
-                                          </p:spTgt>
-                                        </p:tgtEl>
-                                      </p:cBhvr>
-                                    </p:animEffect>
-                                  </p:childTnLst>
-                                </p:cTn>
-                              </p:par>
-                            </p:childTnLst>
-                          </p:cTn>
-                        </p:par>
-                      </p:childTnLst>
-                    </p:cTn>
-                  </p:par>
-                  <p:par>
-                    <p:cTn id="53" fill="hold">
-                      <p:stCondLst>
-                        <p:cond delay="indefinite"/>
-                      </p:stCondLst>
-                      <p:childTnLst>
-                        <p:par>
-                          <p:cTn id="54" fill="hold">
-                            <p:stCondLst>
-                              <p:cond delay="0"/>
-                            </p:stCondLst>
-                            <p:childTnLst>
-                              <p:par>
-                                <p:cTn id="55" presetID="22" presetClass="entr" presetSubtype="4" fill="hold" nodeType="clickEffect">
-                                  <p:stCondLst>
-                                    <p:cond delay="0"/>
-                                  </p:stCondLst>
-                                  <p:childTnLst>
-                                    <p:set>
-                                      <p:cBhvr>
-                                        <p:cTn id="56" dur="1" fill="hold">
-                                          <p:stCondLst>
-                                            <p:cond delay="0"/>
-                                          </p:stCondLst>
-                                        </p:cTn>
-                                        <p:tgtEl>
-                                          <p:spTgt spid="178">
-                                            <p:txEl>
-                                              <p:pRg st="10" end="10"/>
-                                            </p:txEl>
-                                          </p:spTgt>
-                                        </p:tgtEl>
-                                        <p:attrNameLst>
-                                          <p:attrName>style.visibility</p:attrName>
-                                        </p:attrNameLst>
-                                      </p:cBhvr>
-                                      <p:to>
-                                        <p:strVal val="visible"/>
-                                      </p:to>
-                                    </p:set>
-                                    <p:animEffect transition="in" filter="wipe(down)">
-                                      <p:cBhvr additive="repl">
-                                        <p:cTn id="57" dur="500"/>
-                                        <p:tgtEl>
-                                          <p:spTgt spid="178">
-                                            <p:txEl>
-                                              <p:pRg st="10" end="10"/>
-                                            </p:txEl>
-                                          </p:spTgt>
-                                        </p:tgtEl>
-                                      </p:cBhvr>
-                                    </p:animEffect>
-                                  </p:childTnLst>
-                                </p:cTn>
-                              </p:par>
-                            </p:childTnLst>
-                          </p:cTn>
-                        </p:par>
-                      </p:childTnLst>
-                    </p:cTn>
-                  </p:par>
-                  <p:par>
-                    <p:cTn id="58" fill="hold">
-                      <p:stCondLst>
-                        <p:cond delay="indefinite"/>
-                      </p:stCondLst>
-                      <p:childTnLst>
-                        <p:par>
-                          <p:cTn id="59" fill="hold">
-                            <p:stCondLst>
-                              <p:cond delay="0"/>
-                            </p:stCondLst>
-                            <p:childTnLst>
-                              <p:par>
-                                <p:cTn id="60" presetID="22" presetClass="entr" presetSubtype="4" fill="hold" nodeType="clickEffect">
-                                  <p:stCondLst>
-                                    <p:cond delay="0"/>
-                                  </p:stCondLst>
-                                  <p:childTnLst>
-                                    <p:set>
-                                      <p:cBhvr>
-                                        <p:cTn id="61" dur="1" fill="hold">
-                                          <p:stCondLst>
-                                            <p:cond delay="0"/>
-                                          </p:stCondLst>
-                                        </p:cTn>
-                                        <p:tgtEl>
-                                          <p:spTgt spid="178">
-                                            <p:txEl>
-                                              <p:pRg st="11" end="11"/>
-                                            </p:txEl>
-                                          </p:spTgt>
-                                        </p:tgtEl>
-                                        <p:attrNameLst>
-                                          <p:attrName>style.visibility</p:attrName>
-                                        </p:attrNameLst>
-                                      </p:cBhvr>
-                                      <p:to>
-                                        <p:strVal val="visible"/>
-                                      </p:to>
-                                    </p:set>
-                                    <p:animEffect transition="in" filter="wipe(down)">
-                                      <p:cBhvr additive="repl">
-                                        <p:cTn id="62" dur="500"/>
-                                        <p:tgtEl>
-                                          <p:spTgt spid="178">
-                                            <p:txEl>
-                                              <p:pRg st="11" end="11"/>
-                                            </p:txEl>
-                                          </p:spTgt>
-                                        </p:tgtEl>
-                                      </p:cBhvr>
-                                    </p:animEffect>
-                                  </p:childTnLst>
-                                </p:cTn>
-                              </p:par>
-                            </p:childTnLst>
-                          </p:cTn>
-                        </p:par>
-                      </p:childTnLst>
-                    </p:cTn>
-                  </p:par>
-                  <p:par>
-                    <p:cTn id="63" fill="hold">
-                      <p:stCondLst>
-                        <p:cond delay="indefinite"/>
-                      </p:stCondLst>
-                      <p:childTnLst>
-                        <p:par>
-                          <p:cTn id="64" fill="hold">
-                            <p:stCondLst>
-                              <p:cond delay="0"/>
-                            </p:stCondLst>
-                            <p:childTnLst>
-                              <p:par>
-                                <p:cTn id="65" presetID="22" presetClass="entr" presetSubtype="4" fill="hold" nodeType="clickEffect">
-                                  <p:stCondLst>
-                                    <p:cond delay="0"/>
-                                  </p:stCondLst>
-                                  <p:childTnLst>
-                                    <p:set>
-                                      <p:cBhvr>
-                                        <p:cTn id="66" dur="1" fill="hold">
-                                          <p:stCondLst>
-                                            <p:cond delay="0"/>
-                                          </p:stCondLst>
-                                        </p:cTn>
-                                        <p:tgtEl>
-                                          <p:spTgt spid="178">
-                                            <p:txEl>
-                                              <p:pRg st="12" end="12"/>
-                                            </p:txEl>
-                                          </p:spTgt>
-                                        </p:tgtEl>
-                                        <p:attrNameLst>
-                                          <p:attrName>style.visibility</p:attrName>
-                                        </p:attrNameLst>
-                                      </p:cBhvr>
-                                      <p:to>
-                                        <p:strVal val="visible"/>
-                                      </p:to>
-                                    </p:set>
-                                    <p:animEffect transition="in" filter="wipe(down)">
-                                      <p:cBhvr additive="repl">
-                                        <p:cTn id="67" dur="500"/>
-                                        <p:tgtEl>
-                                          <p:spTgt spid="178">
-                                            <p:txEl>
-                                              <p:pRg st="12" end="12"/>
-                                            </p:txEl>
-                                          </p:spTgt>
-                                        </p:tgtEl>
-                                      </p:cBhvr>
-                                    </p:animEffect>
-                                  </p:childTnLst>
-                                </p:cTn>
-                              </p:par>
-                            </p:childTnLst>
-                          </p:cTn>
-                        </p:par>
-                      </p:childTnLst>
-                    </p:cTn>
-                  </p:par>
-                  <p:par>
-                    <p:cTn id="68" fill="hold">
-                      <p:stCondLst>
-                        <p:cond delay="indefinite"/>
-                      </p:stCondLst>
-                      <p:childTnLst>
-                        <p:par>
-                          <p:cTn id="69" fill="hold">
-                            <p:stCondLst>
-                              <p:cond delay="0"/>
-                            </p:stCondLst>
-                            <p:childTnLst>
-                              <p:par>
-                                <p:cTn id="70" presetID="22" presetClass="entr" presetSubtype="4" fill="hold" nodeType="clickEffect">
-                                  <p:stCondLst>
-                                    <p:cond delay="0"/>
-                                  </p:stCondLst>
-                                  <p:childTnLst>
-                                    <p:set>
-                                      <p:cBhvr>
-                                        <p:cTn id="71" dur="1" fill="hold">
-                                          <p:stCondLst>
-                                            <p:cond delay="0"/>
-                                          </p:stCondLst>
-                                        </p:cTn>
-                                        <p:tgtEl>
-                                          <p:spTgt spid="178">
-                                            <p:txEl>
-                                              <p:pRg st="13" end="13"/>
-                                            </p:txEl>
-                                          </p:spTgt>
-                                        </p:tgtEl>
-                                        <p:attrNameLst>
-                                          <p:attrName>style.visibility</p:attrName>
-                                        </p:attrNameLst>
-                                      </p:cBhvr>
-                                      <p:to>
-                                        <p:strVal val="visible"/>
-                                      </p:to>
-                                    </p:set>
-                                    <p:animEffect transition="in" filter="wipe(down)">
-                                      <p:cBhvr additive="repl">
-                                        <p:cTn id="72" dur="500"/>
-                                        <p:tgtEl>
-                                          <p:spTgt spid="178">
-                                            <p:txEl>
-                                              <p:pRg st="13" end="13"/>
-                                            </p:txEl>
-                                          </p:spTgt>
-                                        </p:tgtEl>
-                                      </p:cBhvr>
-                                    </p:animEffect>
-                                  </p:childTnLst>
-                                </p:cTn>
-                              </p:par>
-                            </p:childTnLst>
-                          </p:cTn>
-                        </p:par>
-                      </p:childTnLst>
-                    </p:cTn>
-                  </p:par>
-                  <p:par>
-                    <p:cTn id="73" fill="hold">
-                      <p:stCondLst>
-                        <p:cond delay="indefinite"/>
-                      </p:stCondLst>
-                      <p:childTnLst>
-                        <p:par>
-                          <p:cTn id="74" fill="hold">
-                            <p:stCondLst>
-                              <p:cond delay="0"/>
-                            </p:stCondLst>
-                            <p:childTnLst>
-                              <p:par>
-                                <p:cTn id="75" presetID="22" presetClass="entr" presetSubtype="4" fill="hold" nodeType="clickEffect">
-                                  <p:stCondLst>
-                                    <p:cond delay="0"/>
-                                  </p:stCondLst>
-                                  <p:childTnLst>
-                                    <p:set>
-                                      <p:cBhvr>
-                                        <p:cTn id="76" dur="1" fill="hold">
-                                          <p:stCondLst>
-                                            <p:cond delay="0"/>
-                                          </p:stCondLst>
-                                        </p:cTn>
-                                        <p:tgtEl>
-                                          <p:spTgt spid="178">
-                                            <p:txEl>
-                                              <p:pRg st="14" end="14"/>
-                                            </p:txEl>
-                                          </p:spTgt>
-                                        </p:tgtEl>
-                                        <p:attrNameLst>
-                                          <p:attrName>style.visibility</p:attrName>
-                                        </p:attrNameLst>
-                                      </p:cBhvr>
-                                      <p:to>
-                                        <p:strVal val="visible"/>
-                                      </p:to>
-                                    </p:set>
-                                    <p:animEffect transition="in" filter="wipe(down)">
-                                      <p:cBhvr additive="repl">
-                                        <p:cTn id="77" dur="500"/>
-                                        <p:tgtEl>
-                                          <p:spTgt spid="178">
-                                            <p:txEl>
-                                              <p:pRg st="14" end="14"/>
-                                            </p:txEl>
-                                          </p:spTgt>
-                                        </p:tgtEl>
-                                      </p:cBhvr>
-                                    </p:animEffect>
                                   </p:childTnLst>
                                 </p:cTn>
                               </p:par>
@@ -37922,6 +37616,9 @@
         </p:cTn>
       </p:par>
     </p:tnLst>
+    <p:bldLst>
+      <p:bldP spid="178" grpId="0" build="p"/>
+    </p:bldLst>
   </p:timing>
 </p:sld>
 </file>
@@ -38051,7 +37748,7 @@
                 </a:solidFill>
                 <a:latin typeface="Calibri"/>
               </a:rPr>
-              <a:t>Dr. Daniel Ruffinelli - FSS 2025</a:t>
+              <a:t>Dr. Daniel Ruffinelli - FSS 2026</a:t>
             </a:r>
             <a:endParaRPr lang="en-US" sz="1200" b="0" strike="noStrike" spc="-1">
               <a:latin typeface="Times New Roman"/>
@@ -38956,7 +38653,7 @@
                 </a:solidFill>
                 <a:latin typeface="Calibri"/>
               </a:rPr>
-              <a:t>Dr. Daniel Ruffinelli - FSS 2025</a:t>
+              <a:t>Dr. Daniel Ruffinelli - FSS 2026</a:t>
             </a:r>
             <a:endParaRPr lang="en-US" sz="1200" b="0" strike="noStrike" spc="-1">
               <a:latin typeface="Times New Roman"/>
@@ -39490,7 +39187,7 @@
       <p:par>
         <p:cTn id="1" dur="indefinite" restart="never" nodeType="tmRoot">
           <p:childTnLst>
-            <p:seq>
+            <p:seq concurrent="1" nextAc="seek">
               <p:cTn id="2" dur="indefinite" nodeType="mainSeq">
                 <p:childTnLst>
                   <p:par>
@@ -39506,7 +39203,7 @@
                             </p:stCondLst>
                             <p:childTnLst>
                               <p:par>
-                                <p:cTn id="5" presetID="22" presetClass="entr" presetSubtype="4" fill="hold" nodeType="clickEffect">
+                                <p:cTn id="5" presetID="1" presetClass="entr" presetSubtype="0" fill="hold" grpId="0" nodeType="clickEffect">
                                   <p:stCondLst>
                                     <p:cond delay="0"/>
                                   </p:stCondLst>
@@ -39533,18 +39230,37 @@
                                         <p:strVal val="visible"/>
                                       </p:to>
                                     </p:set>
-                                    <p:animEffect transition="in" filter="wipe(down)">
-                                      <p:cBhvr additive="repl">
-                                        <p:cTn id="7" dur="500"/>
+                                  </p:childTnLst>
+                                </p:cTn>
+                              </p:par>
+                              <p:par>
+                                <p:cTn id="7" presetID="1" presetClass="entr" presetSubtype="0" fill="hold" grpId="0" nodeType="withEffect">
+                                  <p:stCondLst>
+                                    <p:cond delay="0"/>
+                                  </p:stCondLst>
+                                  <p:childTnLst>
+                                    <p:set>
+                                      <p:cBhvr>
+                                        <p:cTn id="8" dur="1" fill="hold">
+                                          <p:stCondLst>
+                                            <p:cond delay="0"/>
+                                          </p:stCondLst>
+                                        </p:cTn>
                                         <p:tgtEl>
                                           <p:spTgt spid="185">
                                             <p:txEl>
-                                              <p:pRg st="0" end="0"/>
-                                            </p:txEl>
-                                          </p:spTgt>
-                                        </p:tgtEl>
-                                      </p:cBhvr>
-                                    </p:animEffect>
+                                              <p:pRg st="1" end="1"/>
+                                            </p:txEl>
+                                          </p:spTgt>
+                                        </p:tgtEl>
+                                        <p:attrNameLst>
+                                          <p:attrName>style.visibility</p:attrName>
+                                        </p:attrNameLst>
+                                      </p:cBhvr>
+                                      <p:to>
+                                        <p:strVal val="visible"/>
+                                      </p:to>
+                                    </p:set>
                                   </p:childTnLst>
                                 </p:cTn>
                               </p:par>
@@ -39555,26 +39271,26 @@
                     </p:cTn>
                   </p:par>
                   <p:par>
-                    <p:cTn id="8" fill="hold">
+                    <p:cTn id="9" fill="hold">
                       <p:stCondLst>
                         <p:cond delay="indefinite"/>
                       </p:stCondLst>
                       <p:childTnLst>
                         <p:par>
-                          <p:cTn id="9" fill="hold">
+                          <p:cTn id="10" fill="hold">
                             <p:stCondLst>
                               <p:cond delay="0"/>
                             </p:stCondLst>
                             <p:childTnLst>
                               <p:par>
-                                <p:cTn id="10" presetID="22" presetClass="entr" presetSubtype="4" fill="hold" nodeType="clickEffect">
+                                <p:cTn id="11" presetID="1" presetClass="entr" presetSubtype="0" fill="hold" grpId="0" nodeType="clickEffect">
                                   <p:stCondLst>
                                     <p:cond delay="0"/>
                                   </p:stCondLst>
                                   <p:childTnLst>
                                     <p:set>
                                       <p:cBhvr>
-                                        <p:cTn id="11" dur="1" fill="hold">
+                                        <p:cTn id="12" dur="1" fill="hold">
                                           <p:stCondLst>
                                             <p:cond delay="0"/>
                                           </p:stCondLst>
@@ -39582,7 +39298,7 @@
                                         <p:tgtEl>
                                           <p:spTgt spid="185">
                                             <p:txEl>
-                                              <p:pRg st="1" end="1"/>
+                                              <p:pRg st="2" end="2"/>
                                             </p:txEl>
                                           </p:spTgt>
                                         </p:tgtEl>
@@ -39594,41 +39310,42 @@
                                         <p:strVal val="visible"/>
                                       </p:to>
                                     </p:set>
-                                    <p:animEffect transition="in" filter="wipe(down)">
-                                      <p:cBhvr additive="repl">
-                                        <p:cTn id="12" dur="500"/>
-                                        <p:tgtEl>
-                                          <p:spTgt spid="185">
-                                            <p:txEl>
-                                              <p:pRg st="1" end="1"/>
-                                            </p:txEl>
-                                          </p:spTgt>
-                                        </p:tgtEl>
-                                      </p:cBhvr>
-                                    </p:animEffect>
                                   </p:childTnLst>
                                 </p:cTn>
                               </p:par>
-                            </p:childTnLst>
-                          </p:cTn>
-                        </p:par>
-                      </p:childTnLst>
-                    </p:cTn>
-                  </p:par>
-                  <p:par>
-                    <p:cTn id="13" fill="hold">
-                      <p:stCondLst>
-                        <p:cond delay="indefinite"/>
-                      </p:stCondLst>
-                      <p:childTnLst>
-                        <p:par>
-                          <p:cTn id="14" fill="hold">
-                            <p:stCondLst>
-                              <p:cond delay="0"/>
-                            </p:stCondLst>
-                            <p:childTnLst>
                               <p:par>
-                                <p:cTn id="15" presetID="22" presetClass="entr" presetSubtype="4" fill="hold" nodeType="clickEffect">
+                                <p:cTn id="13" presetID="1" presetClass="entr" presetSubtype="0" fill="hold" grpId="0" nodeType="withEffect">
+                                  <p:stCondLst>
+                                    <p:cond delay="0"/>
+                                  </p:stCondLst>
+                                  <p:childTnLst>
+                                    <p:set>
+                                      <p:cBhvr>
+                                        <p:cTn id="14" dur="1" fill="hold">
+                                          <p:stCondLst>
+                                            <p:cond delay="0"/>
+                                          </p:stCondLst>
+                                        </p:cTn>
+                                        <p:tgtEl>
+                                          <p:spTgt spid="185">
+                                            <p:txEl>
+                                              <p:pRg st="3" end="3"/>
+                                            </p:txEl>
+                                          </p:spTgt>
+                                        </p:tgtEl>
+                                        <p:attrNameLst>
+                                          <p:attrName>style.visibility</p:attrName>
+                                        </p:attrNameLst>
+                                      </p:cBhvr>
+                                      <p:to>
+                                        <p:strVal val="visible"/>
+                                      </p:to>
+                                    </p:set>
+                                  </p:childTnLst>
+                                </p:cTn>
+                              </p:par>
+                              <p:par>
+                                <p:cTn id="15" presetID="1" presetClass="entr" presetSubtype="0" fill="hold" grpId="0" nodeType="withEffect">
                                   <p:stCondLst>
                                     <p:cond delay="0"/>
                                   </p:stCondLst>
@@ -39643,7 +39360,7 @@
                                         <p:tgtEl>
                                           <p:spTgt spid="185">
                                             <p:txEl>
-                                              <p:pRg st="2" end="2"/>
+                                              <p:pRg st="4" end="4"/>
                                             </p:txEl>
                                           </p:spTgt>
                                         </p:tgtEl>
@@ -39655,18 +39372,68 @@
                                         <p:strVal val="visible"/>
                                       </p:to>
                                     </p:set>
-                                    <p:animEffect transition="in" filter="wipe(down)">
-                                      <p:cBhvr additive="repl">
-                                        <p:cTn id="17" dur="500"/>
+                                  </p:childTnLst>
+                                </p:cTn>
+                              </p:par>
+                              <p:par>
+                                <p:cTn id="17" presetID="1" presetClass="entr" presetSubtype="0" fill="hold" grpId="0" nodeType="withEffect">
+                                  <p:stCondLst>
+                                    <p:cond delay="0"/>
+                                  </p:stCondLst>
+                                  <p:childTnLst>
+                                    <p:set>
+                                      <p:cBhvr>
+                                        <p:cTn id="18" dur="1" fill="hold">
+                                          <p:stCondLst>
+                                            <p:cond delay="0"/>
+                                          </p:stCondLst>
+                                        </p:cTn>
                                         <p:tgtEl>
                                           <p:spTgt spid="185">
                                             <p:txEl>
-                                              <p:pRg st="2" end="2"/>
-                                            </p:txEl>
-                                          </p:spTgt>
-                                        </p:tgtEl>
-                                      </p:cBhvr>
-                                    </p:animEffect>
+                                              <p:pRg st="5" end="5"/>
+                                            </p:txEl>
+                                          </p:spTgt>
+                                        </p:tgtEl>
+                                        <p:attrNameLst>
+                                          <p:attrName>style.visibility</p:attrName>
+                                        </p:attrNameLst>
+                                      </p:cBhvr>
+                                      <p:to>
+                                        <p:strVal val="visible"/>
+                                      </p:to>
+                                    </p:set>
+                                  </p:childTnLst>
+                                </p:cTn>
+                              </p:par>
+                              <p:par>
+                                <p:cTn id="19" presetID="1" presetClass="entr" presetSubtype="0" fill="hold" grpId="0" nodeType="withEffect">
+                                  <p:stCondLst>
+                                    <p:cond delay="0"/>
+                                  </p:stCondLst>
+                                  <p:childTnLst>
+                                    <p:set>
+                                      <p:cBhvr>
+                                        <p:cTn id="20" dur="1" fill="hold">
+                                          <p:stCondLst>
+                                            <p:cond delay="0"/>
+                                          </p:stCondLst>
+                                        </p:cTn>
+                                        <p:tgtEl>
+                                          <p:spTgt spid="185">
+                                            <p:txEl>
+                                              <p:pRg st="6" end="6"/>
+                                            </p:txEl>
+                                          </p:spTgt>
+                                        </p:tgtEl>
+                                        <p:attrNameLst>
+                                          <p:attrName>style.visibility</p:attrName>
+                                        </p:attrNameLst>
+                                      </p:cBhvr>
+                                      <p:to>
+                                        <p:strVal val="visible"/>
+                                      </p:to>
+                                    </p:set>
                                   </p:childTnLst>
                                 </p:cTn>
                               </p:par>
@@ -39677,26 +39444,26 @@
                     </p:cTn>
                   </p:par>
                   <p:par>
-                    <p:cTn id="18" fill="hold">
+                    <p:cTn id="21" fill="hold">
                       <p:stCondLst>
                         <p:cond delay="indefinite"/>
                       </p:stCondLst>
                       <p:childTnLst>
                         <p:par>
-                          <p:cTn id="19" fill="hold">
+                          <p:cTn id="22" fill="hold">
                             <p:stCondLst>
                               <p:cond delay="0"/>
                             </p:stCondLst>
                             <p:childTnLst>
                               <p:par>
-                                <p:cTn id="20" presetID="22" presetClass="entr" presetSubtype="4" fill="hold" nodeType="clickEffect">
+                                <p:cTn id="23" presetID="1" presetClass="entr" presetSubtype="0" fill="hold" grpId="0" nodeType="clickEffect">
                                   <p:stCondLst>
                                     <p:cond delay="0"/>
                                   </p:stCondLst>
                                   <p:childTnLst>
                                     <p:set>
                                       <p:cBhvr>
-                                        <p:cTn id="21" dur="1" fill="hold">
+                                        <p:cTn id="24" dur="1" fill="hold">
                                           <p:stCondLst>
                                             <p:cond delay="0"/>
                                           </p:stCondLst>
@@ -39704,7 +39471,7 @@
                                         <p:tgtEl>
                                           <p:spTgt spid="185">
                                             <p:txEl>
-                                              <p:pRg st="3" end="3"/>
+                                              <p:pRg st="7" end="7"/>
                                             </p:txEl>
                                           </p:spTgt>
                                         </p:tgtEl>
@@ -39716,18 +39483,6 @@
                                         <p:strVal val="visible"/>
                                       </p:to>
                                     </p:set>
-                                    <p:animEffect transition="in" filter="wipe(down)">
-                                      <p:cBhvr additive="repl">
-                                        <p:cTn id="22" dur="500"/>
-                                        <p:tgtEl>
-                                          <p:spTgt spid="185">
-                                            <p:txEl>
-                                              <p:pRg st="3" end="3"/>
-                                            </p:txEl>
-                                          </p:spTgt>
-                                        </p:tgtEl>
-                                      </p:cBhvr>
-                                    </p:animEffect>
                                   </p:childTnLst>
                                 </p:cTn>
                               </p:par>
@@ -39738,26 +39493,26 @@
                     </p:cTn>
                   </p:par>
                   <p:par>
-                    <p:cTn id="23" fill="hold">
+                    <p:cTn id="25" fill="hold">
                       <p:stCondLst>
                         <p:cond delay="indefinite"/>
                       </p:stCondLst>
                       <p:childTnLst>
                         <p:par>
-                          <p:cTn id="24" fill="hold">
+                          <p:cTn id="26" fill="hold">
                             <p:stCondLst>
                               <p:cond delay="0"/>
                             </p:stCondLst>
                             <p:childTnLst>
                               <p:par>
-                                <p:cTn id="25" presetID="22" presetClass="entr" presetSubtype="4" fill="hold" nodeType="clickEffect">
+                                <p:cTn id="27" presetID="1" presetClass="entr" presetSubtype="0" fill="hold" grpId="0" nodeType="clickEffect">
                                   <p:stCondLst>
                                     <p:cond delay="0"/>
                                   </p:stCondLst>
                                   <p:childTnLst>
                                     <p:set>
                                       <p:cBhvr>
-                                        <p:cTn id="26" dur="1" fill="hold">
+                                        <p:cTn id="28" dur="1" fill="hold">
                                           <p:stCondLst>
                                             <p:cond delay="0"/>
                                           </p:stCondLst>
@@ -39765,7 +39520,7 @@
                                         <p:tgtEl>
                                           <p:spTgt spid="185">
                                             <p:txEl>
-                                              <p:pRg st="4" end="4"/>
+                                              <p:pRg st="8" end="8"/>
                                             </p:txEl>
                                           </p:spTgt>
                                         </p:tgtEl>
@@ -39777,18 +39532,37 @@
                                         <p:strVal val="visible"/>
                                       </p:to>
                                     </p:set>
-                                    <p:animEffect transition="in" filter="wipe(down)">
-                                      <p:cBhvr additive="repl">
-                                        <p:cTn id="27" dur="500"/>
+                                  </p:childTnLst>
+                                </p:cTn>
+                              </p:par>
+                              <p:par>
+                                <p:cTn id="29" presetID="1" presetClass="entr" presetSubtype="0" fill="hold" grpId="0" nodeType="withEffect">
+                                  <p:stCondLst>
+                                    <p:cond delay="0"/>
+                                  </p:stCondLst>
+                                  <p:childTnLst>
+                                    <p:set>
+                                      <p:cBhvr>
+                                        <p:cTn id="30" dur="1" fill="hold">
+                                          <p:stCondLst>
+                                            <p:cond delay="0"/>
+                                          </p:stCondLst>
+                                        </p:cTn>
                                         <p:tgtEl>
                                           <p:spTgt spid="185">
                                             <p:txEl>
-                                              <p:pRg st="4" end="4"/>
-                                            </p:txEl>
-                                          </p:spTgt>
-                                        </p:tgtEl>
-                                      </p:cBhvr>
-                                    </p:animEffect>
+                                              <p:pRg st="9" end="9"/>
+                                            </p:txEl>
+                                          </p:spTgt>
+                                        </p:tgtEl>
+                                        <p:attrNameLst>
+                                          <p:attrName>style.visibility</p:attrName>
+                                        </p:attrNameLst>
+                                      </p:cBhvr>
+                                      <p:to>
+                                        <p:strVal val="visible"/>
+                                      </p:to>
+                                    </p:set>
                                   </p:childTnLst>
                                 </p:cTn>
                               </p:par>
@@ -39799,26 +39573,26 @@
                     </p:cTn>
                   </p:par>
                   <p:par>
-                    <p:cTn id="28" fill="hold">
+                    <p:cTn id="31" fill="hold">
                       <p:stCondLst>
                         <p:cond delay="indefinite"/>
                       </p:stCondLst>
                       <p:childTnLst>
                         <p:par>
-                          <p:cTn id="29" fill="hold">
+                          <p:cTn id="32" fill="hold">
                             <p:stCondLst>
                               <p:cond delay="0"/>
                             </p:stCondLst>
                             <p:childTnLst>
                               <p:par>
-                                <p:cTn id="30" presetID="22" presetClass="entr" presetSubtype="4" fill="hold" nodeType="clickEffect">
+                                <p:cTn id="33" presetID="1" presetClass="entr" presetSubtype="0" fill="hold" grpId="0" nodeType="clickEffect">
                                   <p:stCondLst>
                                     <p:cond delay="0"/>
                                   </p:stCondLst>
                                   <p:childTnLst>
                                     <p:set>
                                       <p:cBhvr>
-                                        <p:cTn id="31" dur="1" fill="hold">
+                                        <p:cTn id="34" dur="1" fill="hold">
                                           <p:stCondLst>
                                             <p:cond delay="0"/>
                                           </p:stCondLst>
@@ -39826,7 +39600,7 @@
                                         <p:tgtEl>
                                           <p:spTgt spid="185">
                                             <p:txEl>
-                                              <p:pRg st="5" end="5"/>
+                                              <p:pRg st="10" end="10"/>
                                             </p:txEl>
                                           </p:spTgt>
                                         </p:tgtEl>
@@ -39838,41 +39612,11 @@
                                         <p:strVal val="visible"/>
                                       </p:to>
                                     </p:set>
-                                    <p:animEffect transition="in" filter="wipe(down)">
-                                      <p:cBhvr additive="repl">
-                                        <p:cTn id="32" dur="500"/>
-                                        <p:tgtEl>
-                                          <p:spTgt spid="185">
-                                            <p:txEl>
-                                              <p:pRg st="5" end="5"/>
-                                            </p:txEl>
-                                          </p:spTgt>
-                                        </p:tgtEl>
-                                      </p:cBhvr>
-                                    </p:animEffect>
                                   </p:childTnLst>
                                 </p:cTn>
                               </p:par>
-                            </p:childTnLst>
-                          </p:cTn>
-                        </p:par>
-                      </p:childTnLst>
-                    </p:cTn>
-                  </p:par>
-                  <p:par>
-                    <p:cTn id="33" fill="hold">
-                      <p:stCondLst>
-                        <p:cond delay="indefinite"/>
-                      </p:stCondLst>
-                      <p:childTnLst>
-                        <p:par>
-                          <p:cTn id="34" fill="hold">
-                            <p:stCondLst>
-                              <p:cond delay="0"/>
-                            </p:stCondLst>
-                            <p:childTnLst>
                               <p:par>
-                                <p:cTn id="35" presetID="22" presetClass="entr" presetSubtype="4" fill="hold" nodeType="clickEffect">
+                                <p:cTn id="35" presetID="1" presetClass="entr" presetSubtype="0" fill="hold" grpId="0" nodeType="withEffect">
                                   <p:stCondLst>
                                     <p:cond delay="0"/>
                                   </p:stCondLst>
@@ -39887,7 +39631,7 @@
                                         <p:tgtEl>
                                           <p:spTgt spid="185">
                                             <p:txEl>
-                                              <p:pRg st="6" end="6"/>
+                                              <p:pRg st="11" end="11"/>
                                             </p:txEl>
                                           </p:spTgt>
                                         </p:tgtEl>
@@ -39899,48 +39643,18 @@
                                         <p:strVal val="visible"/>
                                       </p:to>
                                     </p:set>
-                                    <p:animEffect transition="in" filter="wipe(down)">
-                                      <p:cBhvr additive="repl">
-                                        <p:cTn id="37" dur="500"/>
-                                        <p:tgtEl>
-                                          <p:spTgt spid="185">
-                                            <p:txEl>
-                                              <p:pRg st="6" end="6"/>
-                                            </p:txEl>
-                                          </p:spTgt>
-                                        </p:tgtEl>
-                                      </p:cBhvr>
-                                    </p:animEffect>
                                   </p:childTnLst>
                                 </p:cTn>
                               </p:par>
-                            </p:childTnLst>
-                          </p:cTn>
-                        </p:par>
-                      </p:childTnLst>
-                    </p:cTn>
-                  </p:par>
-                  <p:par>
-                    <p:cTn id="38" fill="hold">
-                      <p:stCondLst>
-                        <p:cond delay="indefinite"/>
-                      </p:stCondLst>
-                      <p:childTnLst>
-                        <p:par>
-                          <p:cTn id="39" fill="hold">
-                            <p:stCondLst>
-                              <p:cond delay="0"/>
-                            </p:stCondLst>
-                            <p:childTnLst>
                               <p:par>
-                                <p:cTn id="40" presetID="22" presetClass="entr" presetSubtype="4" fill="hold" nodeType="clickEffect">
+                                <p:cTn id="37" presetID="1" presetClass="entr" presetSubtype="0" fill="hold" grpId="0" nodeType="withEffect">
                                   <p:stCondLst>
                                     <p:cond delay="0"/>
                                   </p:stCondLst>
                                   <p:childTnLst>
                                     <p:set>
                                       <p:cBhvr>
-                                        <p:cTn id="41" dur="1" fill="hold">
+                                        <p:cTn id="38" dur="1" fill="hold">
                                           <p:stCondLst>
                                             <p:cond delay="0"/>
                                           </p:stCondLst>
@@ -39948,7 +39662,7 @@
                                         <p:tgtEl>
                                           <p:spTgt spid="185">
                                             <p:txEl>
-                                              <p:pRg st="7" end="7"/>
+                                              <p:pRg st="12" end="12"/>
                                             </p:txEl>
                                           </p:spTgt>
                                         </p:tgtEl>
@@ -39960,48 +39674,18 @@
                                         <p:strVal val="visible"/>
                                       </p:to>
                                     </p:set>
-                                    <p:animEffect transition="in" filter="wipe(down)">
-                                      <p:cBhvr additive="repl">
-                                        <p:cTn id="42" dur="500"/>
-                                        <p:tgtEl>
-                                          <p:spTgt spid="185">
-                                            <p:txEl>
-                                              <p:pRg st="7" end="7"/>
-                                            </p:txEl>
-                                          </p:spTgt>
-                                        </p:tgtEl>
-                                      </p:cBhvr>
-                                    </p:animEffect>
                                   </p:childTnLst>
                                 </p:cTn>
                               </p:par>
-                            </p:childTnLst>
-                          </p:cTn>
-                        </p:par>
-                      </p:childTnLst>
-                    </p:cTn>
-                  </p:par>
-                  <p:par>
-                    <p:cTn id="43" fill="hold">
-                      <p:stCondLst>
-                        <p:cond delay="indefinite"/>
-                      </p:stCondLst>
-                      <p:childTnLst>
-                        <p:par>
-                          <p:cTn id="44" fill="hold">
-                            <p:stCondLst>
-                              <p:cond delay="0"/>
-                            </p:stCondLst>
-                            <p:childTnLst>
                               <p:par>
-                                <p:cTn id="45" presetID="22" presetClass="entr" presetSubtype="4" fill="hold" nodeType="clickEffect">
+                                <p:cTn id="39" presetID="1" presetClass="entr" presetSubtype="0" fill="hold" grpId="0" nodeType="withEffect">
                                   <p:stCondLst>
                                     <p:cond delay="0"/>
                                   </p:stCondLst>
                                   <p:childTnLst>
                                     <p:set>
                                       <p:cBhvr>
-                                        <p:cTn id="46" dur="1" fill="hold">
+                                        <p:cTn id="40" dur="1" fill="hold">
                                           <p:stCondLst>
                                             <p:cond delay="0"/>
                                           </p:stCondLst>
@@ -40009,7 +39693,7 @@
                                         <p:tgtEl>
                                           <p:spTgt spid="185">
                                             <p:txEl>
-                                              <p:pRg st="8" end="8"/>
+                                              <p:pRg st="13" end="13"/>
                                             </p:txEl>
                                           </p:spTgt>
                                         </p:tgtEl>
@@ -40021,323 +39705,6 @@
                                         <p:strVal val="visible"/>
                                       </p:to>
                                     </p:set>
-                                    <p:animEffect transition="in" filter="wipe(down)">
-                                      <p:cBhvr additive="repl">
-                                        <p:cTn id="47" dur="500"/>
-                                        <p:tgtEl>
-                                          <p:spTgt spid="185">
-                                            <p:txEl>
-                                              <p:pRg st="8" end="8"/>
-                                            </p:txEl>
-                                          </p:spTgt>
-                                        </p:tgtEl>
-                                      </p:cBhvr>
-                                    </p:animEffect>
-                                  </p:childTnLst>
-                                </p:cTn>
-                              </p:par>
-                            </p:childTnLst>
-                          </p:cTn>
-                        </p:par>
-                      </p:childTnLst>
-                    </p:cTn>
-                  </p:par>
-                  <p:par>
-                    <p:cTn id="48" fill="hold">
-                      <p:stCondLst>
-                        <p:cond delay="indefinite"/>
-                      </p:stCondLst>
-                      <p:childTnLst>
-                        <p:par>
-                          <p:cTn id="49" fill="hold">
-                            <p:stCondLst>
-                              <p:cond delay="0"/>
-                            </p:stCondLst>
-                            <p:childTnLst>
-                              <p:par>
-                                <p:cTn id="50" presetID="22" presetClass="entr" presetSubtype="4" fill="hold" nodeType="clickEffect">
-                                  <p:stCondLst>
-                                    <p:cond delay="0"/>
-                                  </p:stCondLst>
-                                  <p:childTnLst>
-                                    <p:set>
-                                      <p:cBhvr>
-                                        <p:cTn id="51" dur="1" fill="hold">
-                                          <p:stCondLst>
-                                            <p:cond delay="0"/>
-                                          </p:stCondLst>
-                                        </p:cTn>
-                                        <p:tgtEl>
-                                          <p:spTgt spid="185">
-                                            <p:txEl>
-                                              <p:pRg st="9" end="9"/>
-                                            </p:txEl>
-                                          </p:spTgt>
-                                        </p:tgtEl>
-                                        <p:attrNameLst>
-                                          <p:attrName>style.visibility</p:attrName>
-                                        </p:attrNameLst>
-                                      </p:cBhvr>
-                                      <p:to>
-                                        <p:strVal val="visible"/>
-                                      </p:to>
-                                    </p:set>
-                                    <p:animEffect transition="in" filter="wipe(down)">
-                                      <p:cBhvr additive="repl">
-                                        <p:cTn id="52" dur="500"/>
-                                        <p:tgtEl>
-                                          <p:spTgt spid="185">
-                                            <p:txEl>
-                                              <p:pRg st="9" end="9"/>
-                                            </p:txEl>
-                                          </p:spTgt>
-                                        </p:tgtEl>
-                                      </p:cBhvr>
-                                    </p:animEffect>
-                                  </p:childTnLst>
-                                </p:cTn>
-                              </p:par>
-                            </p:childTnLst>
-                          </p:cTn>
-                        </p:par>
-                      </p:childTnLst>
-                    </p:cTn>
-                  </p:par>
-                  <p:par>
-                    <p:cTn id="53" fill="hold">
-                      <p:stCondLst>
-                        <p:cond delay="indefinite"/>
-                      </p:stCondLst>
-                      <p:childTnLst>
-                        <p:par>
-                          <p:cTn id="54" fill="hold">
-                            <p:stCondLst>
-                              <p:cond delay="0"/>
-                            </p:stCondLst>
-                            <p:childTnLst>
-                              <p:par>
-                                <p:cTn id="55" presetID="22" presetClass="entr" presetSubtype="4" fill="hold" nodeType="clickEffect">
-                                  <p:stCondLst>
-                                    <p:cond delay="0"/>
-                                  </p:stCondLst>
-                                  <p:childTnLst>
-                                    <p:set>
-                                      <p:cBhvr>
-                                        <p:cTn id="56" dur="1" fill="hold">
-                                          <p:stCondLst>
-                                            <p:cond delay="0"/>
-                                          </p:stCondLst>
-                                        </p:cTn>
-                                        <p:tgtEl>
-                                          <p:spTgt spid="185">
-                                            <p:txEl>
-                                              <p:pRg st="10" end="10"/>
-                                            </p:txEl>
-                                          </p:spTgt>
-                                        </p:tgtEl>
-                                        <p:attrNameLst>
-                                          <p:attrName>style.visibility</p:attrName>
-                                        </p:attrNameLst>
-                                      </p:cBhvr>
-                                      <p:to>
-                                        <p:strVal val="visible"/>
-                                      </p:to>
-                                    </p:set>
-                                    <p:animEffect transition="in" filter="wipe(down)">
-                                      <p:cBhvr additive="repl">
-                                        <p:cTn id="57" dur="500"/>
-                                        <p:tgtEl>
-                                          <p:spTgt spid="185">
-                                            <p:txEl>
-                                              <p:pRg st="10" end="10"/>
-                                            </p:txEl>
-                                          </p:spTgt>
-                                        </p:tgtEl>
-                                      </p:cBhvr>
-                                    </p:animEffect>
-                                  </p:childTnLst>
-                                </p:cTn>
-                              </p:par>
-                            </p:childTnLst>
-                          </p:cTn>
-                        </p:par>
-                      </p:childTnLst>
-                    </p:cTn>
-                  </p:par>
-                  <p:par>
-                    <p:cTn id="58" fill="hold">
-                      <p:stCondLst>
-                        <p:cond delay="indefinite"/>
-                      </p:stCondLst>
-                      <p:childTnLst>
-                        <p:par>
-                          <p:cTn id="59" fill="hold">
-                            <p:stCondLst>
-                              <p:cond delay="0"/>
-                            </p:stCondLst>
-                            <p:childTnLst>
-                              <p:par>
-                                <p:cTn id="60" presetID="22" presetClass="entr" presetSubtype="4" fill="hold" nodeType="clickEffect">
-                                  <p:stCondLst>
-                                    <p:cond delay="0"/>
-                                  </p:stCondLst>
-                                  <p:childTnLst>
-                                    <p:set>
-                                      <p:cBhvr>
-                                        <p:cTn id="61" dur="1" fill="hold">
-                                          <p:stCondLst>
-                                            <p:cond delay="0"/>
-                                          </p:stCondLst>
-                                        </p:cTn>
-                                        <p:tgtEl>
-                                          <p:spTgt spid="185">
-                                            <p:txEl>
-                                              <p:pRg st="11" end="11"/>
-                                            </p:txEl>
-                                          </p:spTgt>
-                                        </p:tgtEl>
-                                        <p:attrNameLst>
-                                          <p:attrName>style.visibility</p:attrName>
-                                        </p:attrNameLst>
-                                      </p:cBhvr>
-                                      <p:to>
-                                        <p:strVal val="visible"/>
-                                      </p:to>
-                                    </p:set>
-                                    <p:animEffect transition="in" filter="wipe(down)">
-                                      <p:cBhvr additive="repl">
-                                        <p:cTn id="62" dur="500"/>
-                                        <p:tgtEl>
-                                          <p:spTgt spid="185">
-                                            <p:txEl>
-                                              <p:pRg st="11" end="11"/>
-                                            </p:txEl>
-                                          </p:spTgt>
-                                        </p:tgtEl>
-                                      </p:cBhvr>
-                                    </p:animEffect>
-                                  </p:childTnLst>
-                                </p:cTn>
-                              </p:par>
-                            </p:childTnLst>
-                          </p:cTn>
-                        </p:par>
-                      </p:childTnLst>
-                    </p:cTn>
-                  </p:par>
-                  <p:par>
-                    <p:cTn id="63" fill="hold">
-                      <p:stCondLst>
-                        <p:cond delay="indefinite"/>
-                      </p:stCondLst>
-                      <p:childTnLst>
-                        <p:par>
-                          <p:cTn id="64" fill="hold">
-                            <p:stCondLst>
-                              <p:cond delay="0"/>
-                            </p:stCondLst>
-                            <p:childTnLst>
-                              <p:par>
-                                <p:cTn id="65" presetID="22" presetClass="entr" presetSubtype="4" fill="hold" nodeType="clickEffect">
-                                  <p:stCondLst>
-                                    <p:cond delay="0"/>
-                                  </p:stCondLst>
-                                  <p:childTnLst>
-                                    <p:set>
-                                      <p:cBhvr>
-                                        <p:cTn id="66" dur="1" fill="hold">
-                                          <p:stCondLst>
-                                            <p:cond delay="0"/>
-                                          </p:stCondLst>
-                                        </p:cTn>
-                                        <p:tgtEl>
-                                          <p:spTgt spid="185">
-                                            <p:txEl>
-                                              <p:pRg st="12" end="12"/>
-                                            </p:txEl>
-                                          </p:spTgt>
-                                        </p:tgtEl>
-                                        <p:attrNameLst>
-                                          <p:attrName>style.visibility</p:attrName>
-                                        </p:attrNameLst>
-                                      </p:cBhvr>
-                                      <p:to>
-                                        <p:strVal val="visible"/>
-                                      </p:to>
-                                    </p:set>
-                                    <p:animEffect transition="in" filter="wipe(down)">
-                                      <p:cBhvr additive="repl">
-                                        <p:cTn id="67" dur="500"/>
-                                        <p:tgtEl>
-                                          <p:spTgt spid="185">
-                                            <p:txEl>
-                                              <p:pRg st="12" end="12"/>
-                                            </p:txEl>
-                                          </p:spTgt>
-                                        </p:tgtEl>
-                                      </p:cBhvr>
-                                    </p:animEffect>
-                                  </p:childTnLst>
-                                </p:cTn>
-                              </p:par>
-                            </p:childTnLst>
-                          </p:cTn>
-                        </p:par>
-                      </p:childTnLst>
-                    </p:cTn>
-                  </p:par>
-                  <p:par>
-                    <p:cTn id="68" fill="hold">
-                      <p:stCondLst>
-                        <p:cond delay="indefinite"/>
-                      </p:stCondLst>
-                      <p:childTnLst>
-                        <p:par>
-                          <p:cTn id="69" fill="hold">
-                            <p:stCondLst>
-                              <p:cond delay="0"/>
-                            </p:stCondLst>
-                            <p:childTnLst>
-                              <p:par>
-                                <p:cTn id="70" presetID="22" presetClass="entr" presetSubtype="4" fill="hold" nodeType="clickEffect">
-                                  <p:stCondLst>
-                                    <p:cond delay="0"/>
-                                  </p:stCondLst>
-                                  <p:childTnLst>
-                                    <p:set>
-                                      <p:cBhvr>
-                                        <p:cTn id="71" dur="1" fill="hold">
-                                          <p:stCondLst>
-                                            <p:cond delay="0"/>
-                                          </p:stCondLst>
-                                        </p:cTn>
-                                        <p:tgtEl>
-                                          <p:spTgt spid="185">
-                                            <p:txEl>
-                                              <p:pRg st="13" end="13"/>
-                                            </p:txEl>
-                                          </p:spTgt>
-                                        </p:tgtEl>
-                                        <p:attrNameLst>
-                                          <p:attrName>style.visibility</p:attrName>
-                                        </p:attrNameLst>
-                                      </p:cBhvr>
-                                      <p:to>
-                                        <p:strVal val="visible"/>
-                                      </p:to>
-                                    </p:set>
-                                    <p:animEffect transition="in" filter="wipe(down)">
-                                      <p:cBhvr additive="repl">
-                                        <p:cTn id="72" dur="500"/>
-                                        <p:tgtEl>
-                                          <p:spTgt spid="185">
-                                            <p:txEl>
-                                              <p:pRg st="13" end="13"/>
-                                            </p:txEl>
-                                          </p:spTgt>
-                                        </p:tgtEl>
-                                      </p:cBhvr>
-                                    </p:animEffect>
                                   </p:childTnLst>
                                 </p:cTn>
                               </p:par>
@@ -40368,6 +39735,9 @@
         </p:cTn>
       </p:par>
     </p:tnLst>
+    <p:bldLst>
+      <p:bldP spid="185" grpId="0" build="p"/>
+    </p:bldLst>
   </p:timing>
 </p:sld>
 </file>
@@ -40497,7 +39867,7 @@
                 </a:solidFill>
                 <a:latin typeface="Calibri"/>
               </a:rPr>
-              <a:t>Dr. Daniel Ruffinelli - FSS 2025</a:t>
+              <a:t>Dr. Daniel Ruffinelli - FSS 2026</a:t>
             </a:r>
             <a:endParaRPr lang="en-US" sz="1200" b="0" strike="noStrike" spc="-1">
               <a:latin typeface="Times New Roman"/>
@@ -41117,7 +40487,7 @@
                 </a:solidFill>
                 <a:latin typeface="Calibri"/>
               </a:rPr>
-              <a:t>Dr. Daniel Ruffinelli - FSS 2025</a:t>
+              <a:t>Dr. Daniel Ruffinelli - FSS 2026</a:t>
             </a:r>
             <a:endParaRPr lang="en-US" sz="1200" b="0" strike="noStrike" spc="-1">
               <a:latin typeface="Times New Roman"/>
@@ -41422,7 +40792,7 @@
                 </a:solidFill>
                 <a:latin typeface="Calibri"/>
               </a:rPr>
-              <a:t>Dr. Daniel Ruffinelli - FSS 2025</a:t>
+              <a:t>Dr. Daniel Ruffinelli - FSS 2026</a:t>
             </a:r>
             <a:endParaRPr lang="en-US" sz="1200" b="0" strike="noStrike" spc="-1">
               <a:latin typeface="Times New Roman"/>
@@ -42389,7 +41759,7 @@
                 </a:solidFill>
                 <a:latin typeface="Calibri"/>
               </a:rPr>
-              <a:t>Dr. Daniel Ruffinelli - FSS 2025</a:t>
+              <a:t>Dr. Daniel Ruffinelli - FSS 2026</a:t>
             </a:r>
             <a:endParaRPr lang="en-US" sz="1200" b="0" strike="noStrike" spc="-1">
               <a:latin typeface="Times New Roman"/>
@@ -43573,7 +42943,7 @@
                 </a:solidFill>
                 <a:latin typeface="Calibri"/>
               </a:rPr>
-              <a:t>Dr. Daniel Ruffinelli - FSS 2025</a:t>
+              <a:t>Dr. Daniel Ruffinelli - FSS 2026</a:t>
             </a:r>
             <a:endParaRPr lang="en-US" sz="1200" b="0" strike="noStrike" spc="-1">
               <a:latin typeface="Times New Roman"/>
@@ -44343,15 +43713,33 @@
                                   </p:childTnLst>
                                 </p:cTn>
                               </p:par>
+                            </p:childTnLst>
+                          </p:cTn>
+                        </p:par>
+                      </p:childTnLst>
+                    </p:cTn>
+                  </p:par>
+                  <p:par>
+                    <p:cTn id="11" fill="hold">
+                      <p:stCondLst>
+                        <p:cond delay="indefinite"/>
+                      </p:stCondLst>
+                      <p:childTnLst>
+                        <p:par>
+                          <p:cTn id="12" fill="hold">
+                            <p:stCondLst>
+                              <p:cond delay="0"/>
+                            </p:stCondLst>
+                            <p:childTnLst>
                               <p:par>
-                                <p:cTn id="11" presetID="22" presetClass="entr" presetSubtype="4" fill="hold" nodeType="withEffect">
+                                <p:cTn id="13" presetID="22" presetClass="entr" presetSubtype="4" fill="hold" nodeType="clickEffect">
                                   <p:stCondLst>
                                     <p:cond delay="0"/>
                                   </p:stCondLst>
                                   <p:childTnLst>
                                     <p:set>
                                       <p:cBhvr>
-                                        <p:cTn id="12" dur="1" fill="hold">
+                                        <p:cTn id="14" dur="1" fill="hold">
                                           <p:stCondLst>
                                             <p:cond delay="0"/>
                                           </p:stCondLst>
@@ -44373,7 +43761,7 @@
                                     </p:set>
                                     <p:animEffect transition="in" filter="wipe(down)">
                                       <p:cBhvr additive="repl">
-                                        <p:cTn id="13" dur="500"/>
+                                        <p:cTn id="15" dur="500"/>
                                         <p:tgtEl>
                                           <p:spTgt spid="106">
                                             <p:txEl>
@@ -44387,14 +43775,14 @@
                                 </p:cTn>
                               </p:par>
                               <p:par>
-                                <p:cTn id="14" presetID="3" presetClass="entr" presetSubtype="10" fill="hold" nodeType="withEffect">
+                                <p:cTn id="16" presetID="3" presetClass="entr" presetSubtype="10" fill="hold" nodeType="withEffect">
                                   <p:stCondLst>
                                     <p:cond delay="0"/>
                                   </p:stCondLst>
                                   <p:childTnLst>
                                     <p:set>
                                       <p:cBhvr>
-                                        <p:cTn id="15" dur="1" fill="hold">
+                                        <p:cTn id="17" dur="1" fill="hold">
                                           <p:stCondLst>
                                             <p:cond delay="0"/>
                                           </p:stCondLst>
@@ -44412,7 +43800,7 @@
                                     </p:set>
                                     <p:animEffect transition="in" filter="blinds(horizontal)">
                                       <p:cBhvr additive="repl">
-                                        <p:cTn id="16" dur="500"/>
+                                        <p:cTn id="18" dur="500"/>
                                         <p:tgtEl>
                                           <p:spTgt spid="107"/>
                                         </p:tgtEl>
@@ -44422,14 +43810,14 @@
                                 </p:cTn>
                               </p:par>
                               <p:par>
-                                <p:cTn id="17" presetID="22" presetClass="entr" presetSubtype="4" fill="hold" nodeType="withEffect">
+                                <p:cTn id="19" presetID="22" presetClass="entr" presetSubtype="4" fill="hold" nodeType="withEffect">
                                   <p:stCondLst>
                                     <p:cond delay="0"/>
                                   </p:stCondLst>
                                   <p:childTnLst>
                                     <p:set>
                                       <p:cBhvr>
-                                        <p:cTn id="18" dur="1" fill="hold">
+                                        <p:cTn id="20" dur="1" fill="hold">
                                           <p:stCondLst>
                                             <p:cond delay="0"/>
                                           </p:stCondLst>
@@ -44451,7 +43839,7 @@
                                     </p:set>
                                     <p:animEffect transition="in" filter="wipe(down)">
                                       <p:cBhvr additive="repl">
-                                        <p:cTn id="19" dur="500"/>
+                                        <p:cTn id="21" dur="500"/>
                                         <p:tgtEl>
                                           <p:spTgt spid="106">
                                             <p:txEl>
@@ -44465,14 +43853,14 @@
                                 </p:cTn>
                               </p:par>
                               <p:par>
-                                <p:cTn id="20" presetID="22" presetClass="entr" presetSubtype="4" fill="hold" nodeType="withEffect">
+                                <p:cTn id="22" presetID="22" presetClass="entr" presetSubtype="4" fill="hold" nodeType="withEffect">
                                   <p:stCondLst>
                                     <p:cond delay="0"/>
                                   </p:stCondLst>
                                   <p:childTnLst>
                                     <p:set>
                                       <p:cBhvr>
-                                        <p:cTn id="21" dur="1" fill="hold">
+                                        <p:cTn id="23" dur="1" fill="hold">
                                           <p:stCondLst>
                                             <p:cond delay="0"/>
                                           </p:stCondLst>
@@ -44494,7 +43882,7 @@
                                     </p:set>
                                     <p:animEffect transition="in" filter="wipe(down)">
                                       <p:cBhvr additive="repl">
-                                        <p:cTn id="22" dur="500"/>
+                                        <p:cTn id="24" dur="500"/>
                                         <p:tgtEl>
                                           <p:spTgt spid="106">
                                             <p:txEl>
@@ -44663,7 +44051,7 @@
                 </a:solidFill>
                 <a:latin typeface="Calibri"/>
               </a:rPr>
-              <a:t>Dr. Daniel Ruffinelli - FSS 2025</a:t>
+              <a:t>Dr. Daniel Ruffinelli - FSS 2026</a:t>
             </a:r>
             <a:endParaRPr lang="en-US" sz="1200" b="0" strike="noStrike" spc="-1">
               <a:latin typeface="Times New Roman"/>
@@ -45808,7 +45196,7 @@
                 </a:solidFill>
                 <a:latin typeface="Calibri"/>
               </a:rPr>
-              <a:t>Dr. Daniel Ruffinelli - FSS 2025</a:t>
+              <a:t>Dr. Daniel Ruffinelli - FSS 2026</a:t>
             </a:r>
             <a:endParaRPr lang="en-US" sz="1200" b="0" strike="noStrike" spc="-1">
               <a:latin typeface="Times New Roman"/>

--- a/lectures/04_transformers/04_transformers.pptx
+++ b/lectures/04_transformers/04_transformers.pptx
@@ -149,6 +149,7 @@
 <p1510:revInfo xmlns:a="http://schemas.openxmlformats.org/drawingml/2006/main" xmlns:r="http://schemas.openxmlformats.org/officeDocument/2006/relationships" xmlns:p1510="http://schemas.microsoft.com/office/powerpoint/2015/10/main">
   <p1510:revLst>
     <p1510:client id="{6C8DA7BB-0332-C63C-1C36-53EAD1AC1A2B}" v="502" dt="2026-03-24T10:44:07.965"/>
+    <p1510:client id="{D6445606-36CA-19D6-725A-DB6944A1130B}" v="102" dt="2026-03-24T11:20:34.594"/>
   </p1510:revLst>
 </p1510:revInfo>
 </file>
@@ -39987,6 +39988,121 @@
               <a:t>      parts of transformer block</a:t>
             </a:r>
           </a:p>
+          <a:p>
+            <a:pPr marL="399415" indent="-342900">
+              <a:lnSpc>
+                <a:spcPct val="100000"/>
+              </a:lnSpc>
+              <a:spcBef>
+                <a:spcPts val="400"/>
+              </a:spcBef>
+            </a:pPr>
+            <a:r>
+              <a:rPr lang="en-US" sz="2000" b="1" spc="-1">
+                <a:solidFill>
+                  <a:srgbClr val="003056"/>
+                </a:solidFill>
+                <a:latin typeface="Calibri"/>
+              </a:rPr>
+              <a:t>All parallelizable!</a:t>
+            </a:r>
+            <a:r>
+              <a:rPr lang="en-US" sz="2000" spc="-1" dirty="0">
+                <a:solidFill>
+                  <a:srgbClr val="003056"/>
+                </a:solidFill>
+                <a:latin typeface="Calibri"/>
+              </a:rPr>
+              <a:t> Each</a:t>
+            </a:r>
+          </a:p>
+          <a:p>
+            <a:pPr marL="56515" indent="0">
+              <a:lnSpc>
+                <a:spcPct val="100000"/>
+              </a:lnSpc>
+              <a:spcBef>
+                <a:spcPts val="400"/>
+              </a:spcBef>
+              <a:buNone/>
+            </a:pPr>
+            <a:r>
+              <a:rPr lang="en-US" sz="2000" spc="-1">
+                <a:solidFill>
+                  <a:srgbClr val="003056"/>
+                </a:solidFill>
+                <a:latin typeface="Calibri"/>
+              </a:rPr>
+              <a:t>      contextualized vector in </a:t>
+            </a:r>
+            <a:endParaRPr lang="en-US" sz="2000" spc="-1" dirty="0">
+              <a:solidFill>
+                <a:srgbClr val="003056"/>
+              </a:solidFill>
+              <a:latin typeface="Calibri"/>
+            </a:endParaRPr>
+          </a:p>
+          <a:p>
+            <a:pPr marL="56515" indent="0">
+              <a:lnSpc>
+                <a:spcPct val="100000"/>
+              </a:lnSpc>
+              <a:spcBef>
+                <a:spcPts val="400"/>
+              </a:spcBef>
+              <a:buNone/>
+            </a:pPr>
+            <a:r>
+              <a:rPr lang="en-US" sz="2000" spc="-1">
+                <a:solidFill>
+                  <a:srgbClr val="003056"/>
+                </a:solidFill>
+                <a:latin typeface="Calibri"/>
+              </a:rPr>
+              <a:t>      attention is independent, </a:t>
+            </a:r>
+          </a:p>
+          <a:p>
+            <a:pPr marL="56515" indent="0">
+              <a:lnSpc>
+                <a:spcPct val="100000"/>
+              </a:lnSpc>
+              <a:spcBef>
+                <a:spcPts val="400"/>
+              </a:spcBef>
+              <a:buNone/>
+            </a:pPr>
+            <a:r>
+              <a:rPr lang="en-US" sz="2000" spc="-1">
+                <a:solidFill>
+                  <a:srgbClr val="003056"/>
+                </a:solidFill>
+                <a:latin typeface="Calibri"/>
+              </a:rPr>
+              <a:t>      each matrix product in </a:t>
+            </a:r>
+          </a:p>
+          <a:p>
+            <a:pPr marL="56515" indent="0">
+              <a:lnSpc>
+                <a:spcPct val="100000"/>
+              </a:lnSpc>
+              <a:spcBef>
+                <a:spcPts val="400"/>
+              </a:spcBef>
+              <a:buNone/>
+            </a:pPr>
+            <a:r>
+              <a:rPr lang="en-US" sz="2000" spc="-1">
+                <a:solidFill>
+                  <a:srgbClr val="003056"/>
+                </a:solidFill>
+                <a:latin typeface="Calibri"/>
+              </a:rPr>
+              <a:t>      MLP is parallelizable</a:t>
+            </a:r>
+            <a:endParaRPr lang="en-US"/>
+          </a:p>
         </p:txBody>
       </p:sp>
       <p:sp>
@@ -40408,6 +40524,251 @@
                                           <p:spTgt spid="178">
                                             <p:txEl>
                                               <p:pRg st="8" end="8"/>
+                                            </p:txEl>
+                                          </p:spTgt>
+                                        </p:tgtEl>
+                                        <p:attrNameLst>
+                                          <p:attrName>style.visibility</p:attrName>
+                                        </p:attrNameLst>
+                                      </p:cBhvr>
+                                      <p:to>
+                                        <p:strVal val="visible"/>
+                                      </p:to>
+                                    </p:set>
+                                  </p:childTnLst>
+                                </p:cTn>
+                              </p:par>
+                            </p:childTnLst>
+                          </p:cTn>
+                        </p:par>
+                      </p:childTnLst>
+                    </p:cTn>
+                  </p:par>
+                  <p:par>
+                    <p:cTn id="29" fill="hold">
+                      <p:stCondLst>
+                        <p:cond delay="indefinite"/>
+                      </p:stCondLst>
+                      <p:childTnLst>
+                        <p:par>
+                          <p:cTn id="30" fill="hold">
+                            <p:stCondLst>
+                              <p:cond delay="0"/>
+                            </p:stCondLst>
+                            <p:childTnLst>
+                              <p:par>
+                                <p:cTn id="31" presetID="1" presetClass="entr" presetSubtype="0" fill="hold" grpId="0" nodeType="clickEffect">
+                                  <p:stCondLst>
+                                    <p:cond delay="0"/>
+                                  </p:stCondLst>
+                                  <p:childTnLst>
+                                    <p:set>
+                                      <p:cBhvr>
+                                        <p:cTn id="32" dur="1" fill="hold">
+                                          <p:stCondLst>
+                                            <p:cond delay="0"/>
+                                          </p:stCondLst>
+                                        </p:cTn>
+                                        <p:tgtEl>
+                                          <p:spTgt spid="178">
+                                            <p:txEl>
+                                              <p:pRg st="9" end="9"/>
+                                            </p:txEl>
+                                          </p:spTgt>
+                                        </p:tgtEl>
+                                        <p:attrNameLst>
+                                          <p:attrName>style.visibility</p:attrName>
+                                        </p:attrNameLst>
+                                      </p:cBhvr>
+                                      <p:to>
+                                        <p:strVal val="visible"/>
+                                      </p:to>
+                                    </p:set>
+                                  </p:childTnLst>
+                                </p:cTn>
+                              </p:par>
+                            </p:childTnLst>
+                          </p:cTn>
+                        </p:par>
+                      </p:childTnLst>
+                    </p:cTn>
+                  </p:par>
+                  <p:par>
+                    <p:cTn id="33" fill="hold">
+                      <p:stCondLst>
+                        <p:cond delay="indefinite"/>
+                      </p:stCondLst>
+                      <p:childTnLst>
+                        <p:par>
+                          <p:cTn id="34" fill="hold">
+                            <p:stCondLst>
+                              <p:cond delay="0"/>
+                            </p:stCondLst>
+                            <p:childTnLst>
+                              <p:par>
+                                <p:cTn id="35" presetID="1" presetClass="entr" presetSubtype="0" fill="hold" grpId="0" nodeType="clickEffect">
+                                  <p:stCondLst>
+                                    <p:cond delay="0"/>
+                                  </p:stCondLst>
+                                  <p:childTnLst>
+                                    <p:set>
+                                      <p:cBhvr>
+                                        <p:cTn id="36" dur="1" fill="hold">
+                                          <p:stCondLst>
+                                            <p:cond delay="0"/>
+                                          </p:stCondLst>
+                                        </p:cTn>
+                                        <p:tgtEl>
+                                          <p:spTgt spid="178">
+                                            <p:txEl>
+                                              <p:pRg st="10" end="10"/>
+                                            </p:txEl>
+                                          </p:spTgt>
+                                        </p:tgtEl>
+                                        <p:attrNameLst>
+                                          <p:attrName>style.visibility</p:attrName>
+                                        </p:attrNameLst>
+                                      </p:cBhvr>
+                                      <p:to>
+                                        <p:strVal val="visible"/>
+                                      </p:to>
+                                    </p:set>
+                                  </p:childTnLst>
+                                </p:cTn>
+                              </p:par>
+                            </p:childTnLst>
+                          </p:cTn>
+                        </p:par>
+                      </p:childTnLst>
+                    </p:cTn>
+                  </p:par>
+                  <p:par>
+                    <p:cTn id="37" fill="hold">
+                      <p:stCondLst>
+                        <p:cond delay="indefinite"/>
+                      </p:stCondLst>
+                      <p:childTnLst>
+                        <p:par>
+                          <p:cTn id="38" fill="hold">
+                            <p:stCondLst>
+                              <p:cond delay="0"/>
+                            </p:stCondLst>
+                            <p:childTnLst>
+                              <p:par>
+                                <p:cTn id="39" presetID="1" presetClass="entr" presetSubtype="0" fill="hold" grpId="0" nodeType="clickEffect">
+                                  <p:stCondLst>
+                                    <p:cond delay="0"/>
+                                  </p:stCondLst>
+                                  <p:childTnLst>
+                                    <p:set>
+                                      <p:cBhvr>
+                                        <p:cTn id="40" dur="1" fill="hold">
+                                          <p:stCondLst>
+                                            <p:cond delay="0"/>
+                                          </p:stCondLst>
+                                        </p:cTn>
+                                        <p:tgtEl>
+                                          <p:spTgt spid="178">
+                                            <p:txEl>
+                                              <p:pRg st="11" end="11"/>
+                                            </p:txEl>
+                                          </p:spTgt>
+                                        </p:tgtEl>
+                                        <p:attrNameLst>
+                                          <p:attrName>style.visibility</p:attrName>
+                                        </p:attrNameLst>
+                                      </p:cBhvr>
+                                      <p:to>
+                                        <p:strVal val="visible"/>
+                                      </p:to>
+                                    </p:set>
+                                  </p:childTnLst>
+                                </p:cTn>
+                              </p:par>
+                            </p:childTnLst>
+                          </p:cTn>
+                        </p:par>
+                      </p:childTnLst>
+                    </p:cTn>
+                  </p:par>
+                  <p:par>
+                    <p:cTn id="41" fill="hold">
+                      <p:stCondLst>
+                        <p:cond delay="indefinite"/>
+                      </p:stCondLst>
+                      <p:childTnLst>
+                        <p:par>
+                          <p:cTn id="42" fill="hold">
+                            <p:stCondLst>
+                              <p:cond delay="0"/>
+                            </p:stCondLst>
+                            <p:childTnLst>
+                              <p:par>
+                                <p:cTn id="43" presetID="1" presetClass="entr" presetSubtype="0" fill="hold" grpId="0" nodeType="clickEffect">
+                                  <p:stCondLst>
+                                    <p:cond delay="0"/>
+                                  </p:stCondLst>
+                                  <p:childTnLst>
+                                    <p:set>
+                                      <p:cBhvr>
+                                        <p:cTn id="44" dur="1" fill="hold">
+                                          <p:stCondLst>
+                                            <p:cond delay="0"/>
+                                          </p:stCondLst>
+                                        </p:cTn>
+                                        <p:tgtEl>
+                                          <p:spTgt spid="178">
+                                            <p:txEl>
+                                              <p:pRg st="12" end="12"/>
+                                            </p:txEl>
+                                          </p:spTgt>
+                                        </p:tgtEl>
+                                        <p:attrNameLst>
+                                          <p:attrName>style.visibility</p:attrName>
+                                        </p:attrNameLst>
+                                      </p:cBhvr>
+                                      <p:to>
+                                        <p:strVal val="visible"/>
+                                      </p:to>
+                                    </p:set>
+                                  </p:childTnLst>
+                                </p:cTn>
+                              </p:par>
+                            </p:childTnLst>
+                          </p:cTn>
+                        </p:par>
+                      </p:childTnLst>
+                    </p:cTn>
+                  </p:par>
+                  <p:par>
+                    <p:cTn id="45" fill="hold">
+                      <p:stCondLst>
+                        <p:cond delay="indefinite"/>
+                      </p:stCondLst>
+                      <p:childTnLst>
+                        <p:par>
+                          <p:cTn id="46" fill="hold">
+                            <p:stCondLst>
+                              <p:cond delay="0"/>
+                            </p:stCondLst>
+                            <p:childTnLst>
+                              <p:par>
+                                <p:cTn id="47" presetID="1" presetClass="entr" presetSubtype="0" fill="hold" grpId="0" nodeType="clickEffect">
+                                  <p:stCondLst>
+                                    <p:cond delay="0"/>
+                                  </p:stCondLst>
+                                  <p:childTnLst>
+                                    <p:set>
+                                      <p:cBhvr>
+                                        <p:cTn id="48" dur="1" fill="hold">
+                                          <p:stCondLst>
+                                            <p:cond delay="0"/>
+                                          </p:stCondLst>
+                                        </p:cTn>
+                                        <p:tgtEl>
+                                          <p:spTgt spid="178">
+                                            <p:txEl>
+                                              <p:pRg st="13" end="13"/>
                                             </p:txEl>
                                           </p:spTgt>
                                         </p:tgtEl>

--- a/lectures/04_transformers/04_transformers.pptx
+++ b/lectures/04_transformers/04_transformers.pptx
@@ -150,6 +150,7 @@
   <p1510:revLst>
     <p1510:client id="{6C8DA7BB-0332-C63C-1C36-53EAD1AC1A2B}" v="502" dt="2026-03-24T10:44:07.965"/>
     <p1510:client id="{D6445606-36CA-19D6-725A-DB6944A1130B}" v="102" dt="2026-03-24T11:20:34.594"/>
+    <p1510:client id="{F67611A0-4684-112F-212A-37799F88C10B}" v="144" dt="2026-03-26T09:12:33.048"/>
   </p1510:revLst>
 </p1510:revInfo>
 </file>
@@ -39755,9 +39756,27 @@
                 </a:solidFill>
                 <a:latin typeface="Calibri"/>
               </a:rPr>
-              <a:t>Otherwise known as a </a:t>
-            </a:r>
-            <a:endParaRPr lang="en-US">
+              <a:t>A.k.a.</a:t>
+            </a:r>
+            <a:r>
+              <a:rPr lang="en-US" sz="2000" spc="-1" dirty="0">
+                <a:solidFill>
+                  <a:srgbClr val="003056"/>
+                </a:solidFill>
+                <a:latin typeface="Calibri"/>
+              </a:rPr>
+              <a:t> </a:t>
+            </a:r>
+            <a:r>
+              <a:rPr lang="en-US" sz="2000" b="1" spc="-1">
+                <a:solidFill>
+                  <a:srgbClr val="003056"/>
+                </a:solidFill>
+                <a:latin typeface="Calibri"/>
+              </a:rPr>
+              <a:t>transformer layer</a:t>
+            </a:r>
+            <a:endParaRPr lang="en-US" dirty="0">
               <a:solidFill>
                 <a:srgbClr val="000000"/>
               </a:solidFill>
@@ -39765,7 +39784,7 @@
             </a:endParaRPr>
           </a:p>
           <a:p>
-            <a:pPr marL="56515" indent="0">
+            <a:pPr marL="913765" lvl="1" indent="-285750">
               <a:lnSpc>
                 <a:spcPct val="100000"/>
               </a:lnSpc>
@@ -39775,26 +39794,97 @@
               <a:buClr>
                 <a:srgbClr val="003056"/>
               </a:buClr>
+            </a:pPr>
+            <a:r>
+              <a:rPr lang="en-US" sz="1800" b="1" spc="-1">
+                <a:solidFill>
+                  <a:srgbClr val="003056"/>
+                </a:solidFill>
+                <a:latin typeface="Calibri"/>
+              </a:rPr>
+              <a:t>In: </a:t>
+            </a:r>
+            <a:r>
+              <a:rPr lang="en-US" sz="1800" spc="-1">
+                <a:solidFill>
+                  <a:srgbClr val="003056"/>
+                </a:solidFill>
+                <a:latin typeface="Calibri"/>
+              </a:rPr>
+              <a:t>sequence of tokens</a:t>
+            </a:r>
+            <a:endParaRPr lang="en-US" sz="1800" b="1" spc="-1" dirty="0">
+              <a:solidFill>
+                <a:srgbClr val="003056"/>
+              </a:solidFill>
+              <a:latin typeface="Calibri"/>
+            </a:endParaRPr>
+          </a:p>
+          <a:p>
+            <a:pPr marL="913765" lvl="1" indent="-285750">
+              <a:lnSpc>
+                <a:spcPct val="100000"/>
+              </a:lnSpc>
+              <a:spcBef>
+                <a:spcPts val="400"/>
+              </a:spcBef>
+              <a:buClr>
+                <a:srgbClr val="003056"/>
+              </a:buClr>
+            </a:pPr>
+            <a:r>
+              <a:rPr lang="en-US" sz="1800" b="1" spc="-1">
+                <a:solidFill>
+                  <a:srgbClr val="003056"/>
+                </a:solidFill>
+                <a:latin typeface="Calibri"/>
+              </a:rPr>
+              <a:t>Out:</a:t>
+            </a:r>
+            <a:r>
+              <a:rPr lang="en-US" sz="1800" spc="-1">
+                <a:solidFill>
+                  <a:srgbClr val="003056"/>
+                </a:solidFill>
+                <a:latin typeface="Calibri"/>
+              </a:rPr>
+              <a:t> sequence of</a:t>
+            </a:r>
+            <a:endParaRPr lang="en-US" sz="1800" spc="-1" dirty="0">
+              <a:solidFill>
+                <a:srgbClr val="003056"/>
+              </a:solidFill>
+              <a:latin typeface="Calibri"/>
+            </a:endParaRPr>
+          </a:p>
+          <a:p>
+            <a:pPr marL="628015" lvl="1" indent="0">
+              <a:lnSpc>
+                <a:spcPct val="100000"/>
+              </a:lnSpc>
+              <a:spcBef>
+                <a:spcPts val="400"/>
+              </a:spcBef>
+              <a:buClr>
+                <a:srgbClr val="003056"/>
+              </a:buClr>
               <a:buNone/>
             </a:pPr>
             <a:r>
-              <a:rPr lang="en-US" sz="2000" spc="-1" dirty="0">
-                <a:solidFill>
-                  <a:srgbClr val="003056"/>
-                </a:solidFill>
-                <a:latin typeface="Calibri"/>
-              </a:rPr>
-              <a:t>      </a:t>
-            </a:r>
-            <a:r>
-              <a:rPr lang="en-US" sz="2000" b="1" spc="-1">
-                <a:solidFill>
-                  <a:srgbClr val="003056"/>
-                </a:solidFill>
-                <a:latin typeface="Calibri"/>
-              </a:rPr>
-              <a:t>transformer layer</a:t>
-            </a:r>
+              <a:rPr lang="en-US" sz="1800" spc="-1">
+                <a:solidFill>
+                  <a:srgbClr val="003056"/>
+                </a:solidFill>
+                <a:latin typeface="Calibri"/>
+              </a:rPr>
+              <a:t>      contextualized tokens</a:t>
+            </a:r>
+            <a:endParaRPr lang="en-US" sz="1800" spc="-1" dirty="0">
+              <a:solidFill>
+                <a:srgbClr val="003056"/>
+              </a:solidFill>
+              <a:latin typeface="Calibri"/>
+            </a:endParaRPr>
           </a:p>
           <a:p>
             <a:pPr marL="399415" indent="-342900">
@@ -39901,14 +39991,8 @@
                 </a:solidFill>
                 <a:latin typeface="Calibri"/>
               </a:rPr>
-              <a:t>      original used after each </a:t>
-            </a:r>
-            <a:endParaRPr lang="en-US" sz="2000" spc="-1" dirty="0">
-              <a:solidFill>
-                <a:srgbClr val="003056"/>
-              </a:solidFill>
-              <a:latin typeface="Calibri"/>
-            </a:endParaRPr>
+              <a:t>      different models use them</a:t>
+            </a:r>
           </a:p>
           <a:p>
             <a:pPr marL="56515" indent="0">
@@ -39927,65 +40011,7 @@
                 </a:solidFill>
                 <a:latin typeface="Calibri"/>
               </a:rPr>
-              <a:t>      component</a:t>
-            </a:r>
-            <a:r>
-              <a:rPr lang="en-US" sz="2000" spc="-1">
-                <a:solidFill>
-                  <a:srgbClr val="003056"/>
-                </a:solidFill>
-                <a:latin typeface="Calibri"/>
-              </a:rPr>
-              <a:t>, later models</a:t>
-            </a:r>
-          </a:p>
-          <a:p>
-            <a:pPr marL="56515" indent="0">
-              <a:lnSpc>
-                <a:spcPct val="100000"/>
-              </a:lnSpc>
-              <a:spcBef>
-                <a:spcPts val="400"/>
-              </a:spcBef>
-              <a:buNone/>
-            </a:pPr>
-            <a:r>
-              <a:rPr lang="en-US" sz="2000" spc="-1">
-                <a:solidFill>
-                  <a:srgbClr val="003056"/>
-                </a:solidFill>
-                <a:latin typeface="Calibri"/>
-              </a:rPr>
-              <a:t>      may use them in </a:t>
-            </a:r>
-            <a:r>
-              <a:rPr lang="en-US" sz="2000" spc="-1" dirty="0">
-                <a:solidFill>
-                  <a:srgbClr val="003056"/>
-                </a:solidFill>
-                <a:latin typeface="Calibri"/>
-              </a:rPr>
-              <a:t>different</a:t>
-            </a:r>
-          </a:p>
-          <a:p>
-            <a:pPr marL="56515" indent="0">
-              <a:lnSpc>
-                <a:spcPct val="100000"/>
-              </a:lnSpc>
-              <a:spcBef>
-                <a:spcPts val="400"/>
-              </a:spcBef>
-              <a:buNone/>
-            </a:pPr>
-            <a:r>
-              <a:rPr lang="en-US" sz="2000" spc="-1">
-                <a:solidFill>
-                  <a:srgbClr val="003056"/>
-                </a:solidFill>
-                <a:latin typeface="Calibri"/>
-              </a:rPr>
-              <a:t>      parts of transformer block</a:t>
+              <a:t>      in different places today</a:t>
             </a:r>
           </a:p>
           <a:p>
@@ -40259,7 +40285,7 @@
                                 </p:cTn>
                               </p:par>
                               <p:par>
-                                <p:cTn id="9" presetID="1" presetClass="entr" presetSubtype="0" fill="hold" nodeType="withEffect">
+                                <p:cTn id="9" presetID="1" presetClass="entr" presetSubtype="0" fill="hold" grpId="0" nodeType="withEffect">
                                   <p:stCondLst>
                                     <p:cond delay="0"/>
                                   </p:stCondLst>
@@ -40267,6 +40293,68 @@
                                     <p:set>
                                       <p:cBhvr>
                                         <p:cTn id="10" dur="1" fill="hold">
+                                          <p:stCondLst>
+                                            <p:cond delay="0"/>
+                                          </p:stCondLst>
+                                        </p:cTn>
+                                        <p:tgtEl>
+                                          <p:spTgt spid="178">
+                                            <p:txEl>
+                                              <p:pRg st="2" end="2"/>
+                                            </p:txEl>
+                                          </p:spTgt>
+                                        </p:tgtEl>
+                                        <p:attrNameLst>
+                                          <p:attrName>style.visibility</p:attrName>
+                                        </p:attrNameLst>
+                                      </p:cBhvr>
+                                      <p:to>
+                                        <p:strVal val="visible"/>
+                                      </p:to>
+                                    </p:set>
+                                  </p:childTnLst>
+                                </p:cTn>
+                              </p:par>
+                              <p:par>
+                                <p:cTn id="11" presetID="1" presetClass="entr" presetSubtype="0" fill="hold" grpId="0" nodeType="withEffect">
+                                  <p:stCondLst>
+                                    <p:cond delay="0"/>
+                                  </p:stCondLst>
+                                  <p:childTnLst>
+                                    <p:set>
+                                      <p:cBhvr>
+                                        <p:cTn id="12" dur="1" fill="hold">
+                                          <p:stCondLst>
+                                            <p:cond delay="0"/>
+                                          </p:stCondLst>
+                                        </p:cTn>
+                                        <p:tgtEl>
+                                          <p:spTgt spid="178">
+                                            <p:txEl>
+                                              <p:pRg st="3" end="3"/>
+                                            </p:txEl>
+                                          </p:spTgt>
+                                        </p:tgtEl>
+                                        <p:attrNameLst>
+                                          <p:attrName>style.visibility</p:attrName>
+                                        </p:attrNameLst>
+                                      </p:cBhvr>
+                                      <p:to>
+                                        <p:strVal val="visible"/>
+                                      </p:to>
+                                    </p:set>
+                                  </p:childTnLst>
+                                </p:cTn>
+                              </p:par>
+                              <p:par>
+                                <p:cTn id="13" presetID="1" presetClass="entr" presetSubtype="0" fill="hold" nodeType="withEffect">
+                                  <p:stCondLst>
+                                    <p:cond delay="0"/>
+                                  </p:stCondLst>
+                                  <p:childTnLst>
+                                    <p:set>
+                                      <p:cBhvr>
+                                        <p:cTn id="14" dur="1" fill="hold">
                                           <p:stCondLst>
                                             <p:cond delay="0"/>
                                           </p:stCondLst>
@@ -40292,26 +40380,26 @@
                     </p:cTn>
                   </p:par>
                   <p:par>
-                    <p:cTn id="11" fill="hold">
+                    <p:cTn id="15" fill="hold">
                       <p:stCondLst>
                         <p:cond delay="indefinite"/>
                       </p:stCondLst>
                       <p:childTnLst>
                         <p:par>
-                          <p:cTn id="12" fill="hold">
+                          <p:cTn id="16" fill="hold">
                             <p:stCondLst>
                               <p:cond delay="0"/>
                             </p:stCondLst>
                             <p:childTnLst>
                               <p:par>
-                                <p:cTn id="13" presetID="1" presetClass="entr" presetSubtype="0" fill="hold" grpId="0" nodeType="clickEffect">
+                                <p:cTn id="17" presetID="1" presetClass="entr" presetSubtype="0" fill="hold" grpId="0" nodeType="clickEffect">
                                   <p:stCondLst>
                                     <p:cond delay="0"/>
                                   </p:stCondLst>
                                   <p:childTnLst>
                                     <p:set>
                                       <p:cBhvr>
-                                        <p:cTn id="14" dur="1" fill="hold">
+                                        <p:cTn id="18" dur="1" fill="hold">
                                           <p:stCondLst>
                                             <p:cond delay="0"/>
                                           </p:stCondLst>
@@ -40319,7 +40407,7 @@
                                         <p:tgtEl>
                                           <p:spTgt spid="178">
                                             <p:txEl>
-                                              <p:pRg st="2" end="2"/>
+                                              <p:pRg st="4" end="4"/>
                                             </p:txEl>
                                           </p:spTgt>
                                         </p:tgtEl>
@@ -40335,14 +40423,14 @@
                                 </p:cTn>
                               </p:par>
                               <p:par>
-                                <p:cTn id="15" presetID="1" presetClass="entr" presetSubtype="0" fill="hold" grpId="0" nodeType="withEffect">
+                                <p:cTn id="19" presetID="1" presetClass="entr" presetSubtype="0" fill="hold" grpId="0" nodeType="withEffect">
                                   <p:stCondLst>
                                     <p:cond delay="0"/>
                                   </p:stCondLst>
                                   <p:childTnLst>
                                     <p:set>
                                       <p:cBhvr>
-                                        <p:cTn id="16" dur="1" fill="hold">
+                                        <p:cTn id="20" dur="1" fill="hold">
                                           <p:stCondLst>
                                             <p:cond delay="0"/>
                                           </p:stCondLst>
@@ -40350,7 +40438,7 @@
                                         <p:tgtEl>
                                           <p:spTgt spid="178">
                                             <p:txEl>
-                                              <p:pRg st="3" end="3"/>
+                                              <p:pRg st="5" end="5"/>
                                             </p:txEl>
                                           </p:spTgt>
                                         </p:tgtEl>
@@ -40372,81 +40460,19 @@
                     </p:cTn>
                   </p:par>
                   <p:par>
-                    <p:cTn id="17" fill="hold">
+                    <p:cTn id="21" fill="hold">
                       <p:stCondLst>
                         <p:cond delay="indefinite"/>
                       </p:stCondLst>
                       <p:childTnLst>
                         <p:par>
-                          <p:cTn id="18" fill="hold">
+                          <p:cTn id="22" fill="hold">
                             <p:stCondLst>
                               <p:cond delay="0"/>
                             </p:stCondLst>
                             <p:childTnLst>
                               <p:par>
-                                <p:cTn id="19" presetID="1" presetClass="entr" presetSubtype="0" fill="hold" grpId="0" nodeType="clickEffect">
-                                  <p:stCondLst>
-                                    <p:cond delay="0"/>
-                                  </p:stCondLst>
-                                  <p:childTnLst>
-                                    <p:set>
-                                      <p:cBhvr>
-                                        <p:cTn id="20" dur="1" fill="hold">
-                                          <p:stCondLst>
-                                            <p:cond delay="0"/>
-                                          </p:stCondLst>
-                                        </p:cTn>
-                                        <p:tgtEl>
-                                          <p:spTgt spid="178">
-                                            <p:txEl>
-                                              <p:pRg st="4" end="4"/>
-                                            </p:txEl>
-                                          </p:spTgt>
-                                        </p:tgtEl>
-                                        <p:attrNameLst>
-                                          <p:attrName>style.visibility</p:attrName>
-                                        </p:attrNameLst>
-                                      </p:cBhvr>
-                                      <p:to>
-                                        <p:strVal val="visible"/>
-                                      </p:to>
-                                    </p:set>
-                                  </p:childTnLst>
-                                </p:cTn>
-                              </p:par>
-                              <p:par>
-                                <p:cTn id="21" presetID="1" presetClass="entr" presetSubtype="0" fill="hold" grpId="0" nodeType="withEffect">
-                                  <p:stCondLst>
-                                    <p:cond delay="0"/>
-                                  </p:stCondLst>
-                                  <p:childTnLst>
-                                    <p:set>
-                                      <p:cBhvr>
-                                        <p:cTn id="22" dur="1" fill="hold">
-                                          <p:stCondLst>
-                                            <p:cond delay="0"/>
-                                          </p:stCondLst>
-                                        </p:cTn>
-                                        <p:tgtEl>
-                                          <p:spTgt spid="178">
-                                            <p:txEl>
-                                              <p:pRg st="5" end="5"/>
-                                            </p:txEl>
-                                          </p:spTgt>
-                                        </p:tgtEl>
-                                        <p:attrNameLst>
-                                          <p:attrName>style.visibility</p:attrName>
-                                        </p:attrNameLst>
-                                      </p:cBhvr>
-                                      <p:to>
-                                        <p:strVal val="visible"/>
-                                      </p:to>
-                                    </p:set>
-                                  </p:childTnLst>
-                                </p:cTn>
-                              </p:par>
-                              <p:par>
-                                <p:cTn id="23" presetID="1" presetClass="entr" presetSubtype="0" fill="hold" grpId="0" nodeType="withEffect">
+                                <p:cTn id="23" presetID="1" presetClass="entr" presetSubtype="0" fill="hold" grpId="0" nodeType="clickEffect">
                                   <p:stCondLst>
                                     <p:cond delay="0"/>
                                   </p:stCondLst>
@@ -40587,26 +40613,39 @@
                                   </p:childTnLst>
                                 </p:cTn>
                               </p:par>
-                            </p:childTnLst>
-                          </p:cTn>
-                        </p:par>
-                      </p:childTnLst>
-                    </p:cTn>
-                  </p:par>
-                  <p:par>
-                    <p:cTn id="33" fill="hold">
-                      <p:stCondLst>
-                        <p:cond delay="indefinite"/>
-                      </p:stCondLst>
-                      <p:childTnLst>
-                        <p:par>
-                          <p:cTn id="34" fill="hold">
-                            <p:stCondLst>
-                              <p:cond delay="0"/>
-                            </p:stCondLst>
-                            <p:childTnLst>
                               <p:par>
-                                <p:cTn id="35" presetID="1" presetClass="entr" presetSubtype="0" fill="hold" grpId="0" nodeType="clickEffect">
+                                <p:cTn id="33" presetID="1" presetClass="entr" presetSubtype="0" fill="hold" grpId="0" nodeType="withEffect">
+                                  <p:stCondLst>
+                                    <p:cond delay="0"/>
+                                  </p:stCondLst>
+                                  <p:childTnLst>
+                                    <p:set>
+                                      <p:cBhvr>
+                                        <p:cTn id="34" dur="1" fill="hold">
+                                          <p:stCondLst>
+                                            <p:cond delay="0"/>
+                                          </p:stCondLst>
+                                        </p:cTn>
+                                        <p:tgtEl>
+                                          <p:spTgt spid="178">
+                                            <p:txEl>
+                                              <p:pRg st="10" end="10"/>
+                                            </p:txEl>
+                                          </p:spTgt>
+                                        </p:tgtEl>
+                                        <p:attrNameLst>
+                                          <p:attrName>style.visibility</p:attrName>
+                                        </p:attrNameLst>
+                                      </p:cBhvr>
+                                      <p:to>
+                                        <p:strVal val="visible"/>
+                                      </p:to>
+                                    </p:set>
+                                  </p:childTnLst>
+                                </p:cTn>
+                              </p:par>
+                              <p:par>
+                                <p:cTn id="35" presetID="1" presetClass="entr" presetSubtype="0" fill="hold" grpId="0" nodeType="withEffect">
                                   <p:stCondLst>
                                     <p:cond delay="0"/>
                                   </p:stCondLst>
@@ -40621,7 +40660,7 @@
                                         <p:tgtEl>
                                           <p:spTgt spid="178">
                                             <p:txEl>
-                                              <p:pRg st="10" end="10"/>
+                                              <p:pRg st="11" end="11"/>
                                             </p:txEl>
                                           </p:spTgt>
                                         </p:tgtEl>
@@ -40636,26 +40675,39 @@
                                   </p:childTnLst>
                                 </p:cTn>
                               </p:par>
-                            </p:childTnLst>
-                          </p:cTn>
-                        </p:par>
-                      </p:childTnLst>
-                    </p:cTn>
-                  </p:par>
-                  <p:par>
-                    <p:cTn id="37" fill="hold">
-                      <p:stCondLst>
-                        <p:cond delay="indefinite"/>
-                      </p:stCondLst>
-                      <p:childTnLst>
-                        <p:par>
-                          <p:cTn id="38" fill="hold">
-                            <p:stCondLst>
-                              <p:cond delay="0"/>
-                            </p:stCondLst>
-                            <p:childTnLst>
                               <p:par>
-                                <p:cTn id="39" presetID="1" presetClass="entr" presetSubtype="0" fill="hold" grpId="0" nodeType="clickEffect">
+                                <p:cTn id="37" presetID="1" presetClass="entr" presetSubtype="0" fill="hold" grpId="0" nodeType="withEffect">
+                                  <p:stCondLst>
+                                    <p:cond delay="0"/>
+                                  </p:stCondLst>
+                                  <p:childTnLst>
+                                    <p:set>
+                                      <p:cBhvr>
+                                        <p:cTn id="38" dur="1" fill="hold">
+                                          <p:stCondLst>
+                                            <p:cond delay="0"/>
+                                          </p:stCondLst>
+                                        </p:cTn>
+                                        <p:tgtEl>
+                                          <p:spTgt spid="178">
+                                            <p:txEl>
+                                              <p:pRg st="12" end="12"/>
+                                            </p:txEl>
+                                          </p:spTgt>
+                                        </p:tgtEl>
+                                        <p:attrNameLst>
+                                          <p:attrName>style.visibility</p:attrName>
+                                        </p:attrNameLst>
+                                      </p:cBhvr>
+                                      <p:to>
+                                        <p:strVal val="visible"/>
+                                      </p:to>
+                                    </p:set>
+                                  </p:childTnLst>
+                                </p:cTn>
+                              </p:par>
+                              <p:par>
+                                <p:cTn id="39" presetID="1" presetClass="entr" presetSubtype="0" fill="hold" grpId="0" nodeType="withEffect">
                                   <p:stCondLst>
                                     <p:cond delay="0"/>
                                   </p:stCondLst>
@@ -40663,104 +40715,6 @@
                                     <p:set>
                                       <p:cBhvr>
                                         <p:cTn id="40" dur="1" fill="hold">
-                                          <p:stCondLst>
-                                            <p:cond delay="0"/>
-                                          </p:stCondLst>
-                                        </p:cTn>
-                                        <p:tgtEl>
-                                          <p:spTgt spid="178">
-                                            <p:txEl>
-                                              <p:pRg st="11" end="11"/>
-                                            </p:txEl>
-                                          </p:spTgt>
-                                        </p:tgtEl>
-                                        <p:attrNameLst>
-                                          <p:attrName>style.visibility</p:attrName>
-                                        </p:attrNameLst>
-                                      </p:cBhvr>
-                                      <p:to>
-                                        <p:strVal val="visible"/>
-                                      </p:to>
-                                    </p:set>
-                                  </p:childTnLst>
-                                </p:cTn>
-                              </p:par>
-                            </p:childTnLst>
-                          </p:cTn>
-                        </p:par>
-                      </p:childTnLst>
-                    </p:cTn>
-                  </p:par>
-                  <p:par>
-                    <p:cTn id="41" fill="hold">
-                      <p:stCondLst>
-                        <p:cond delay="indefinite"/>
-                      </p:stCondLst>
-                      <p:childTnLst>
-                        <p:par>
-                          <p:cTn id="42" fill="hold">
-                            <p:stCondLst>
-                              <p:cond delay="0"/>
-                            </p:stCondLst>
-                            <p:childTnLst>
-                              <p:par>
-                                <p:cTn id="43" presetID="1" presetClass="entr" presetSubtype="0" fill="hold" grpId="0" nodeType="clickEffect">
-                                  <p:stCondLst>
-                                    <p:cond delay="0"/>
-                                  </p:stCondLst>
-                                  <p:childTnLst>
-                                    <p:set>
-                                      <p:cBhvr>
-                                        <p:cTn id="44" dur="1" fill="hold">
-                                          <p:stCondLst>
-                                            <p:cond delay="0"/>
-                                          </p:stCondLst>
-                                        </p:cTn>
-                                        <p:tgtEl>
-                                          <p:spTgt spid="178">
-                                            <p:txEl>
-                                              <p:pRg st="12" end="12"/>
-                                            </p:txEl>
-                                          </p:spTgt>
-                                        </p:tgtEl>
-                                        <p:attrNameLst>
-                                          <p:attrName>style.visibility</p:attrName>
-                                        </p:attrNameLst>
-                                      </p:cBhvr>
-                                      <p:to>
-                                        <p:strVal val="visible"/>
-                                      </p:to>
-                                    </p:set>
-                                  </p:childTnLst>
-                                </p:cTn>
-                              </p:par>
-                            </p:childTnLst>
-                          </p:cTn>
-                        </p:par>
-                      </p:childTnLst>
-                    </p:cTn>
-                  </p:par>
-                  <p:par>
-                    <p:cTn id="45" fill="hold">
-                      <p:stCondLst>
-                        <p:cond delay="indefinite"/>
-                      </p:stCondLst>
-                      <p:childTnLst>
-                        <p:par>
-                          <p:cTn id="46" fill="hold">
-                            <p:stCondLst>
-                              <p:cond delay="0"/>
-                            </p:stCondLst>
-                            <p:childTnLst>
-                              <p:par>
-                                <p:cTn id="47" presetID="1" presetClass="entr" presetSubtype="0" fill="hold" grpId="0" nodeType="clickEffect">
-                                  <p:stCondLst>
-                                    <p:cond delay="0"/>
-                                  </p:stCondLst>
-                                  <p:childTnLst>
-                                    <p:set>
-                                      <p:cBhvr>
-                                        <p:cTn id="48" dur="1" fill="hold">
                                           <p:stCondLst>
                                             <p:cond delay="0"/>
                                           </p:stCondLst>

--- a/lectures/04_transformers/04_transformers.pptx
+++ b/lectures/04_transformers/04_transformers.pptx
@@ -148,9 +148,7 @@
 <file path=ppt/revisionInfo.xml><?xml version="1.0" encoding="utf-8"?>
 <p1510:revInfo xmlns:a="http://schemas.openxmlformats.org/drawingml/2006/main" xmlns:r="http://schemas.openxmlformats.org/officeDocument/2006/relationships" xmlns:p1510="http://schemas.microsoft.com/office/powerpoint/2015/10/main">
   <p1510:revLst>
-    <p1510:client id="{6C8DA7BB-0332-C63C-1C36-53EAD1AC1A2B}" v="502" dt="2026-03-24T10:44:07.965"/>
-    <p1510:client id="{D6445606-36CA-19D6-725A-DB6944A1130B}" v="102" dt="2026-03-24T11:20:34.594"/>
-    <p1510:client id="{F67611A0-4684-112F-212A-37799F88C10B}" v="144" dt="2026-03-26T09:12:33.048"/>
+    <p1510:client id="{67E67723-2ADA-7A3D-0672-A2CAFA7DE13C}" v="92" dt="2026-05-26T14:14:45.945"/>
   </p1510:revLst>
 </p1510:revInfo>
 </file>
@@ -16761,7 +16759,7 @@
               <a:buChar char="•"/>
             </a:pPr>
             <a:r>
-              <a:rPr lang="en-US" sz="1800" b="0" strike="noStrike" spc="-1">
+              <a:rPr lang="en-US" sz="1800" b="0" strike="noStrike" spc="-1" dirty="0">
                 <a:solidFill>
                   <a:srgbClr val="003056"/>
                 </a:solidFill>
@@ -16770,7 +16768,7 @@
               <a:t>Attention weights: </a:t>
             </a:r>
             <a:r>
-              <a:rPr lang="en-US" sz="1800" b="0" strike="noStrike" spc="-1" err="1">
+              <a:rPr lang="en-US" sz="1800" b="0" strike="noStrike" spc="-1" dirty="0" err="1">
                 <a:solidFill>
                   <a:srgbClr val="003056"/>
                 </a:solidFill>
@@ -16778,7 +16776,7 @@
               </a:rPr>
               <a:t>softmax</a:t>
             </a:r>
-            <a:endParaRPr lang="de-DE" sz="1800" b="0" strike="noStrike" spc="-1" err="1">
+            <a:endParaRPr lang="de-DE" sz="1800" b="0" strike="noStrike" spc="-1" dirty="0" err="1">
               <a:solidFill>
                 <a:srgbClr val="003056"/>
               </a:solidFill>
@@ -16887,7 +16885,7 @@
               <a:buChar char="•"/>
             </a:pPr>
             <a:r>
-              <a:rPr lang="en-US" sz="2000" b="0" strike="noStrike" spc="-1">
+              <a:rPr lang="en-US" sz="2000" b="0" strike="noStrike" spc="-1" dirty="0">
                 <a:solidFill>
                   <a:srgbClr val="003056"/>
                 </a:solidFill>
@@ -16896,7 +16894,7 @@
               <a:t>Specifically, </a:t>
             </a:r>
             <a:r>
-              <a:rPr lang="en-US" sz="2000" b="1" i="1" strike="noStrike" spc="-1">
+              <a:rPr lang="en-US" sz="2000" b="1" i="1" strike="noStrike" spc="-1" dirty="0">
                 <a:solidFill>
                   <a:srgbClr val="003056"/>
                 </a:solidFill>
@@ -16905,7 +16903,7 @@
               <a:t>q</a:t>
             </a:r>
             <a:r>
-              <a:rPr lang="en-US" sz="2000" b="0" i="1" strike="noStrike" spc="-1" baseline="-25000">
+              <a:rPr lang="en-US" sz="2000" b="0" i="1" strike="noStrike" spc="-1" baseline="-25000" dirty="0">
                 <a:solidFill>
                   <a:srgbClr val="003056"/>
                 </a:solidFill>
@@ -16914,7 +16912,7 @@
               <a:t>i</a:t>
             </a:r>
             <a:r>
-              <a:rPr lang="en-US" sz="2000" b="0" i="1" strike="noStrike" spc="-1">
+              <a:rPr lang="en-US" sz="2000" b="0" i="1" strike="noStrike" spc="-1" dirty="0">
                 <a:solidFill>
                   <a:srgbClr val="003056"/>
                 </a:solidFill>
@@ -16923,7 +16921,7 @@
               <a:t> = </a:t>
             </a:r>
             <a:r>
-              <a:rPr lang="en-US" sz="2000" b="1" i="1" strike="noStrike" spc="-1" err="1">
+              <a:rPr lang="en-US" sz="2000" b="1" i="1" strike="noStrike" spc="-1" dirty="0" err="1">
                 <a:solidFill>
                   <a:srgbClr val="003056"/>
                 </a:solidFill>
@@ -16932,7 +16930,7 @@
               <a:t>W</a:t>
             </a:r>
             <a:r>
-              <a:rPr lang="en-US" sz="2000" b="0" i="1" strike="noStrike" spc="-1" baseline="30000" err="1">
+              <a:rPr lang="en-US" sz="2000" b="0" i="1" strike="noStrike" spc="-1" baseline="30000" dirty="0" err="1">
                 <a:solidFill>
                   <a:srgbClr val="003056"/>
                 </a:solidFill>
@@ -16941,7 +16939,7 @@
               <a:t>Q</a:t>
             </a:r>
             <a:r>
-              <a:rPr lang="en-US" sz="2000" b="1" i="1" strike="noStrike" spc="-1" err="1">
+              <a:rPr lang="en-US" sz="2000" b="1" i="1" strike="noStrike" spc="-1" dirty="0" err="1">
                 <a:solidFill>
                   <a:srgbClr val="003056"/>
                 </a:solidFill>
@@ -16950,7 +16948,7 @@
               <a:t>x</a:t>
             </a:r>
             <a:r>
-              <a:rPr lang="en-US" sz="2000" b="0" i="1" strike="noStrike" spc="-1" baseline="-25000" err="1">
+              <a:rPr lang="en-US" sz="2000" b="0" i="1" strike="noStrike" spc="-1" baseline="-25000" dirty="0" err="1">
                 <a:solidFill>
                   <a:srgbClr val="003056"/>
                 </a:solidFill>
@@ -16959,7 +16957,7 @@
               <a:t>i</a:t>
             </a:r>
             <a:r>
-              <a:rPr lang="en-US" sz="2000" b="0" i="1" strike="noStrike" spc="-1">
+              <a:rPr lang="en-US" sz="2000" b="0" i="1" strike="noStrike" spc="-1" dirty="0">
                 <a:solidFill>
                   <a:srgbClr val="003056"/>
                 </a:solidFill>
@@ -16968,7 +16966,7 @@
               <a:t>,</a:t>
             </a:r>
             <a:r>
-              <a:rPr lang="en-US" sz="2000" b="0" i="1" strike="noStrike" spc="-1" baseline="-25000">
+              <a:rPr lang="en-US" sz="2000" b="0" i="1" strike="noStrike" spc="-1" baseline="-25000" dirty="0">
                 <a:solidFill>
                   <a:srgbClr val="003056"/>
                 </a:solidFill>
@@ -16977,7 +16975,7 @@
               <a:t> </a:t>
             </a:r>
             <a:r>
-              <a:rPr lang="en-US" sz="2000" b="1" i="1" strike="noStrike" spc="-1">
+              <a:rPr lang="en-US" sz="2000" b="1" i="1" strike="noStrike" spc="-1" dirty="0">
                 <a:solidFill>
                   <a:srgbClr val="003056"/>
                 </a:solidFill>
@@ -16986,7 +16984,7 @@
               <a:t>k</a:t>
             </a:r>
             <a:r>
-              <a:rPr lang="en-US" sz="2000" b="0" i="1" strike="noStrike" spc="-1" baseline="-25000">
+              <a:rPr lang="en-US" sz="2000" b="0" i="1" strike="noStrike" spc="-1" baseline="-25000" dirty="0">
                 <a:solidFill>
                   <a:srgbClr val="003056"/>
                 </a:solidFill>
@@ -16995,7 +16993,7 @@
               <a:t>i</a:t>
             </a:r>
             <a:r>
-              <a:rPr lang="en-US" sz="2000" b="0" i="1" strike="noStrike" spc="-1">
+              <a:rPr lang="en-US" sz="2000" b="0" i="1" strike="noStrike" spc="-1" dirty="0">
                 <a:solidFill>
                   <a:srgbClr val="003056"/>
                 </a:solidFill>
@@ -17004,7 +17002,7 @@
               <a:t> = </a:t>
             </a:r>
             <a:r>
-              <a:rPr lang="en-US" sz="2000" b="1" i="1" strike="noStrike" spc="-1" err="1">
+              <a:rPr lang="en-US" sz="2000" b="1" i="1" strike="noStrike" spc="-1" dirty="0" err="1">
                 <a:solidFill>
                   <a:srgbClr val="003056"/>
                 </a:solidFill>
@@ -17013,7 +17011,7 @@
               <a:t>W</a:t>
             </a:r>
             <a:r>
-              <a:rPr lang="en-US" sz="2000" b="0" i="1" strike="noStrike" spc="-1" baseline="30000" err="1">
+              <a:rPr lang="en-US" sz="2000" b="0" i="1" strike="noStrike" spc="-1" baseline="30000" dirty="0" err="1">
                 <a:solidFill>
                   <a:srgbClr val="003056"/>
                 </a:solidFill>
@@ -17022,7 +17020,7 @@
               <a:t>K</a:t>
             </a:r>
             <a:r>
-              <a:rPr lang="en-US" sz="2000" b="1" i="1" strike="noStrike" spc="-1" err="1">
+              <a:rPr lang="en-US" sz="2000" b="1" i="1" strike="noStrike" spc="-1" dirty="0" err="1">
                 <a:solidFill>
                   <a:srgbClr val="003056"/>
                 </a:solidFill>
@@ -17031,7 +17029,7 @@
               <a:t>x</a:t>
             </a:r>
             <a:r>
-              <a:rPr lang="en-US" sz="2000" b="0" i="1" strike="noStrike" spc="-1" baseline="-25000" err="1">
+              <a:rPr lang="en-US" sz="2000" b="0" i="1" strike="noStrike" spc="-1" baseline="-25000" dirty="0" err="1">
                 <a:solidFill>
                   <a:srgbClr val="003056"/>
                 </a:solidFill>
@@ -17040,7 +17038,7 @@
               <a:t>i</a:t>
             </a:r>
             <a:r>
-              <a:rPr lang="en-US" sz="2000" b="0" i="1" strike="noStrike" spc="-1">
+              <a:rPr lang="en-US" sz="2000" b="0" i="1" strike="noStrike" spc="-1" dirty="0">
                 <a:solidFill>
                   <a:srgbClr val="003056"/>
                 </a:solidFill>
@@ -17049,7 +17047,7 @@
               <a:t> </a:t>
             </a:r>
             <a:r>
-              <a:rPr lang="en-US" sz="2000" b="0" strike="noStrike" spc="-1">
+              <a:rPr lang="en-US" sz="2000" b="0" strike="noStrike" spc="-1" dirty="0">
                 <a:solidFill>
                   <a:srgbClr val="003056"/>
                 </a:solidFill>
@@ -17058,7 +17056,7 @@
               <a:t>and </a:t>
             </a:r>
             <a:r>
-              <a:rPr lang="en-US" sz="2000" b="1" strike="noStrike" spc="-1">
+              <a:rPr lang="en-US" sz="2000" b="1" strike="noStrike" spc="-1" dirty="0">
                 <a:solidFill>
                   <a:srgbClr val="003056"/>
                 </a:solidFill>
@@ -17067,7 +17065,7 @@
               <a:t>v</a:t>
             </a:r>
             <a:r>
-              <a:rPr lang="en-US" sz="2000" b="0" i="1" strike="noStrike" spc="-1" baseline="-25000">
+              <a:rPr lang="en-US" sz="2000" b="0" i="1" strike="noStrike" spc="-1" baseline="-25000" dirty="0">
                 <a:solidFill>
                   <a:srgbClr val="003056"/>
                 </a:solidFill>
@@ -17076,7 +17074,7 @@
               <a:t>i</a:t>
             </a:r>
             <a:r>
-              <a:rPr lang="en-US" sz="2000" b="0" i="1" strike="noStrike" spc="-1">
+              <a:rPr lang="en-US" sz="2000" b="0" i="1" strike="noStrike" spc="-1" dirty="0">
                 <a:solidFill>
                   <a:srgbClr val="003056"/>
                 </a:solidFill>
@@ -17085,7 +17083,7 @@
               <a:t> = </a:t>
             </a:r>
             <a:r>
-              <a:rPr lang="en-US" sz="2000" b="1" i="1" strike="noStrike" spc="-1" err="1">
+              <a:rPr lang="en-US" sz="2000" b="1" i="1" strike="noStrike" spc="-1" dirty="0" err="1">
                 <a:solidFill>
                   <a:srgbClr val="003056"/>
                 </a:solidFill>
@@ -17094,7 +17092,7 @@
               <a:t>W</a:t>
             </a:r>
             <a:r>
-              <a:rPr lang="en-US" sz="2000" b="0" i="1" strike="noStrike" spc="-1" baseline="30000" err="1">
+              <a:rPr lang="en-US" sz="2000" b="0" i="1" strike="noStrike" spc="-1" baseline="30000" dirty="0" err="1">
                 <a:solidFill>
                   <a:srgbClr val="003056"/>
                 </a:solidFill>
@@ -17103,7 +17101,7 @@
               <a:t>V</a:t>
             </a:r>
             <a:r>
-              <a:rPr lang="en-US" sz="2000" b="1" i="1" strike="noStrike" spc="-1" err="1">
+              <a:rPr lang="en-US" sz="2000" b="1" i="1" strike="noStrike" spc="-1" dirty="0" err="1">
                 <a:solidFill>
                   <a:srgbClr val="003056"/>
                 </a:solidFill>
@@ -17112,7 +17110,7 @@
               <a:t>x</a:t>
             </a:r>
             <a:r>
-              <a:rPr lang="en-US" sz="2000" b="0" i="1" strike="noStrike" spc="-1" baseline="-25000" err="1">
+              <a:rPr lang="en-US" sz="2000" b="0" i="1" strike="noStrike" spc="-1" baseline="-25000" dirty="0" err="1">
                 <a:solidFill>
                   <a:srgbClr val="003056"/>
                 </a:solidFill>
@@ -17120,7 +17118,78 @@
               </a:rPr>
               <a:t>i</a:t>
             </a:r>
-            <a:endParaRPr lang="de-DE" sz="2000" b="0" strike="noStrike" spc="-1" err="1">
+            <a:r>
+              <a:rPr lang="en-US" sz="2000" i="1" spc="-1" baseline="-25000" dirty="0">
+                <a:solidFill>
+                  <a:srgbClr val="003056"/>
+                </a:solidFill>
+                <a:latin typeface="Calibri"/>
+              </a:rPr>
+              <a:t> </a:t>
+            </a:r>
+            <a:r>
+              <a:rPr lang="en-US" sz="2000" spc="-1" dirty="0">
+                <a:solidFill>
+                  <a:srgbClr val="003056"/>
+                </a:solidFill>
+                <a:latin typeface="Calibri"/>
+              </a:rPr>
+              <a:t>for input </a:t>
+            </a:r>
+            <a:r>
+              <a:rPr lang="en-US" sz="2000" b="1" i="1" spc="-1" dirty="0">
+                <a:solidFill>
+                  <a:srgbClr val="003056"/>
+                </a:solidFill>
+                <a:latin typeface="Calibri"/>
+              </a:rPr>
+              <a:t>x</a:t>
+            </a:r>
+            <a:r>
+              <a:rPr lang="en-US" sz="2000" i="1" spc="-1" dirty="0">
+                <a:solidFill>
+                  <a:srgbClr val="003056"/>
+                </a:solidFill>
+                <a:latin typeface="DejaVu Sans"/>
+                <a:ea typeface="Calibri"/>
+                <a:cs typeface="Calibri"/>
+              </a:rPr>
+              <a:t> </a:t>
+            </a:r>
+            <a:r>
+              <a:rPr lang="az-Cyrl-AZ" sz="2000" i="1" spc="-1" dirty="0">
+                <a:solidFill>
+                  <a:srgbClr val="003056"/>
+                </a:solidFill>
+                <a:latin typeface="Calibri"/>
+                <a:ea typeface="Calibri"/>
+                <a:cs typeface="Calibri"/>
+              </a:rPr>
+              <a:t>Є</a:t>
+            </a:r>
+            <a:r>
+              <a:rPr lang="en-US" sz="2000" i="1" spc="-1" dirty="0">
+                <a:solidFill>
+                  <a:srgbClr val="003056"/>
+                </a:solidFill>
+                <a:latin typeface="Calibri"/>
+                <a:ea typeface="Calibri"/>
+                <a:cs typeface="Calibri"/>
+              </a:rPr>
+              <a:t> R</a:t>
+            </a:r>
+            <a:r>
+              <a:rPr lang="en-US" sz="1800" i="1" spc="-1" baseline="30000" dirty="0">
+                <a:solidFill>
+                  <a:srgbClr val="003056"/>
+                </a:solidFill>
+                <a:latin typeface="Calibri"/>
+                <a:ea typeface="Calibri"/>
+                <a:cs typeface="Calibri"/>
+              </a:rPr>
+              <a:t>Dx1</a:t>
+            </a:r>
+            <a:endParaRPr lang="de-DE" sz="1800" b="0" strike="noStrike" spc="-1" baseline="30000" dirty="0" err="1">
               <a:solidFill>
                 <a:srgbClr val="003056"/>
               </a:solidFill>
@@ -17172,7 +17241,7 @@
               <a:buChar char="•"/>
             </a:pPr>
             <a:r>
-              <a:rPr lang="en-US" sz="1600" b="0" i="1" strike="noStrike" spc="-1">
+              <a:rPr lang="en-US" sz="1600" b="0" i="1" strike="noStrike" spc="-1" dirty="0">
                 <a:solidFill>
                   <a:srgbClr val="003056"/>
                 </a:solidFill>
@@ -17181,7 +17250,7 @@
               <a:t>score(</a:t>
             </a:r>
             <a:r>
-              <a:rPr lang="en-US" sz="1600" b="0" strike="noStrike" spc="-1">
+              <a:rPr lang="en-US" sz="1600" b="0" strike="noStrike" spc="-1" dirty="0">
                 <a:solidFill>
                   <a:srgbClr val="003056"/>
                 </a:solidFill>
@@ -17190,7 +17259,7 @@
               <a:t>input </a:t>
             </a:r>
             <a:r>
-              <a:rPr lang="en-US" sz="1600" b="0" i="1" strike="noStrike" spc="-1" err="1">
+              <a:rPr lang="en-US" sz="1600" b="0" i="1" strike="noStrike" spc="-1" dirty="0" err="1">
                 <a:solidFill>
                   <a:srgbClr val="003056"/>
                 </a:solidFill>
@@ -17199,7 +17268,7 @@
               <a:t>i</a:t>
             </a:r>
             <a:r>
-              <a:rPr lang="en-US" sz="1600" b="0" i="1" strike="noStrike" spc="-1">
+              <a:rPr lang="en-US" sz="1600" b="0" i="1" strike="noStrike" spc="-1" dirty="0">
                 <a:solidFill>
                   <a:srgbClr val="003056"/>
                 </a:solidFill>
@@ -17208,7 +17277,7 @@
               <a:t>, </a:t>
             </a:r>
             <a:r>
-              <a:rPr lang="en-US" sz="1600" b="0" strike="noStrike" spc="-1">
+              <a:rPr lang="en-US" sz="1600" b="0" strike="noStrike" spc="-1" dirty="0">
                 <a:solidFill>
                   <a:srgbClr val="003056"/>
                 </a:solidFill>
@@ -17217,7 +17286,7 @@
               <a:t>input </a:t>
             </a:r>
             <a:r>
-              <a:rPr lang="en-US" sz="1600" b="0" i="1" strike="noStrike" spc="-1">
+              <a:rPr lang="en-US" sz="1600" b="0" i="1" strike="noStrike" spc="-1" dirty="0">
                 <a:solidFill>
                   <a:srgbClr val="003056"/>
                 </a:solidFill>
@@ -17226,7 +17295,7 @@
               <a:t>j) = </a:t>
             </a:r>
             <a:r>
-              <a:rPr lang="en-US" sz="1600" b="1" i="1" strike="noStrike" spc="-1" err="1">
+              <a:rPr lang="en-US" sz="1600" b="1" i="1" strike="noStrike" spc="-1" dirty="0" err="1">
                 <a:solidFill>
                   <a:srgbClr val="003056"/>
                 </a:solidFill>
@@ -17235,7 +17304,7 @@
               <a:t>q</a:t>
             </a:r>
             <a:r>
-              <a:rPr lang="en-US" sz="1600" b="0" i="1" strike="noStrike" spc="-1" baseline="-25000" err="1">
+              <a:rPr lang="en-US" sz="1600" b="0" i="1" strike="noStrike" spc="-1" baseline="-25000" dirty="0" err="1">
                 <a:solidFill>
                   <a:srgbClr val="003056"/>
                 </a:solidFill>
@@ -17244,7 +17313,7 @@
               <a:t>i</a:t>
             </a:r>
             <a:r>
-              <a:rPr lang="en-US" sz="1600" b="0" i="1" strike="noStrike" spc="-1" baseline="30000" err="1">
+              <a:rPr lang="en-US" sz="1600" b="0" i="1" strike="noStrike" spc="-1" baseline="30000" dirty="0" err="1">
                 <a:solidFill>
                   <a:srgbClr val="003056"/>
                 </a:solidFill>
@@ -17253,7 +17322,7 @@
               <a:t>T</a:t>
             </a:r>
             <a:r>
-              <a:rPr lang="en-US" sz="1600" b="1" i="1" strike="noStrike" spc="-1" err="1">
+              <a:rPr lang="en-US" sz="1600" b="1" i="1" strike="noStrike" spc="-1" dirty="0" err="1">
                 <a:solidFill>
                   <a:srgbClr val="003056"/>
                 </a:solidFill>
@@ -17262,7 +17331,7 @@
               <a:t>k</a:t>
             </a:r>
             <a:r>
-              <a:rPr lang="en-US" sz="1600" b="0" i="1" strike="noStrike" spc="-1" baseline="-25000" err="1">
+              <a:rPr lang="en-US" sz="1600" b="0" i="1" strike="noStrike" spc="-1" baseline="-25000" dirty="0" err="1">
                 <a:solidFill>
                   <a:srgbClr val="003056"/>
                 </a:solidFill>
@@ -17270,7 +17339,7 @@
               </a:rPr>
               <a:t>j</a:t>
             </a:r>
-            <a:endParaRPr lang="de-DE" sz="1600" b="0" strike="noStrike" spc="-1" err="1">
+            <a:endParaRPr lang="de-DE" sz="1600" b="0" strike="noStrike" spc="-1" dirty="0" err="1">
               <a:solidFill>
                 <a:srgbClr val="003056"/>
               </a:solidFill>
@@ -17292,7 +17361,7 @@
               <a:buChar char="•"/>
             </a:pPr>
             <a:r>
-              <a:rPr lang="el-GR" sz="1600" b="0" i="1" strike="noStrike" spc="-1">
+              <a:rPr lang="el-GR" sz="1600" b="0" i="1" strike="noStrike" spc="-1" dirty="0">
                 <a:solidFill>
                   <a:srgbClr val="003056"/>
                 </a:solidFill>
@@ -17301,7 +17370,7 @@
               <a:t>α</a:t>
             </a:r>
             <a:r>
-              <a:rPr lang="en-US" sz="1600" b="0" i="1" strike="noStrike" spc="-1" baseline="-25000" err="1">
+              <a:rPr lang="en-US" sz="1600" b="0" i="1" strike="noStrike" spc="-1" baseline="-25000" dirty="0" err="1">
                 <a:solidFill>
                   <a:srgbClr val="003056"/>
                 </a:solidFill>
@@ -17310,7 +17379,7 @@
               <a:t>ij</a:t>
             </a:r>
             <a:r>
-              <a:rPr lang="en-US" sz="1600" i="1" spc="-1" baseline="-25000">
+              <a:rPr lang="en-US" sz="1600" i="1" spc="-1" baseline="-25000" dirty="0">
                 <a:solidFill>
                   <a:srgbClr val="003056"/>
                 </a:solidFill>
@@ -17319,7 +17388,7 @@
               <a:t> </a:t>
             </a:r>
             <a:r>
-              <a:rPr lang="en-US" sz="1600" b="0" i="1" strike="noStrike" spc="-1" baseline="-25000">
+              <a:rPr lang="en-US" sz="1600" b="0" i="1" strike="noStrike" spc="-1" baseline="-25000" dirty="0">
                 <a:solidFill>
                   <a:srgbClr val="003056"/>
                 </a:solidFill>
@@ -17328,7 +17397,7 @@
               <a:t> </a:t>
             </a:r>
             <a:r>
-              <a:rPr lang="en-US" sz="1600" b="0" i="1" strike="noStrike" spc="-1">
+              <a:rPr lang="en-US" sz="1600" b="0" i="1" strike="noStrike" spc="-1" dirty="0">
                 <a:solidFill>
                   <a:srgbClr val="003056"/>
                 </a:solidFill>
@@ -17337,7 +17406,7 @@
               <a:t>= </a:t>
             </a:r>
             <a:r>
-              <a:rPr lang="en-US" sz="1600" b="0" i="1" strike="noStrike" spc="-1" err="1">
+              <a:rPr lang="en-US" sz="1600" b="0" i="1" strike="noStrike" spc="-1" dirty="0" err="1">
                 <a:solidFill>
                   <a:srgbClr val="003056"/>
                 </a:solidFill>
@@ -17346,7 +17415,7 @@
               <a:t>softmax</a:t>
             </a:r>
             <a:r>
-              <a:rPr lang="en-US" sz="1600" b="0" i="1" strike="noStrike" spc="-1">
+              <a:rPr lang="en-US" sz="1600" b="0" i="1" strike="noStrike" spc="-1" dirty="0">
                 <a:solidFill>
                   <a:srgbClr val="003056"/>
                 </a:solidFill>
@@ -17355,7 +17424,7 @@
               <a:t>(score(input </a:t>
             </a:r>
             <a:r>
-              <a:rPr lang="en-US" sz="1600" b="0" i="1" strike="noStrike" spc="-1" err="1">
+              <a:rPr lang="en-US" sz="1600" b="0" i="1" strike="noStrike" spc="-1" dirty="0" err="1">
                 <a:solidFill>
                   <a:srgbClr val="003056"/>
                 </a:solidFill>
@@ -17364,7 +17433,7 @@
               <a:t>i</a:t>
             </a:r>
             <a:r>
-              <a:rPr lang="en-US" sz="1600" b="0" i="1" strike="noStrike" spc="-1">
+              <a:rPr lang="en-US" sz="1600" b="0" i="1" strike="noStrike" spc="-1" dirty="0">
                 <a:solidFill>
                   <a:srgbClr val="003056"/>
                 </a:solidFill>
@@ -17372,7 +17441,7 @@
               </a:rPr>
               <a:t>, input j))</a:t>
             </a:r>
-            <a:endParaRPr lang="de-DE" sz="1600" b="0" strike="noStrike" spc="-1">
+            <a:endParaRPr lang="de-DE" sz="1600" b="0" strike="noStrike" spc="-1" dirty="0">
               <a:solidFill>
                 <a:srgbClr val="003056"/>
               </a:solidFill>
@@ -17394,7 +17463,7 @@
               <a:buChar char="•"/>
             </a:pPr>
             <a:r>
-              <a:rPr lang="en-US" sz="1600" b="1" i="1" strike="noStrike" spc="-1" err="1">
+              <a:rPr lang="en-US" sz="1600" b="1" i="1" strike="noStrike" spc="-1" dirty="0" err="1">
                 <a:solidFill>
                   <a:srgbClr val="003056"/>
                 </a:solidFill>
@@ -17403,7 +17472,7 @@
               <a:t>y</a:t>
             </a:r>
             <a:r>
-              <a:rPr lang="en-US" sz="1600" b="0" i="1" strike="noStrike" spc="-1" baseline="-25000" err="1">
+              <a:rPr lang="en-US" sz="1600" b="0" i="1" strike="noStrike" spc="-1" baseline="-25000" dirty="0" err="1">
                 <a:solidFill>
                   <a:srgbClr val="003056"/>
                 </a:solidFill>
@@ -17412,7 +17481,7 @@
               <a:t>i</a:t>
             </a:r>
             <a:r>
-              <a:rPr lang="en-US" sz="1600" b="0" i="1" strike="noStrike" spc="-1">
+              <a:rPr lang="en-US" sz="1600" b="0" i="1" strike="noStrike" spc="-1" dirty="0">
                 <a:solidFill>
                   <a:srgbClr val="003056"/>
                 </a:solidFill>
@@ -17421,7 +17490,7 @@
               <a:t> = </a:t>
             </a:r>
             <a:r>
-              <a:rPr lang="en-US" sz="1600" b="0" i="1" strike="noStrike" spc="-1" err="1">
+              <a:rPr lang="en-US" sz="1600" b="0" i="1" strike="noStrike" spc="-1" dirty="0" err="1">
                 <a:solidFill>
                   <a:srgbClr val="003056"/>
                 </a:solidFill>
@@ -17430,7 +17499,7 @@
               <a:t>Σ</a:t>
             </a:r>
             <a:r>
-              <a:rPr lang="en-US" sz="1600" b="0" i="1" strike="noStrike" spc="-1" baseline="-25000" err="1">
+              <a:rPr lang="en-US" sz="1600" b="0" i="1" strike="noStrike" spc="-1" baseline="-25000" dirty="0" err="1">
                 <a:solidFill>
                   <a:srgbClr val="003056"/>
                 </a:solidFill>
@@ -17439,7 +17508,7 @@
               <a:t>j</a:t>
             </a:r>
             <a:r>
-              <a:rPr lang="en-US" sz="1600" b="0" i="1" strike="noStrike" spc="-1">
+              <a:rPr lang="en-US" sz="1600" b="0" i="1" strike="noStrike" spc="-1" dirty="0">
                 <a:solidFill>
                   <a:srgbClr val="003056"/>
                 </a:solidFill>
@@ -17448,7 +17517,7 @@
               <a:t> </a:t>
             </a:r>
             <a:r>
-              <a:rPr lang="el-GR" sz="1600" b="0" i="1" strike="noStrike" spc="-1">
+              <a:rPr lang="el-GR" sz="1600" b="0" i="1" strike="noStrike" spc="-1" dirty="0">
                 <a:solidFill>
                   <a:srgbClr val="003056"/>
                 </a:solidFill>
@@ -17457,7 +17526,7 @@
               <a:t>α</a:t>
             </a:r>
             <a:r>
-              <a:rPr lang="en-US" sz="1600" b="0" i="1" strike="noStrike" spc="-1" baseline="-25000" err="1">
+              <a:rPr lang="en-US" sz="1600" b="0" i="1" strike="noStrike" spc="-1" baseline="-25000" dirty="0" err="1">
                 <a:solidFill>
                   <a:srgbClr val="003056"/>
                 </a:solidFill>
@@ -17466,7 +17535,7 @@
               <a:t>ij</a:t>
             </a:r>
             <a:r>
-              <a:rPr lang="en-US" sz="1600" b="0" i="1" strike="noStrike" spc="-1" baseline="-25000">
+              <a:rPr lang="en-US" sz="1600" b="0" i="1" strike="noStrike" spc="-1" baseline="-25000" dirty="0">
                 <a:solidFill>
                   <a:srgbClr val="003056"/>
                 </a:solidFill>
@@ -17475,7 +17544,7 @@
               <a:t> </a:t>
             </a:r>
             <a:r>
-              <a:rPr lang="en-US" sz="1600" b="1" i="1" strike="noStrike" spc="-1" err="1">
+              <a:rPr lang="en-US" sz="1600" b="1" i="1" strike="noStrike" spc="-1" dirty="0" err="1">
                 <a:solidFill>
                   <a:srgbClr val="003056"/>
                 </a:solidFill>
@@ -17484,7 +17553,7 @@
               <a:t>v</a:t>
             </a:r>
             <a:r>
-              <a:rPr lang="en-US" sz="1600" b="0" i="1" strike="noStrike" spc="-1" baseline="-25000" err="1">
+              <a:rPr lang="en-US" sz="1600" b="0" i="1" strike="noStrike" spc="-1" baseline="-25000" dirty="0" err="1">
                 <a:solidFill>
                   <a:srgbClr val="003056"/>
                 </a:solidFill>
@@ -17492,7 +17561,7 @@
               </a:rPr>
               <a:t>j</a:t>
             </a:r>
-            <a:endParaRPr lang="de-DE" sz="1600" b="0" strike="noStrike" spc="-1" err="1">
+            <a:endParaRPr lang="de-DE" sz="1600" b="0" strike="noStrike" spc="-1" dirty="0" err="1">
               <a:solidFill>
                 <a:srgbClr val="003056"/>
               </a:solidFill>
@@ -17514,7 +17583,7 @@
               <a:buChar char="•"/>
             </a:pPr>
             <a:r>
-              <a:rPr lang="en-US" sz="2000" b="0" strike="noStrike" spc="-1">
+              <a:rPr lang="en-US" sz="2000" b="0" strike="noStrike" spc="-1" dirty="0">
                 <a:solidFill>
                   <a:srgbClr val="003056"/>
                 </a:solidFill>
@@ -17523,7 +17592,7 @@
               <a:t>Note that for dot product attention, we require that </a:t>
             </a:r>
             <a:r>
-              <a:rPr lang="en-US" sz="2000" b="1" i="1" strike="noStrike" spc="-1">
+              <a:rPr lang="en-US" sz="2000" b="1" i="1" strike="noStrike" spc="-1" dirty="0">
                 <a:solidFill>
                   <a:srgbClr val="003056"/>
                 </a:solidFill>
@@ -17532,7 +17601,7 @@
               <a:t>W</a:t>
             </a:r>
             <a:r>
-              <a:rPr lang="en-US" sz="2000" b="0" i="1" strike="noStrike" spc="-1" baseline="30000">
+              <a:rPr lang="en-US" sz="2000" b="0" i="1" strike="noStrike" spc="-1" baseline="30000" dirty="0">
                 <a:solidFill>
                   <a:srgbClr val="003056"/>
                 </a:solidFill>
@@ -17541,7 +17610,7 @@
               <a:t>Q, </a:t>
             </a:r>
             <a:r>
-              <a:rPr lang="en-US" sz="2000" b="1" i="1" strike="noStrike" spc="-1">
+              <a:rPr lang="en-US" sz="2000" b="1" i="1" strike="noStrike" spc="-1" dirty="0">
                 <a:solidFill>
                   <a:srgbClr val="003056"/>
                 </a:solidFill>
@@ -17550,7 +17619,7 @@
               <a:t>W</a:t>
             </a:r>
             <a:r>
-              <a:rPr lang="en-US" sz="2000" b="0" i="1" strike="noStrike" spc="-1" baseline="30000">
+              <a:rPr lang="en-US" sz="2000" b="0" i="1" strike="noStrike" spc="-1" baseline="30000" dirty="0">
                 <a:solidFill>
                   <a:srgbClr val="003056"/>
                 </a:solidFill>
@@ -17559,7 +17628,7 @@
               <a:t>K</a:t>
             </a:r>
             <a:r>
-              <a:rPr lang="en-US" sz="2000" b="0" i="1" strike="noStrike" spc="-1">
+              <a:rPr lang="en-US" sz="2000" b="0" i="1" strike="noStrike" spc="-1" dirty="0">
                 <a:solidFill>
                   <a:srgbClr val="003056"/>
                 </a:solidFill>
@@ -17568,7 +17637,7 @@
               <a:t> </a:t>
             </a:r>
             <a:r>
-              <a:rPr lang="az-Cyrl-AZ" sz="2000" b="0" i="1" strike="noStrike" spc="-1">
+              <a:rPr lang="az-Cyrl-AZ" sz="2000" b="0" i="1" strike="noStrike" spc="-1" dirty="0">
                 <a:solidFill>
                   <a:srgbClr val="003056"/>
                 </a:solidFill>
@@ -17577,7 +17646,7 @@
               <a:t>Є</a:t>
             </a:r>
             <a:r>
-              <a:rPr lang="en-US" sz="2000" b="0" i="1" strike="noStrike" spc="-1">
+              <a:rPr lang="en-US" sz="2000" b="0" i="1" strike="noStrike" spc="-1" dirty="0">
                 <a:solidFill>
                   <a:srgbClr val="003056"/>
                 </a:solidFill>
@@ -17586,7 +17655,7 @@
               <a:t> </a:t>
             </a:r>
             <a:r>
-              <a:rPr lang="en-US" sz="2000" b="0" i="1" strike="noStrike" spc="-1" err="1">
+              <a:rPr lang="en-US" sz="2000" i="1" spc="-1" dirty="0" err="1">
                 <a:solidFill>
                   <a:srgbClr val="003056"/>
                 </a:solidFill>
@@ -17595,24 +17664,15 @@
               <a:t>R</a:t>
             </a:r>
             <a:r>
-              <a:rPr lang="en-US" sz="2000" b="0" i="1" strike="noStrike" spc="-1" baseline="30000" err="1">
-                <a:solidFill>
-                  <a:srgbClr val="003056"/>
-                </a:solidFill>
-                <a:latin typeface="Calibri"/>
-              </a:rPr>
-              <a:t>DxD</a:t>
-            </a:r>
-            <a:r>
-              <a:rPr lang="en-US" sz="2000" i="1" spc="-1" baseline="30000">
-                <a:solidFill>
-                  <a:srgbClr val="003056"/>
-                </a:solidFill>
-                <a:latin typeface="Calibri"/>
-              </a:rPr>
-              <a:t>'</a:t>
-            </a:r>
-            <a:endParaRPr lang="de-DE" sz="2000" b="0" strike="noStrike" spc="-1">
+              <a:rPr lang="en-US" sz="2000" i="1" spc="-1" baseline="30000" dirty="0" err="1">
+                <a:solidFill>
+                  <a:srgbClr val="003056"/>
+                </a:solidFill>
+                <a:latin typeface="Calibri"/>
+              </a:rPr>
+              <a:t>D'xD</a:t>
+            </a:r>
+            <a:endParaRPr lang="en-US" sz="2000" b="0" i="1" strike="noStrike" spc="-1" baseline="30000" dirty="0" err="1">
               <a:solidFill>
                 <a:srgbClr val="003056"/>
               </a:solidFill>
@@ -36280,29 +36340,70 @@
               <a:buChar char="•"/>
             </a:pPr>
             <a:r>
-              <a:rPr lang="en-US" sz="1800" b="1" spc="-1" dirty="0">
-                <a:solidFill>
-                  <a:srgbClr val="003056"/>
-                </a:solidFill>
-                <a:latin typeface="Calibri"/>
-              </a:rPr>
-              <a:t>Keys come from decoder tokens, </a:t>
-            </a:r>
-            <a:r>
               <a:rPr lang="en-US" sz="1800" b="1" spc="-1">
                 <a:solidFill>
                   <a:srgbClr val="003056"/>
                 </a:solidFill>
                 <a:latin typeface="Calibri"/>
               </a:rPr>
-              <a:t>queries/values from encoder tokens</a:t>
-            </a:r>
-            <a:endParaRPr lang="en-US" sz="1800" b="1" spc="-1" dirty="0">
+              <a:t>Queries come from decoder tokens, keys/values from encoder tokens </a:t>
+            </a:r>
+            <a:endParaRPr lang="en-US" sz="1800" spc="-1" dirty="0">
               <a:solidFill>
                 <a:srgbClr val="003056"/>
               </a:solidFill>
               <a:latin typeface="Calibri"/>
             </a:endParaRPr>
+          </a:p>
+          <a:p>
+            <a:pPr marL="514350" lvl="1" indent="0">
+              <a:lnSpc>
+                <a:spcPct val="100000"/>
+              </a:lnSpc>
+              <a:spcBef>
+                <a:spcPts val="320"/>
+              </a:spcBef>
+              <a:buClr>
+                <a:srgbClr val="003056"/>
+              </a:buClr>
+              <a:buNone/>
+            </a:pPr>
+            <a:r>
+              <a:rPr lang="en-US" sz="1800" spc="-1">
+                <a:solidFill>
+                  <a:srgbClr val="003056"/>
+                </a:solidFill>
+                <a:latin typeface="Calibri"/>
+              </a:rPr>
+              <a:t>     (see "encoder-decoder attention" in</a:t>
+            </a:r>
+            <a:endParaRPr lang="en-US">
+              <a:solidFill>
+                <a:srgbClr val="000000"/>
+              </a:solidFill>
+              <a:latin typeface="Arial"/>
+            </a:endParaRPr>
+          </a:p>
+          <a:p>
+            <a:pPr marL="514350" lvl="1" indent="0">
+              <a:lnSpc>
+                <a:spcPct val="100000"/>
+              </a:lnSpc>
+              <a:spcBef>
+                <a:spcPts val="320"/>
+              </a:spcBef>
+              <a:buNone/>
+            </a:pPr>
+            <a:r>
+              <a:rPr lang="en-US" sz="1800" spc="-1">
+                <a:solidFill>
+                  <a:srgbClr val="003056"/>
+                </a:solidFill>
+                <a:latin typeface="Calibri"/>
+              </a:rPr>
+              <a:t>      original transformer paper)</a:t>
+            </a:r>
+            <a:endParaRPr lang="en-US"/>
           </a:p>
           <a:p>
             <a:pPr marL="399415" indent="-342900">
@@ -36758,26 +36859,39 @@
                                   </p:childTnLst>
                                 </p:cTn>
                               </p:par>
-                            </p:childTnLst>
-                          </p:cTn>
-                        </p:par>
-                      </p:childTnLst>
-                    </p:cTn>
-                  </p:par>
-                  <p:par>
-                    <p:cTn id="19" fill="hold">
-                      <p:stCondLst>
-                        <p:cond delay="indefinite"/>
-                      </p:stCondLst>
-                      <p:childTnLst>
-                        <p:par>
-                          <p:cTn id="20" fill="hold">
-                            <p:stCondLst>
-                              <p:cond delay="0"/>
-                            </p:stCondLst>
-                            <p:childTnLst>
                               <p:par>
-                                <p:cTn id="21" presetID="1" presetClass="entr" presetSubtype="0" fill="hold" grpId="0" nodeType="clickEffect">
+                                <p:cTn id="19" presetID="1" presetClass="entr" presetSubtype="0" fill="hold" grpId="0" nodeType="withEffect">
+                                  <p:stCondLst>
+                                    <p:cond delay="0"/>
+                                  </p:stCondLst>
+                                  <p:childTnLst>
+                                    <p:set>
+                                      <p:cBhvr>
+                                        <p:cTn id="20" dur="1" fill="hold">
+                                          <p:stCondLst>
+                                            <p:cond delay="0"/>
+                                          </p:stCondLst>
+                                        </p:cTn>
+                                        <p:tgtEl>
+                                          <p:spTgt spid="181">
+                                            <p:txEl>
+                                              <p:pRg st="5" end="5"/>
+                                            </p:txEl>
+                                          </p:spTgt>
+                                        </p:tgtEl>
+                                        <p:attrNameLst>
+                                          <p:attrName>style.visibility</p:attrName>
+                                        </p:attrNameLst>
+                                      </p:cBhvr>
+                                      <p:to>
+                                        <p:strVal val="visible"/>
+                                      </p:to>
+                                    </p:set>
+                                  </p:childTnLst>
+                                </p:cTn>
+                              </p:par>
+                              <p:par>
+                                <p:cTn id="21" presetID="1" presetClass="entr" presetSubtype="0" fill="hold" grpId="0" nodeType="withEffect">
                                   <p:stCondLst>
                                     <p:cond delay="0"/>
                                   </p:stCondLst>
@@ -36792,7 +36906,7 @@
                                         <p:tgtEl>
                                           <p:spTgt spid="181">
                                             <p:txEl>
-                                              <p:pRg st="5" end="5"/>
+                                              <p:pRg st="6" end="6"/>
                                             </p:txEl>
                                           </p:spTgt>
                                         </p:tgtEl>
@@ -36807,39 +36921,26 @@
                                   </p:childTnLst>
                                 </p:cTn>
                               </p:par>
+                            </p:childTnLst>
+                          </p:cTn>
+                        </p:par>
+                      </p:childTnLst>
+                    </p:cTn>
+                  </p:par>
+                  <p:par>
+                    <p:cTn id="23" fill="hold">
+                      <p:stCondLst>
+                        <p:cond delay="indefinite"/>
+                      </p:stCondLst>
+                      <p:childTnLst>
+                        <p:par>
+                          <p:cTn id="24" fill="hold">
+                            <p:stCondLst>
+                              <p:cond delay="0"/>
+                            </p:stCondLst>
+                            <p:childTnLst>
                               <p:par>
-                                <p:cTn id="23" presetID="1" presetClass="entr" presetSubtype="0" fill="hold" grpId="0" nodeType="withEffect">
-                                  <p:stCondLst>
-                                    <p:cond delay="0"/>
-                                  </p:stCondLst>
-                                  <p:childTnLst>
-                                    <p:set>
-                                      <p:cBhvr>
-                                        <p:cTn id="24" dur="1" fill="hold">
-                                          <p:stCondLst>
-                                            <p:cond delay="0"/>
-                                          </p:stCondLst>
-                                        </p:cTn>
-                                        <p:tgtEl>
-                                          <p:spTgt spid="181">
-                                            <p:txEl>
-                                              <p:pRg st="6" end="6"/>
-                                            </p:txEl>
-                                          </p:spTgt>
-                                        </p:tgtEl>
-                                        <p:attrNameLst>
-                                          <p:attrName>style.visibility</p:attrName>
-                                        </p:attrNameLst>
-                                      </p:cBhvr>
-                                      <p:to>
-                                        <p:strVal val="visible"/>
-                                      </p:to>
-                                    </p:set>
-                                  </p:childTnLst>
-                                </p:cTn>
-                              </p:par>
-                              <p:par>
-                                <p:cTn id="25" presetID="1" presetClass="entr" presetSubtype="0" fill="hold" grpId="0" nodeType="withEffect">
+                                <p:cTn id="25" presetID="1" presetClass="entr" presetSubtype="0" fill="hold" grpId="0" nodeType="clickEffect">
                                   <p:stCondLst>
                                     <p:cond delay="0"/>
                                   </p:stCondLst>
@@ -36917,6 +37018,68 @@
                                           <p:spTgt spid="181">
                                             <p:txEl>
                                               <p:pRg st="9" end="9"/>
+                                            </p:txEl>
+                                          </p:spTgt>
+                                        </p:tgtEl>
+                                        <p:attrNameLst>
+                                          <p:attrName>style.visibility</p:attrName>
+                                        </p:attrNameLst>
+                                      </p:cBhvr>
+                                      <p:to>
+                                        <p:strVal val="visible"/>
+                                      </p:to>
+                                    </p:set>
+                                  </p:childTnLst>
+                                </p:cTn>
+                              </p:par>
+                              <p:par>
+                                <p:cTn id="31" presetID="1" presetClass="entr" presetSubtype="0" fill="hold" grpId="0" nodeType="withEffect">
+                                  <p:stCondLst>
+                                    <p:cond delay="0"/>
+                                  </p:stCondLst>
+                                  <p:childTnLst>
+                                    <p:set>
+                                      <p:cBhvr>
+                                        <p:cTn id="32" dur="1" fill="hold">
+                                          <p:stCondLst>
+                                            <p:cond delay="0"/>
+                                          </p:stCondLst>
+                                        </p:cTn>
+                                        <p:tgtEl>
+                                          <p:spTgt spid="181">
+                                            <p:txEl>
+                                              <p:pRg st="10" end="10"/>
+                                            </p:txEl>
+                                          </p:spTgt>
+                                        </p:tgtEl>
+                                        <p:attrNameLst>
+                                          <p:attrName>style.visibility</p:attrName>
+                                        </p:attrNameLst>
+                                      </p:cBhvr>
+                                      <p:to>
+                                        <p:strVal val="visible"/>
+                                      </p:to>
+                                    </p:set>
+                                  </p:childTnLst>
+                                </p:cTn>
+                              </p:par>
+                              <p:par>
+                                <p:cTn id="33" presetID="1" presetClass="entr" presetSubtype="0" fill="hold" grpId="0" nodeType="withEffect">
+                                  <p:stCondLst>
+                                    <p:cond delay="0"/>
+                                  </p:stCondLst>
+                                  <p:childTnLst>
+                                    <p:set>
+                                      <p:cBhvr>
+                                        <p:cTn id="34" dur="1" fill="hold">
+                                          <p:stCondLst>
+                                            <p:cond delay="0"/>
+                                          </p:stCondLst>
+                                        </p:cTn>
+                                        <p:tgtEl>
+                                          <p:spTgt spid="181">
+                                            <p:txEl>
+                                              <p:pRg st="11" end="11"/>
                                             </p:txEl>
                                           </p:spTgt>
                                         </p:tgtEl>
@@ -48512,13 +48675,31 @@
               <a:t>Attention scores: </a:t>
             </a:r>
             <a:r>
-              <a:rPr lang="en-US" sz="2000" b="0" strike="noStrike" spc="-1" dirty="0">
-                <a:solidFill>
-                  <a:srgbClr val="003056"/>
-                </a:solidFill>
-                <a:latin typeface="Calibri"/>
-              </a:rPr>
-              <a:t>how relevant each input is to encoder’s last state</a:t>
+              <a:rPr lang="en-US" sz="2000" b="0" strike="noStrike" spc="-1">
+                <a:solidFill>
+                  <a:srgbClr val="003056"/>
+                </a:solidFill>
+                <a:latin typeface="Calibri"/>
+              </a:rPr>
+              <a:t>how relevant each input is to </a:t>
+            </a:r>
+            <a:r>
+              <a:rPr lang="en-US" sz="2000" spc="-1">
+                <a:solidFill>
+                  <a:srgbClr val="003056"/>
+                </a:solidFill>
+                <a:latin typeface="Calibri"/>
+              </a:rPr>
+              <a:t>decoder’s</a:t>
+            </a:r>
+            <a:r>
+              <a:rPr lang="en-US" sz="2000" b="0" strike="noStrike" spc="-1">
+                <a:solidFill>
+                  <a:srgbClr val="003056"/>
+                </a:solidFill>
+                <a:latin typeface="Calibri"/>
+              </a:rPr>
+              <a:t> last state</a:t>
             </a:r>
             <a:endParaRPr lang="de-DE" sz="2000" b="0" strike="noStrike" spc="-1">
               <a:solidFill>
